--- a/slides/datasets-in-10-minutes-wikifact.pptx
+++ b/slides/datasets-in-10-minutes-wikifact.pptx
@@ -6,7 +6,6 @@
   </p:sldMasterIdLst>
   <p:sldIdLst>
     <p:sldId id="256" r:id="rId6"/>
-    <p:sldId id="257" r:id="rId7"/>
     <p:sldId id="258" r:id="rId8"/>
     <p:sldId id="259" r:id="rId9"/>
     <p:sldId id="260" r:id="rId10"/>
@@ -14,22 +13,16 @@
     <p:sldId id="262" r:id="rId4"/>
     <p:sldId id="263" r:id="rId3"/>
     <p:sldId id="264" r:id="rId2"/>
-    <p:sldId id="265" r:id="rId15"/>
-    <p:sldId id="266" r:id="rId16"/>
     <p:sldId id="267" r:id="rId17"/>
     <p:sldId id="268" r:id="rId18"/>
     <p:sldId id="269" r:id="rId19"/>
     <p:sldId id="270" r:id="rId20"/>
     <p:sldId id="271" r:id="rId21"/>
-    <p:sldId id="272" r:id="rId22"/>
     <p:sldId id="273" r:id="rId23"/>
-    <p:sldId id="274" r:id="rId24"/>
-    <p:sldId id="275" r:id="rId25"/>
-    <p:sldId id="276" r:id="rId26"/>
-    <p:sldId id="277" r:id="rId27"/>
+    <p:sldId id="265" r:id="rId15"/>
+    <p:sldId id="266" r:id="rId16"/>
     <p:sldId id="278" r:id="rId28"/>
     <p:sldId id="279" r:id="rId29"/>
-    <p:sldId id="280" r:id="rId30"/>
     <p:sldId id="281" r:id="rId31"/>
     <p:sldId id="282" r:id="rId32"/>
     <p:sldId id="283" r:id="rId33"/>
@@ -47,12 +40,8 @@
     <p:sldId id="295" r:id="rId45"/>
     <p:sldId id="296" r:id="rId46"/>
     <p:sldId id="297" r:id="rId47"/>
-    <p:sldId id="298" r:id="rId48"/>
-    <p:sldId id="299" r:id="rId49"/>
-    <p:sldId id="300" r:id="rId50"/>
     <p:sldId id="301" r:id="rId51"/>
     <p:sldId id="304" r:id="rId54"/>
-    <p:sldId id="305" r:id="rId55"/>
     <p:sldId id="306" r:id="rId56"/>
     <p:sldId id="307" r:id="rId57"/>
   </p:sldIdLst>
@@ -7380,7 +7369,7 @@
                 <a:ea typeface="Noto Sans CJK JP"/>
                 <a:cs typeface="Noto Sans"/>
               </a:rPr>
-              <a:t>候補を五つ作り、対数確率で順位を付ける</a:t>
+              <a:t>参照のいずれかに一致すれば正解になる</a:t>
             </a:r>
           </a:p>
         </p:txBody>
@@ -7428,7 +7417,7 @@
                 <a:ea typeface="Noto Sans CJK JP"/>
                 <a:cs typeface="Noto Sans"/>
               </a:rPr>
-              <a:t>1. 事実を文の続きで答える</a:t>
+              <a:t>3. 参照回答に一致するかを評価する</a:t>
             </a:r>
           </a:p>
         </p:txBody>
@@ -7482,7 +7471,7 @@
                 <a:ea typeface="Noto Sans CJK JP"/>
                 <a:cs typeface="Noto Sans"/>
               </a:rPr>
-              <a:t>HELMでは、1問当たり5候補を生成する設定を使う。出力の対数確率の和で並べ、最上位の候補をAccuracy@1で採点する。</a:t>
+              <a:t>生成した名前が、参照回答のいずれかに一致した割合で正答率を求める。照合では英字の大小、冠詞、句読点、余分な空白をならす。</a:t>
             </a:r>
           </a:p>
           <a:p>
@@ -7510,7 +7499,7 @@
                 <a:ea typeface="Noto Sans CJK JP"/>
                 <a:cs typeface="Noto Sans"/>
               </a:rPr>
-              <a:t>Accuracy@5では、最大5候補のどれかが参照回答に一致すれば正解。文字列を小文字化し、冠詞・句読点・余分な空白を除いて照合する。</a:t>
+              <a:t>一つの答えだけを見るAccuracy@1と、複数候補のどれかが合えばよいAccuracy@Kでは、正解とする条件が変わる。次の出力例では、先頭候補と5候補全体を比べる。</a:t>
             </a:r>
           </a:p>
         </p:txBody>
@@ -7564,7 +7553,7 @@
                 <a:ea typeface="Noto Sans CJK JP"/>
                 <a:cs typeface="Noto Sans"/>
               </a:rPr>
-              <a:t>[1] Stanford CRFM. HELM evaluate_reference_metrics。 </a:t>
+              <a:t>[1] Stanford CRFM. evaluate_reference_metrics。 </a:t>
             </a:r>
           </a:p>
           <a:p>
@@ -7656,7 +7645,7 @@
                 <a:ea typeface="Noto Sans CJK JP"/>
                 <a:cs typeface="Noto Sans"/>
               </a:rPr>
-              <a:t>実例3の公開モデル出力と採点</a:t>
+              <a:t>略称が、参照回答に含まれない場合</a:t>
             </a:r>
           </a:p>
         </p:txBody>
@@ -7704,7 +7693,7 @@
                 <a:ea typeface="Noto Sans CJK JP"/>
                 <a:cs typeface="Noto Sans"/>
               </a:rPr>
-              <a:t>1. 事実を文の続きで答える</a:t>
+              <a:t>3. 参照回答に一致するかを評価する</a:t>
             </a:r>
           </a:p>
         </p:txBody>
@@ -8731,7 +8720,7 @@
                 <a:ea typeface="Noto Sans CJK JP"/>
                 <a:cs typeface="Noto Sans"/>
               </a:rPr>
-              <a:t>text-davinci-003、第1試行。@1は0、@5は1（USLは参照にない）。</a:t>
+              <a:t>2023年の公開出力例（text-davinci-003）。先頭候補は不一致、5候補の中には一致する答えがある。</a:t>
             </a:r>
           </a:p>
         </p:txBody>
@@ -8785,7 +8774,7 @@
                 <a:ea typeface="Noto Sans CJK JP"/>
                 <a:cs typeface="Noto Sans"/>
               </a:rPr>
-              <a:t>[1] Stanford CRFM. HELM Classic v0.4.0 — WikiFact（2023）。 </a:t>
+              <a:t>[1] Stanford CRFM (2023). WikiFact — 公開入力・参照回答。 </a:t>
             </a:r>
             <a:r>
               <a:rPr sz="810" b="0" lang="ja-JP" altLang="en-US">
@@ -9118,7 +9107,7 @@
                 <a:ea typeface="Noto Sans CJK JP"/>
                 <a:cs typeface="Noto Sans"/>
               </a:rPr>
-              <a:t>HELMではより幅広い知識を対象にするため、法律・経済・生物医学などの関係とテンプレートを手で選び、WikiFactを作った。</a:t>
+              <a:t>WikiFactでは対象を法律・経済・生物医学などへ広げ、関係と英語テンプレートを人手で選んだ。</a:t>
             </a:r>
           </a:p>
         </p:txBody>
@@ -11966,920 +11955,6 @@
 </p:sld>
 </file>
 
-<file path=ppt/slides/slide17.xml><?xml version="1.0" encoding="utf-8"?>
-<p:sld xmlns:a="http://schemas.openxmlformats.org/drawingml/2006/main" xmlns:p="http://schemas.openxmlformats.org/presentationml/2006/main" xmlns:r="http://schemas.openxmlformats.org/officeDocument/2006/relationships">
-  <p:cSld>
-    <p:spTree>
-      <p:nvGrpSpPr>
-        <p:cNvPr id="1" name=""/>
-        <p:cNvGrpSpPr/>
-        <p:nvPr/>
-      </p:nvGrpSpPr>
-      <p:grpSpPr/>
-      <p:sp>
-        <p:nvSpPr>
-          <p:cNvPr id="2" name="Title 1"/>
-          <p:cNvSpPr>
-            <a:spLocks noGrp="1"/>
-          </p:cNvSpPr>
-          <p:nvPr>
-            <p:ph type="title"/>
-          </p:nvPr>
-        </p:nvSpPr>
-        <p:spPr>
-          <a:xfrm>
-            <a:off x="468172" y="650138"/>
-            <a:ext cx="8206740" cy="616305"/>
-          </a:xfrm>
-        </p:spPr>
-        <p:txBody>
-          <a:bodyPr wrap="square" lIns="0" rIns="0" tIns="0" bIns="0">
-            <a:noAutofit/>
-          </a:bodyPr>
-          <a:lstStyle/>
-          <a:p>
-            <a:pPr algn="l">
-              <a:lnSpc>
-                <a:spcPct val="110000"/>
-              </a:lnSpc>
-              <a:buNone/>
-              <a:defRPr sz="2800" b="0">
-                <a:solidFill>
-                  <a:srgbClr val="303437"/>
-                </a:solidFill>
-                <a:latin typeface="Noto Sans"/>
-              </a:defRPr>
-            </a:pPr>
-            <a:r>
-              <a:rPr sz="2800" b="1" lang="ja-JP" altLang="en-US">
-                <a:solidFill>
-                  <a:srgbClr val="303437"/>
-                </a:solidFill>
-                <a:latin typeface="Noto Sans"/>
-                <a:ea typeface="Noto Sans CJK JP"/>
-                <a:cs typeface="Noto Sans"/>
-              </a:rPr>
-              <a:t>Classicの公開実行は10関係を含む</a:t>
-            </a:r>
-          </a:p>
-        </p:txBody>
-      </p:sp>
-      <p:sp>
-        <p:nvSpPr>
-          <p:cNvPr id="3" name="Title 2"/>
-          <p:cNvSpPr>
-            <a:spLocks noGrp="1"/>
-          </p:cNvSpPr>
-          <p:nvPr>
-            <p:ph type="title" idx="2"/>
-          </p:nvPr>
-        </p:nvSpPr>
-        <p:spPr>
-          <a:xfrm>
-            <a:off x="75895" y="0"/>
-            <a:ext cx="8115300" cy="480060"/>
-          </a:xfrm>
-        </p:spPr>
-        <p:txBody>
-          <a:bodyPr wrap="square" lIns="0" rIns="0" tIns="0" bIns="0" anchor="ctr">
-            <a:noAutofit/>
-          </a:bodyPr>
-          <a:lstStyle/>
-          <a:p>
-            <a:pPr algn="l">
-              <a:lnSpc>
-                <a:spcPct val="110000"/>
-              </a:lnSpc>
-              <a:buNone/>
-              <a:defRPr sz="1400" b="0">
-                <a:solidFill>
-                  <a:srgbClr val="303437"/>
-                </a:solidFill>
-                <a:latin typeface="Noto Sans"/>
-              </a:defRPr>
-            </a:pPr>
-            <a:r>
-              <a:rPr sz="1400" b="1" lang="ja-JP" altLang="en-US">
-                <a:solidFill>
-                  <a:srgbClr val="FFFEF8"/>
-                </a:solidFill>
-                <a:latin typeface="Noto Sans"/>
-                <a:ea typeface="Noto Sans CJK JP"/>
-                <a:cs typeface="Noto Sans"/>
-              </a:rPr>
-              <a:t>2. 知識基盤から問題を作る</a:t>
-            </a:r>
-          </a:p>
-        </p:txBody>
-      </p:sp>
-      <p:graphicFrame>
-        <p:nvGraphicFramePr>
-          <p:cNvPr id="4" name="Table 3"/>
-          <p:cNvGraphicFramePr>
-            <a:graphicFrameLocks noGrp="1"/>
-          </p:cNvGraphicFramePr>
-          <p:nvPr/>
-        </p:nvGraphicFramePr>
-        <p:xfrm>
-          <a:off x="548640" y="1508760"/>
-          <a:ext cx="8046720" cy="1828800"/>
-        </p:xfrm>
-        <a:graphic>
-          <a:graphicData uri="http://schemas.openxmlformats.org/drawingml/2006/table">
-            <a:tbl>
-              <a:tblPr firstRow="0" bandRow="0"/>
-              <a:tblGrid>
-                <a:gridCol w="3840480"/>
-                <a:gridCol w="2468880"/>
-                <a:gridCol w="1737360"/>
-              </a:tblGrid>
-              <a:tr h="457200">
-                <a:tc>
-                  <a:txBody>
-                    <a:bodyPr wrap="square">
-                      <a:noAutofit/>
-                    </a:bodyPr>
-                    <a:lstStyle/>
-                    <a:p>
-                      <a:pPr algn="l">
-                        <a:lnSpc>
-                          <a:spcPts val="2415"/>
-                        </a:lnSpc>
-                        <a:buNone/>
-                        <a:defRPr sz="2100" b="0">
-                          <a:solidFill>
-                            <a:srgbClr val="303437"/>
-                          </a:solidFill>
-                          <a:latin typeface="Noto Sans"/>
-                        </a:defRPr>
-                      </a:pPr>
-                      <a:r>
-                        <a:rPr sz="2100" b="0" lang="ja-JP" altLang="en-US">
-                          <a:solidFill>
-                            <a:srgbClr val="303437"/>
-                          </a:solidFill>
-                          <a:latin typeface="Noto Sans"/>
-                          <a:ea typeface="Noto Sans CJK JP"/>
-                          <a:cs typeface="Noto Sans"/>
-                        </a:rPr>
-                        <a:t>関係群</a:t>
-                      </a:r>
-                    </a:p>
-                  </a:txBody>
-                  <a:tcPr marL="63500" marR="63500" marT="38100" marB="38100" anchor="ctr">
-                    <a:lnL w="7620">
-                      <a:noFill/>
-                    </a:lnL>
-                    <a:lnR w="7620">
-                      <a:noFill/>
-                    </a:lnR>
-                    <a:lnT w="15240">
-                      <a:solidFill>
-                        <a:srgbClr val="626669"/>
-                      </a:solidFill>
-                      <a:prstDash val="solid"/>
-                    </a:lnT>
-                    <a:lnB w="7620">
-                      <a:solidFill>
-                        <a:srgbClr val="626669"/>
-                      </a:solidFill>
-                      <a:prstDash val="solid"/>
-                    </a:lnB>
-                    <a:solidFill>
-                      <a:srgbClr val="FFFEF8"/>
-                    </a:solidFill>
-                  </a:tcPr>
-                </a:tc>
-                <a:tc>
-                  <a:txBody>
-                    <a:bodyPr wrap="square">
-                      <a:noAutofit/>
-                    </a:bodyPr>
-                    <a:lstStyle/>
-                    <a:p>
-                      <a:pPr algn="r">
-                        <a:lnSpc>
-                          <a:spcPts val="2415"/>
-                        </a:lnSpc>
-                        <a:buNone/>
-                        <a:defRPr sz="2100" b="0">
-                          <a:solidFill>
-                            <a:srgbClr val="303437"/>
-                          </a:solidFill>
-                          <a:latin typeface="Noto Sans"/>
-                        </a:defRPr>
-                      </a:pPr>
-                      <a:r>
-                        <a:rPr sz="2100" b="0" lang="ja-JP" altLang="en-US">
-                          <a:solidFill>
-                            <a:srgbClr val="303437"/>
-                          </a:solidFill>
-                          <a:latin typeface="Noto Sans"/>
-                          <a:ea typeface="Noto Sans CJK JP"/>
-                          <a:cs typeface="Noto Sans"/>
-                        </a:rPr>
-                        <a:t>test件数／関係</a:t>
-                      </a:r>
-                    </a:p>
-                  </a:txBody>
-                  <a:tcPr marL="63500" marR="63500" marT="38100" marB="38100" anchor="ctr">
-                    <a:lnL w="7620">
-                      <a:noFill/>
-                    </a:lnL>
-                    <a:lnR w="7620">
-                      <a:noFill/>
-                    </a:lnR>
-                    <a:lnT w="15240">
-                      <a:solidFill>
-                        <a:srgbClr val="626669"/>
-                      </a:solidFill>
-                      <a:prstDash val="solid"/>
-                    </a:lnT>
-                    <a:lnB w="7620">
-                      <a:solidFill>
-                        <a:srgbClr val="626669"/>
-                      </a:solidFill>
-                      <a:prstDash val="solid"/>
-                    </a:lnB>
-                    <a:solidFill>
-                      <a:srgbClr val="FFFEF8"/>
-                    </a:solidFill>
-                  </a:tcPr>
-                </a:tc>
-                <a:tc>
-                  <a:txBody>
-                    <a:bodyPr wrap="square">
-                      <a:noAutofit/>
-                    </a:bodyPr>
-                    <a:lstStyle/>
-                    <a:p>
-                      <a:pPr algn="r">
-                        <a:lnSpc>
-                          <a:spcPts val="2415"/>
-                        </a:lnSpc>
-                        <a:buNone/>
-                        <a:defRPr sz="2100" b="0">
-                          <a:solidFill>
-                            <a:srgbClr val="303437"/>
-                          </a:solidFill>
-                          <a:latin typeface="Noto Sans"/>
-                        </a:defRPr>
-                      </a:pPr>
-                      <a:r>
-                        <a:rPr sz="2100" b="0" lang="ja-JP" altLang="en-US">
-                          <a:solidFill>
-                            <a:srgbClr val="303437"/>
-                          </a:solidFill>
-                          <a:latin typeface="Noto Sans"/>
-                          <a:ea typeface="Noto Sans CJK JP"/>
-                          <a:cs typeface="Noto Sans"/>
-                        </a:rPr>
-                        <a:t>関係数</a:t>
-                      </a:r>
-                    </a:p>
-                  </a:txBody>
-                  <a:tcPr marL="63500" marR="63500" marT="38100" marB="38100" anchor="ctr">
-                    <a:lnL w="7620">
-                      <a:noFill/>
-                    </a:lnL>
-                    <a:lnR w="7620">
-                      <a:noFill/>
-                    </a:lnR>
-                    <a:lnT w="15240">
-                      <a:solidFill>
-                        <a:srgbClr val="626669"/>
-                      </a:solidFill>
-                      <a:prstDash val="solid"/>
-                    </a:lnT>
-                    <a:lnB w="7620">
-                      <a:solidFill>
-                        <a:srgbClr val="626669"/>
-                      </a:solidFill>
-                      <a:prstDash val="solid"/>
-                    </a:lnB>
-                    <a:solidFill>
-                      <a:srgbClr val="FFFEF8"/>
-                    </a:solidFill>
-                  </a:tcPr>
-                </a:tc>
-              </a:tr>
-              <a:tr h="457200">
-                <a:tc>
-                  <a:txBody>
-                    <a:bodyPr wrap="square">
-                      <a:noAutofit/>
-                    </a:bodyPr>
-                    <a:lstStyle/>
-                    <a:p>
-                      <a:pPr algn="l">
-                        <a:lnSpc>
-                          <a:spcPts val="2415"/>
-                        </a:lnSpc>
-                        <a:buNone/>
-                        <a:defRPr sz="2100" b="0">
-                          <a:solidFill>
-                            <a:srgbClr val="303437"/>
-                          </a:solidFill>
-                          <a:latin typeface="Noto Sans"/>
-                        </a:defRPr>
-                      </a:pPr>
-                      <a:r>
-                        <a:rPr sz="2100" b="0" lang="ja-JP" altLang="en-US">
-                          <a:solidFill>
-                            <a:srgbClr val="303437"/>
-                          </a:solidFill>
-                          <a:latin typeface="Noto Sans"/>
-                          <a:ea typeface="Noto Sans CJK JP"/>
-                          <a:cs typeface="Noto Sans"/>
-                        </a:rPr>
-                        <a:t>著者・通貨など</a:t>
-                      </a:r>
-                    </a:p>
-                  </a:txBody>
-                  <a:tcPr marL="63500" marR="63500" marT="38100" marB="38100" anchor="ctr">
-                    <a:lnL w="7620">
-                      <a:noFill/>
-                    </a:lnL>
-                    <a:lnR w="7620">
-                      <a:noFill/>
-                    </a:lnR>
-                    <a:lnT w="7620">
-                      <a:solidFill>
-                        <a:srgbClr val="626669"/>
-                      </a:solidFill>
-                      <a:prstDash val="solid"/>
-                    </a:lnT>
-                    <a:lnB w="7620">
-                      <a:noFill/>
-                    </a:lnB>
-                    <a:solidFill>
-                      <a:srgbClr val="FFFEF8"/>
-                    </a:solidFill>
-                  </a:tcPr>
-                </a:tc>
-                <a:tc>
-                  <a:txBody>
-                    <a:bodyPr wrap="square">
-                      <a:noAutofit/>
-                    </a:bodyPr>
-                    <a:lstStyle/>
-                    <a:p>
-                      <a:pPr algn="r">
-                        <a:lnSpc>
-                          <a:spcPts val="2415"/>
-                        </a:lnSpc>
-                        <a:buNone/>
-                        <a:defRPr sz="2100" b="0">
-                          <a:solidFill>
-                            <a:srgbClr val="303437"/>
-                          </a:solidFill>
-                          <a:latin typeface="Noto Sans"/>
-                        </a:defRPr>
-                      </a:pPr>
-                      <a:r>
-                        <a:rPr sz="2100" b="0" lang="ja-JP" altLang="en-US">
-                          <a:solidFill>
-                            <a:srgbClr val="303437"/>
-                          </a:solidFill>
-                          <a:latin typeface="Noto Sans"/>
-                          <a:ea typeface="Noto Sans CJK JP"/>
-                          <a:cs typeface="Noto Sans"/>
-                        </a:rPr>
-                        <a:t>850</a:t>
-                      </a:r>
-                    </a:p>
-                  </a:txBody>
-                  <a:tcPr marL="63500" marR="63500" marT="38100" marB="38100" anchor="ctr">
-                    <a:lnL w="7620">
-                      <a:noFill/>
-                    </a:lnL>
-                    <a:lnR w="7620">
-                      <a:noFill/>
-                    </a:lnR>
-                    <a:lnT w="7620">
-                      <a:solidFill>
-                        <a:srgbClr val="626669"/>
-                      </a:solidFill>
-                      <a:prstDash val="solid"/>
-                    </a:lnT>
-                    <a:lnB w="7620">
-                      <a:noFill/>
-                    </a:lnB>
-                    <a:solidFill>
-                      <a:srgbClr val="FFFEF8"/>
-                    </a:solidFill>
-                  </a:tcPr>
-                </a:tc>
-                <a:tc>
-                  <a:txBody>
-                    <a:bodyPr wrap="square">
-                      <a:noAutofit/>
-                    </a:bodyPr>
-                    <a:lstStyle/>
-                    <a:p>
-                      <a:pPr algn="r">
-                        <a:lnSpc>
-                          <a:spcPts val="2415"/>
-                        </a:lnSpc>
-                        <a:buNone/>
-                        <a:defRPr sz="2100" b="0">
-                          <a:solidFill>
-                            <a:srgbClr val="303437"/>
-                          </a:solidFill>
-                          <a:latin typeface="Noto Sans"/>
-                        </a:defRPr>
-                      </a:pPr>
-                      <a:r>
-                        <a:rPr sz="2100" b="0" lang="ja-JP" altLang="en-US">
-                          <a:solidFill>
-                            <a:srgbClr val="303437"/>
-                          </a:solidFill>
-                          <a:latin typeface="Noto Sans"/>
-                          <a:ea typeface="Noto Sans CJK JP"/>
-                          <a:cs typeface="Noto Sans"/>
-                        </a:rPr>
-                        <a:t>8</a:t>
-                      </a:r>
-                    </a:p>
-                  </a:txBody>
-                  <a:tcPr marL="63500" marR="63500" marT="38100" marB="38100" anchor="ctr">
-                    <a:lnL w="7620">
-                      <a:noFill/>
-                    </a:lnL>
-                    <a:lnR w="7620">
-                      <a:noFill/>
-                    </a:lnR>
-                    <a:lnT w="7620">
-                      <a:solidFill>
-                        <a:srgbClr val="626669"/>
-                      </a:solidFill>
-                      <a:prstDash val="solid"/>
-                    </a:lnT>
-                    <a:lnB w="7620">
-                      <a:noFill/>
-                    </a:lnB>
-                    <a:solidFill>
-                      <a:srgbClr val="FFFEF8"/>
-                    </a:solidFill>
-                  </a:tcPr>
-                </a:tc>
-              </a:tr>
-              <a:tr h="457200">
-                <a:tc>
-                  <a:txBody>
-                    <a:bodyPr wrap="square">
-                      <a:noAutofit/>
-                    </a:bodyPr>
-                    <a:lstStyle/>
-                    <a:p>
-                      <a:pPr algn="l">
-                        <a:lnSpc>
-                          <a:spcPts val="2415"/>
-                        </a:lnSpc>
-                        <a:buNone/>
-                        <a:defRPr sz="2100" b="0">
-                          <a:solidFill>
-                            <a:srgbClr val="303437"/>
-                          </a:solidFill>
-                          <a:latin typeface="Noto Sans"/>
-                        </a:defRPr>
-                      </a:pPr>
-                      <a:r>
-                        <a:rPr sz="2100" b="0" lang="ja-JP" altLang="en-US">
-                          <a:solidFill>
-                            <a:srgbClr val="303437"/>
-                          </a:solidFill>
-                          <a:latin typeface="Noto Sans"/>
-                          <a:ea typeface="Noto Sans CJK JP"/>
-                          <a:cs typeface="Noto Sans"/>
-                        </a:rPr>
-                        <a:t>原告</a:t>
-                      </a:r>
-                    </a:p>
-                  </a:txBody>
-                  <a:tcPr marL="63500" marR="63500" marT="38100" marB="38100" anchor="ctr">
-                    <a:lnL w="7620">
-                      <a:noFill/>
-                    </a:lnL>
-                    <a:lnR w="7620">
-                      <a:noFill/>
-                    </a:lnR>
-                    <a:lnT w="7620">
-                      <a:noFill/>
-                    </a:lnT>
-                    <a:lnB w="7620">
-                      <a:noFill/>
-                    </a:lnB>
-                    <a:solidFill>
-                      <a:srgbClr val="FFFEF8"/>
-                    </a:solidFill>
-                  </a:tcPr>
-                </a:tc>
-                <a:tc>
-                  <a:txBody>
-                    <a:bodyPr wrap="square">
-                      <a:noAutofit/>
-                    </a:bodyPr>
-                    <a:lstStyle/>
-                    <a:p>
-                      <a:pPr algn="r">
-                        <a:lnSpc>
-                          <a:spcPts val="2415"/>
-                        </a:lnSpc>
-                        <a:buNone/>
-                        <a:defRPr sz="2100" b="0">
-                          <a:solidFill>
-                            <a:srgbClr val="303437"/>
-                          </a:solidFill>
-                          <a:latin typeface="Noto Sans"/>
-                        </a:defRPr>
-                      </a:pPr>
-                      <a:r>
-                        <a:rPr sz="2100" b="0" lang="ja-JP" altLang="en-US">
-                          <a:solidFill>
-                            <a:srgbClr val="303437"/>
-                          </a:solidFill>
-                          <a:latin typeface="Noto Sans"/>
-                          <a:ea typeface="Noto Sans CJK JP"/>
-                          <a:cs typeface="Noto Sans"/>
-                        </a:rPr>
-                        <a:t>96</a:t>
-                      </a:r>
-                    </a:p>
-                  </a:txBody>
-                  <a:tcPr marL="63500" marR="63500" marT="38100" marB="38100" anchor="ctr">
-                    <a:lnL w="7620">
-                      <a:noFill/>
-                    </a:lnL>
-                    <a:lnR w="7620">
-                      <a:noFill/>
-                    </a:lnR>
-                    <a:lnT w="7620">
-                      <a:noFill/>
-                    </a:lnT>
-                    <a:lnB w="7620">
-                      <a:noFill/>
-                    </a:lnB>
-                    <a:solidFill>
-                      <a:srgbClr val="FFFEF8"/>
-                    </a:solidFill>
-                  </a:tcPr>
-                </a:tc>
-                <a:tc>
-                  <a:txBody>
-                    <a:bodyPr wrap="square">
-                      <a:noAutofit/>
-                    </a:bodyPr>
-                    <a:lstStyle/>
-                    <a:p>
-                      <a:pPr algn="r">
-                        <a:lnSpc>
-                          <a:spcPts val="2415"/>
-                        </a:lnSpc>
-                        <a:buNone/>
-                        <a:defRPr sz="2100" b="0">
-                          <a:solidFill>
-                            <a:srgbClr val="303437"/>
-                          </a:solidFill>
-                          <a:latin typeface="Noto Sans"/>
-                        </a:defRPr>
-                      </a:pPr>
-                      <a:r>
-                        <a:rPr sz="2100" b="0" lang="ja-JP" altLang="en-US">
-                          <a:solidFill>
-                            <a:srgbClr val="303437"/>
-                          </a:solidFill>
-                          <a:latin typeface="Noto Sans"/>
-                          <a:ea typeface="Noto Sans CJK JP"/>
-                          <a:cs typeface="Noto Sans"/>
-                        </a:rPr>
-                        <a:t>1</a:t>
-                      </a:r>
-                    </a:p>
-                  </a:txBody>
-                  <a:tcPr marL="63500" marR="63500" marT="38100" marB="38100" anchor="ctr">
-                    <a:lnL w="7620">
-                      <a:noFill/>
-                    </a:lnL>
-                    <a:lnR w="7620">
-                      <a:noFill/>
-                    </a:lnR>
-                    <a:lnT w="7620">
-                      <a:noFill/>
-                    </a:lnT>
-                    <a:lnB w="7620">
-                      <a:noFill/>
-                    </a:lnB>
-                    <a:solidFill>
-                      <a:srgbClr val="FFFEF8"/>
-                    </a:solidFill>
-                  </a:tcPr>
-                </a:tc>
-              </a:tr>
-              <a:tr h="457200">
-                <a:tc>
-                  <a:txBody>
-                    <a:bodyPr wrap="square">
-                      <a:noAutofit/>
-                    </a:bodyPr>
-                    <a:lstStyle/>
-                    <a:p>
-                      <a:pPr algn="l">
-                        <a:lnSpc>
-                          <a:spcPts val="2415"/>
-                        </a:lnSpc>
-                        <a:buNone/>
-                        <a:defRPr sz="2100" b="0">
-                          <a:solidFill>
-                            <a:srgbClr val="303437"/>
-                          </a:solidFill>
-                          <a:latin typeface="Noto Sans"/>
-                        </a:defRPr>
-                      </a:pPr>
-                      <a:r>
-                        <a:rPr sz="2100" b="0" lang="ja-JP" altLang="en-US">
-                          <a:solidFill>
-                            <a:srgbClr val="303437"/>
-                          </a:solidFill>
-                          <a:latin typeface="Noto Sans"/>
-                          <a:ea typeface="Noto Sans CJK JP"/>
-                          <a:cs typeface="Noto Sans"/>
-                        </a:rPr>
-                        <a:t>症状・徴候</a:t>
-                      </a:r>
-                    </a:p>
-                  </a:txBody>
-                  <a:tcPr marL="63500" marR="63500" marT="38100" marB="38100" anchor="ctr">
-                    <a:lnL w="7620">
-                      <a:noFill/>
-                    </a:lnL>
-                    <a:lnR w="7620">
-                      <a:noFill/>
-                    </a:lnR>
-                    <a:lnT w="7620">
-                      <a:noFill/>
-                    </a:lnT>
-                    <a:lnB w="15240">
-                      <a:solidFill>
-                        <a:srgbClr val="626669"/>
-                      </a:solidFill>
-                      <a:prstDash val="solid"/>
-                    </a:lnB>
-                    <a:solidFill>
-                      <a:srgbClr val="FFFEF8"/>
-                    </a:solidFill>
-                  </a:tcPr>
-                </a:tc>
-                <a:tc>
-                  <a:txBody>
-                    <a:bodyPr wrap="square">
-                      <a:noAutofit/>
-                    </a:bodyPr>
-                    <a:lstStyle/>
-                    <a:p>
-                      <a:pPr algn="r">
-                        <a:lnSpc>
-                          <a:spcPts val="2415"/>
-                        </a:lnSpc>
-                        <a:buNone/>
-                        <a:defRPr sz="2100" b="0">
-                          <a:solidFill>
-                            <a:srgbClr val="303437"/>
-                          </a:solidFill>
-                          <a:latin typeface="Noto Sans"/>
-                        </a:defRPr>
-                      </a:pPr>
-                      <a:r>
-                        <a:rPr sz="2100" b="0" lang="ja-JP" altLang="en-US">
-                          <a:solidFill>
-                            <a:srgbClr val="303437"/>
-                          </a:solidFill>
-                          <a:latin typeface="Noto Sans"/>
-                          <a:ea typeface="Noto Sans CJK JP"/>
-                          <a:cs typeface="Noto Sans"/>
-                        </a:rPr>
-                        <a:t>566</a:t>
-                      </a:r>
-                    </a:p>
-                  </a:txBody>
-                  <a:tcPr marL="63500" marR="63500" marT="38100" marB="38100" anchor="ctr">
-                    <a:lnL w="7620">
-                      <a:noFill/>
-                    </a:lnL>
-                    <a:lnR w="7620">
-                      <a:noFill/>
-                    </a:lnR>
-                    <a:lnT w="7620">
-                      <a:noFill/>
-                    </a:lnT>
-                    <a:lnB w="15240">
-                      <a:solidFill>
-                        <a:srgbClr val="626669"/>
-                      </a:solidFill>
-                      <a:prstDash val="solid"/>
-                    </a:lnB>
-                    <a:solidFill>
-                      <a:srgbClr val="FFFEF8"/>
-                    </a:solidFill>
-                  </a:tcPr>
-                </a:tc>
-                <a:tc>
-                  <a:txBody>
-                    <a:bodyPr wrap="square">
-                      <a:noAutofit/>
-                    </a:bodyPr>
-                    <a:lstStyle/>
-                    <a:p>
-                      <a:pPr algn="r">
-                        <a:lnSpc>
-                          <a:spcPts val="2415"/>
-                        </a:lnSpc>
-                        <a:buNone/>
-                        <a:defRPr sz="2100" b="0">
-                          <a:solidFill>
-                            <a:srgbClr val="303437"/>
-                          </a:solidFill>
-                          <a:latin typeface="Noto Sans"/>
-                        </a:defRPr>
-                      </a:pPr>
-                      <a:r>
-                        <a:rPr sz="2100" b="0" lang="ja-JP" altLang="en-US">
-                          <a:solidFill>
-                            <a:srgbClr val="303437"/>
-                          </a:solidFill>
-                          <a:latin typeface="Noto Sans"/>
-                          <a:ea typeface="Noto Sans CJK JP"/>
-                          <a:cs typeface="Noto Sans"/>
-                        </a:rPr>
-                        <a:t>1</a:t>
-                      </a:r>
-                    </a:p>
-                  </a:txBody>
-                  <a:tcPr marL="63500" marR="63500" marT="38100" marB="38100" anchor="ctr">
-                    <a:lnL w="7620">
-                      <a:noFill/>
-                    </a:lnL>
-                    <a:lnR w="7620">
-                      <a:noFill/>
-                    </a:lnR>
-                    <a:lnT w="7620">
-                      <a:noFill/>
-                    </a:lnT>
-                    <a:lnB w="15240">
-                      <a:solidFill>
-                        <a:srgbClr val="626669"/>
-                      </a:solidFill>
-                      <a:prstDash val="solid"/>
-                    </a:lnB>
-                    <a:solidFill>
-                      <a:srgbClr val="FFFEF8"/>
-                    </a:solidFill>
-                  </a:tcPr>
-                </a:tc>
-              </a:tr>
-            </a:tbl>
-          </a:graphicData>
-        </a:graphic>
-      </p:graphicFrame>
-      <p:sp>
-        <p:nvSpPr>
-          <p:cNvPr id="5" name="TextBox 4"/>
-          <p:cNvSpPr txBox="1"/>
-          <p:nvPr/>
-        </p:nvSpPr>
-        <p:spPr>
-          <a:xfrm>
-            <a:off x="594360" y="3538728"/>
-            <a:ext cx="7955279" cy="658368"/>
-          </a:xfrm>
-          <a:prstGeom prst="rect">
-            <a:avLst/>
-          </a:prstGeom>
-          <a:noFill/>
-        </p:spPr>
-        <p:txBody>
-          <a:bodyPr wrap="square" lIns="0" rIns="0" tIns="0" bIns="0">
-            <a:noAutofit/>
-          </a:bodyPr>
-          <a:lstStyle/>
-          <a:p>
-            <a:pPr algn="l">
-              <a:lnSpc>
-                <a:spcPts val="2047"/>
-              </a:lnSpc>
-              <a:spcBef>
-                <a:spcPts val="0"/>
-              </a:spcBef>
-              <a:spcAft>
-                <a:spcPts val="0"/>
-              </a:spcAft>
-              <a:buNone/>
-              <a:defRPr sz="1750" b="0">
-                <a:solidFill>
-                  <a:srgbClr val="303437"/>
-                </a:solidFill>
-                <a:latin typeface="Noto Sans"/>
-              </a:defRPr>
-            </a:pPr>
-            <a:r>
-              <a:rPr sz="1750" b="0" lang="ja-JP" altLang="en-US">
-                <a:solidFill>
-                  <a:srgbClr val="303437"/>
-                </a:solidFill>
-                <a:latin typeface="Noto Sans"/>
-                <a:ea typeface="Noto Sans CJK JP"/>
-                <a:cs typeface="Noto Sans"/>
-              </a:rPr>
-              <a:t>公開テストは計7,462問で、86関係のうち10関係を対象とする。</a:t>
-            </a:r>
-          </a:p>
-        </p:txBody>
-      </p:sp>
-      <p:sp>
-        <p:nvSpPr>
-          <p:cNvPr id="6" name="sources"/>
-          <p:cNvSpPr txBox="1"/>
-          <p:nvPr/>
-        </p:nvSpPr>
-        <p:spPr>
-          <a:xfrm>
-            <a:off x="502920" y="4700016"/>
-            <a:ext cx="8183879" cy="530352"/>
-          </a:xfrm>
-          <a:prstGeom prst="rect">
-            <a:avLst/>
-          </a:prstGeom>
-          <a:noFill/>
-        </p:spPr>
-        <p:txBody>
-          <a:bodyPr wrap="square" lIns="0" rIns="0" tIns="0" bIns="0">
-            <a:noAutofit/>
-          </a:bodyPr>
-          <a:lstStyle/>
-          <a:p>
-            <a:pPr algn="l">
-              <a:lnSpc>
-                <a:spcPts val="940"/>
-              </a:lnSpc>
-              <a:spcBef>
-                <a:spcPts val="0"/>
-              </a:spcBef>
-              <a:spcAft>
-                <a:spcPts val="140"/>
-              </a:spcAft>
-              <a:buNone/>
-              <a:defRPr sz="810" b="0">
-                <a:solidFill>
-                  <a:srgbClr val="303437"/>
-                </a:solidFill>
-                <a:latin typeface="Noto Sans"/>
-              </a:defRPr>
-            </a:pPr>
-            <a:r>
-              <a:rPr sz="810" b="0" lang="ja-JP" altLang="en-US">
-                <a:solidFill>
-                  <a:srgbClr val="626669"/>
-                </a:solidFill>
-                <a:latin typeface="Noto Sans"/>
-                <a:ea typeface="Noto Sans CJK JP"/>
-                <a:cs typeface="Noto Sans"/>
-              </a:rPr>
-              <a:t>[1] Stanford CRFM. HELM Classic v0.4.0 — WikiFact（2023）。 </a:t>
-            </a:r>
-            <a:r>
-              <a:rPr sz="810" b="0" lang="ja-JP" altLang="en-US">
-                <a:solidFill>
-                  <a:srgbClr val="626669"/>
-                </a:solidFill>
-                <a:latin typeface="Noto Sans"/>
-                <a:ea typeface="Noto Sans CJK JP"/>
-                <a:cs typeface="Noto Sans"/>
-              </a:rPr>
-              <a:t>  </a:t>
-            </a:r>
-            <a:r>
-              <a:rPr sz="810" b="0" lang="ja-JP" altLang="en-US">
-                <a:solidFill>
-                  <a:srgbClr val="626669"/>
-                </a:solidFill>
-                <a:latin typeface="Noto Sans"/>
-                <a:ea typeface="Noto Sans CJK JP"/>
-                <a:cs typeface="Noto Sans"/>
-                <a:hlinkClick r:id="rId2"/>
-              </a:rPr>
-              <a:t>https://crfm.stanford.edu/helm/classic/v0.4.0/#/groups/wikifact</a:t>
-            </a:r>
-          </a:p>
-        </p:txBody>
-      </p:sp>
-    </p:spTree>
-  </p:cSld>
-  <p:clrMapOvr>
-    <a:masterClrMapping/>
-  </p:clrMapOvr>
-</p:sld>
-</file>
-
 <file path=ppt/slides/slide18.xml><?xml version="1.0" encoding="utf-8"?>
 <p:sld xmlns:a="http://schemas.openxmlformats.org/drawingml/2006/main" xmlns:p="http://schemas.openxmlformats.org/presentationml/2006/main" xmlns:r="http://schemas.openxmlformats.org/officeDocument/2006/relationships">
   <p:cSld>
@@ -12933,7 +12008,7 @@
                 <a:ea typeface="Noto Sans CJK JP"/>
                 <a:cs typeface="Noto Sans"/>
               </a:rPr>
-              <a:t>HELMの採点と公開成績</a:t>
+              <a:t>参照回答に一致するかを評価する</a:t>
             </a:r>
           </a:p>
         </p:txBody>
@@ -12981,2798 +12056,7 @@
                 <a:ea typeface="Noto Sans CJK JP"/>
                 <a:cs typeface="Noto Sans"/>
               </a:rPr>
-              <a:t>3. HELMの採点と公開成績</a:t>
-            </a:r>
-          </a:p>
-        </p:txBody>
-      </p:sp>
-    </p:spTree>
-  </p:cSld>
-  <p:clrMapOvr>
-    <a:masterClrMapping/>
-  </p:clrMapOvr>
-</p:sld>
-</file>
-
-<file path=ppt/slides/slide19.xml><?xml version="1.0" encoding="utf-8"?>
-<p:sld xmlns:a="http://schemas.openxmlformats.org/drawingml/2006/main" xmlns:p="http://schemas.openxmlformats.org/presentationml/2006/main" xmlns:r="http://schemas.openxmlformats.org/officeDocument/2006/relationships">
-  <p:cSld>
-    <p:spTree>
-      <p:nvGrpSpPr>
-        <p:cNvPr id="1" name=""/>
-        <p:cNvGrpSpPr/>
-        <p:nvPr/>
-      </p:nvGrpSpPr>
-      <p:grpSpPr/>
-      <p:sp>
-        <p:nvSpPr>
-          <p:cNvPr id="2" name="Title 1"/>
-          <p:cNvSpPr>
-            <a:spLocks noGrp="1"/>
-          </p:cNvSpPr>
-          <p:nvPr>
-            <p:ph type="title"/>
-          </p:nvPr>
-        </p:nvSpPr>
-        <p:spPr>
-          <a:xfrm>
-            <a:off x="468172" y="650138"/>
-            <a:ext cx="8206740" cy="616305"/>
-          </a:xfrm>
-        </p:spPr>
-        <p:txBody>
-          <a:bodyPr wrap="square" lIns="0" rIns="0" tIns="0" bIns="0">
-            <a:noAutofit/>
-          </a:bodyPr>
-          <a:lstStyle/>
-          <a:p>
-            <a:pPr algn="l">
-              <a:lnSpc>
-                <a:spcPct val="110000"/>
-              </a:lnSpc>
-              <a:buNone/>
-              <a:defRPr sz="2800" b="0">
-                <a:solidFill>
-                  <a:srgbClr val="303437"/>
-                </a:solidFill>
-                <a:latin typeface="Noto Sans"/>
-              </a:defRPr>
-            </a:pPr>
-            <a:r>
-              <a:rPr sz="2800" b="1" lang="ja-JP" altLang="en-US">
-                <a:solidFill>
-                  <a:srgbClr val="303437"/>
-                </a:solidFill>
-                <a:latin typeface="Noto Sans"/>
-                <a:ea typeface="Noto Sans CJK JP"/>
-                <a:cs typeface="Noto Sans"/>
-              </a:rPr>
-              <a:t>公開結果は、関係ごとの正答率を平均する</a:t>
-            </a:r>
-          </a:p>
-        </p:txBody>
-      </p:sp>
-      <p:sp>
-        <p:nvSpPr>
-          <p:cNvPr id="3" name="Title 2"/>
-          <p:cNvSpPr>
-            <a:spLocks noGrp="1"/>
-          </p:cNvSpPr>
-          <p:nvPr>
-            <p:ph type="title" idx="2"/>
-          </p:nvPr>
-        </p:nvSpPr>
-        <p:spPr>
-          <a:xfrm>
-            <a:off x="75895" y="0"/>
-            <a:ext cx="8115300" cy="480060"/>
-          </a:xfrm>
-        </p:spPr>
-        <p:txBody>
-          <a:bodyPr wrap="square" lIns="0" rIns="0" tIns="0" bIns="0" anchor="ctr">
-            <a:noAutofit/>
-          </a:bodyPr>
-          <a:lstStyle/>
-          <a:p>
-            <a:pPr algn="l">
-              <a:lnSpc>
-                <a:spcPct val="110000"/>
-              </a:lnSpc>
-              <a:buNone/>
-              <a:defRPr sz="1400" b="0">
-                <a:solidFill>
-                  <a:srgbClr val="303437"/>
-                </a:solidFill>
-                <a:latin typeface="Noto Sans"/>
-              </a:defRPr>
-            </a:pPr>
-            <a:r>
-              <a:rPr sz="1400" b="1" lang="ja-JP" altLang="en-US">
-                <a:solidFill>
-                  <a:srgbClr val="FFFEF8"/>
-                </a:solidFill>
-                <a:latin typeface="Noto Sans"/>
-                <a:ea typeface="Noto Sans CJK JP"/>
-                <a:cs typeface="Noto Sans"/>
-              </a:rPr>
-              <a:t>3. HELMの採点と公開成績</a:t>
-            </a:r>
-          </a:p>
-        </p:txBody>
-      </p:sp>
-      <p:sp>
-        <p:nvSpPr>
-          <p:cNvPr id="4" name="TextBox 3"/>
-          <p:cNvSpPr txBox="1"/>
-          <p:nvPr/>
-        </p:nvSpPr>
-        <p:spPr>
-          <a:xfrm>
-            <a:off x="594360" y="1463040"/>
-            <a:ext cx="7955279" cy="3044952"/>
-          </a:xfrm>
-          <a:prstGeom prst="rect">
-            <a:avLst/>
-          </a:prstGeom>
-          <a:noFill/>
-        </p:spPr>
-        <p:txBody>
-          <a:bodyPr wrap="square" lIns="0" rIns="0" tIns="0" bIns="0">
-            <a:noAutofit/>
-          </a:bodyPr>
-          <a:lstStyle/>
-          <a:p>
-            <a:pPr algn="l">
-              <a:lnSpc>
-                <a:spcPts val="2499"/>
-              </a:lnSpc>
-              <a:spcBef>
-                <a:spcPts val="0"/>
-              </a:spcBef>
-              <a:spcAft>
-                <a:spcPts val="1200"/>
-              </a:spcAft>
-              <a:buNone/>
-              <a:defRPr sz="2100" b="0">
-                <a:solidFill>
-                  <a:srgbClr val="303437"/>
-                </a:solidFill>
-                <a:latin typeface="Noto Sans"/>
-              </a:defRPr>
-            </a:pPr>
-            <a:r>
-              <a:rPr sz="2100" b="0" lang="ja-JP" altLang="en-US">
-                <a:solidFill>
-                  <a:srgbClr val="303437"/>
-                </a:solidFill>
-                <a:latin typeface="Noto Sans"/>
-                <a:ea typeface="Noto Sans CJK JP"/>
-                <a:cs typeface="Noto Sans"/>
-              </a:rPr>
-              <a:t>各関係のtestで、最上位候補が参照回答に一致した割合を求める。その後、10関係の正答率を同じ重みで平均する。</a:t>
-            </a:r>
-          </a:p>
-          <a:p>
-            <a:pPr>
-              <a:lnSpc>
-                <a:spcPts val="2499"/>
-              </a:lnSpc>
-              <a:spcAft>
-                <a:spcPts val="0"/>
-              </a:spcAft>
-              <a:buNone/>
-              <a:defRPr sz="2100" b="0">
-                <a:solidFill>
-                  <a:srgbClr val="303437"/>
-                </a:solidFill>
-                <a:latin typeface="Noto Sans"/>
-              </a:defRPr>
-            </a:pPr>
-            <a:r>
-              <a:rPr sz="2100" b="0" lang="ja-JP" altLang="en-US">
-                <a:solidFill>
-                  <a:srgbClr val="303437"/>
-                </a:solidFill>
-                <a:latin typeface="Noto Sans"/>
-                <a:ea typeface="Noto Sans CJK JP"/>
-                <a:cs typeface="Noto Sans"/>
-              </a:rPr>
-              <a:t>96問の原告も、850問の著者も、全体の得点には同じ重みで反映される。</a:t>
-            </a:r>
-          </a:p>
-        </p:txBody>
-      </p:sp>
-      <p:sp>
-        <p:nvSpPr>
-          <p:cNvPr id="5" name="sources"/>
-          <p:cNvSpPr txBox="1"/>
-          <p:nvPr/>
-        </p:nvSpPr>
-        <p:spPr>
-          <a:xfrm>
-            <a:off x="502920" y="4700016"/>
-            <a:ext cx="8183879" cy="530352"/>
-          </a:xfrm>
-          <a:prstGeom prst="rect">
-            <a:avLst/>
-          </a:prstGeom>
-          <a:noFill/>
-        </p:spPr>
-        <p:txBody>
-          <a:bodyPr wrap="square" lIns="0" rIns="0" tIns="0" bIns="0">
-            <a:noAutofit/>
-          </a:bodyPr>
-          <a:lstStyle/>
-          <a:p>
-            <a:pPr algn="l">
-              <a:lnSpc>
-                <a:spcPts val="940"/>
-              </a:lnSpc>
-              <a:spcBef>
-                <a:spcPts val="0"/>
-              </a:spcBef>
-              <a:spcAft>
-                <a:spcPts val="140"/>
-              </a:spcAft>
-              <a:buNone/>
-              <a:defRPr sz="810" b="0">
-                <a:solidFill>
-                  <a:srgbClr val="303437"/>
-                </a:solidFill>
-                <a:latin typeface="Noto Sans"/>
-              </a:defRPr>
-            </a:pPr>
-            <a:r>
-              <a:rPr sz="810" b="0" lang="ja-JP" altLang="en-US">
-                <a:solidFill>
-                  <a:srgbClr val="626669"/>
-                </a:solidFill>
-                <a:latin typeface="Noto Sans"/>
-                <a:ea typeface="Noto Sans CJK JP"/>
-                <a:cs typeface="Noto Sans"/>
-              </a:rPr>
-              <a:t>[1] Stanford CRFM. HELM Classic v0.4.0 — WikiFact（2023）。 </a:t>
-            </a:r>
-            <a:r>
-              <a:rPr sz="810" b="0" lang="ja-JP" altLang="en-US">
-                <a:solidFill>
-                  <a:srgbClr val="626669"/>
-                </a:solidFill>
-                <a:latin typeface="Noto Sans"/>
-                <a:ea typeface="Noto Sans CJK JP"/>
-                <a:cs typeface="Noto Sans"/>
-              </a:rPr>
-              <a:t>  </a:t>
-            </a:r>
-            <a:r>
-              <a:rPr sz="810" b="0" lang="ja-JP" altLang="en-US">
-                <a:solidFill>
-                  <a:srgbClr val="626669"/>
-                </a:solidFill>
-                <a:latin typeface="Noto Sans"/>
-                <a:ea typeface="Noto Sans CJK JP"/>
-                <a:cs typeface="Noto Sans"/>
-                <a:hlinkClick r:id="rId2"/>
-              </a:rPr>
-              <a:t>https://crfm.stanford.edu/helm/classic/v0.4.0/#/groups/wikifact</a:t>
-            </a:r>
-          </a:p>
-        </p:txBody>
-      </p:sp>
-    </p:spTree>
-  </p:cSld>
-  <p:clrMapOvr>
-    <a:masterClrMapping/>
-  </p:clrMapOvr>
-</p:sld>
-</file>
-
-<file path=ppt/slides/slide2.xml><?xml version="1.0" encoding="utf-8"?>
-<p:sld xmlns:a="http://schemas.openxmlformats.org/drawingml/2006/main" xmlns:p="http://schemas.openxmlformats.org/presentationml/2006/main" xmlns:r="http://schemas.openxmlformats.org/officeDocument/2006/relationships">
-  <p:cSld>
-    <p:spTree>
-      <p:nvGrpSpPr>
-        <p:cNvPr id="1" name=""/>
-        <p:cNvGrpSpPr/>
-        <p:nvPr/>
-      </p:nvGrpSpPr>
-      <p:grpSpPr/>
-      <p:sp>
-        <p:nvSpPr>
-          <p:cNvPr id="2" name="Title 1"/>
-          <p:cNvSpPr>
-            <a:spLocks noGrp="1"/>
-          </p:cNvSpPr>
-          <p:nvPr>
-            <p:ph type="title"/>
-          </p:nvPr>
-        </p:nvSpPr>
-        <p:spPr>
-          <a:xfrm>
-            <a:off x="468172" y="650138"/>
-            <a:ext cx="8206740" cy="616305"/>
-          </a:xfrm>
-        </p:spPr>
-        <p:txBody>
-          <a:bodyPr wrap="square" lIns="0" rIns="0" tIns="0" bIns="0">
-            <a:noAutofit/>
-          </a:bodyPr>
-          <a:lstStyle/>
-          <a:p>
-            <a:pPr algn="l">
-              <a:lnSpc>
-                <a:spcPct val="110000"/>
-              </a:lnSpc>
-              <a:buNone/>
-              <a:defRPr sz="2800" b="0">
-                <a:solidFill>
-                  <a:srgbClr val="303437"/>
-                </a:solidFill>
-                <a:latin typeface="Noto Sans"/>
-              </a:defRPr>
-            </a:pPr>
-            <a:r>
-              <a:rPr sz="2800" b="1" lang="ja-JP" altLang="en-US">
-                <a:solidFill>
-                  <a:srgbClr val="303437"/>
-                </a:solidFill>
-                <a:latin typeface="Noto Sans"/>
-                <a:ea typeface="Noto Sans CJK JP"/>
-                <a:cs typeface="Noto Sans"/>
-              </a:rPr>
-              <a:t>公式HELMサイト：WikiFactの公開結果</a:t>
-            </a:r>
-          </a:p>
-        </p:txBody>
-      </p:sp>
-      <p:sp>
-        <p:nvSpPr>
-          <p:cNvPr id="3" name="Title 2"/>
-          <p:cNvSpPr>
-            <a:spLocks noGrp="1"/>
-          </p:cNvSpPr>
-          <p:nvPr>
-            <p:ph type="title" idx="2"/>
-          </p:nvPr>
-        </p:nvSpPr>
-        <p:spPr>
-          <a:xfrm>
-            <a:off x="75895" y="0"/>
-            <a:ext cx="8115300" cy="480060"/>
-          </a:xfrm>
-        </p:spPr>
-        <p:txBody>
-          <a:bodyPr wrap="square" lIns="0" rIns="0" tIns="0" bIns="0" anchor="ctr">
-            <a:noAutofit/>
-          </a:bodyPr>
-          <a:lstStyle/>
-          <a:p>
-            <a:pPr algn="l">
-              <a:lnSpc>
-                <a:spcPct val="110000"/>
-              </a:lnSpc>
-              <a:buNone/>
-              <a:defRPr sz="1400" b="0">
-                <a:solidFill>
-                  <a:srgbClr val="303437"/>
-                </a:solidFill>
-                <a:latin typeface="Noto Sans"/>
-              </a:defRPr>
-            </a:pPr>
-            <a:r>
-              <a:rPr sz="1400" b="1" lang="ja-JP" altLang="en-US">
-                <a:solidFill>
-                  <a:srgbClr val="FFFEF8"/>
-                </a:solidFill>
-                <a:latin typeface="Noto Sans"/>
-                <a:ea typeface="Noto Sans CJK JP"/>
-                <a:cs typeface="Noto Sans"/>
-              </a:rPr>
-              <a:t>WikiFact</a:t>
-            </a:r>
-          </a:p>
-        </p:txBody>
-      </p:sp>
-      <p:pic>
-        <p:nvPicPr>
-          <p:cNvPr id="4" name="Picture 3" descr="official-site.png"/>
-          <p:cNvPicPr>
-            <a:picLocks noChangeAspect="1"/>
-          </p:cNvPicPr>
-          <p:nvPr/>
-        </p:nvPicPr>
-        <p:blipFill>
-          <a:blip r:embed="rId2"/>
-          <a:stretch>
-            <a:fillRect/>
-          </a:stretch>
-        </p:blipFill>
-        <p:spPr>
-          <a:xfrm>
-            <a:off x="1815084" y="1481328"/>
-            <a:ext cx="5513832" cy="3063240"/>
-          </a:xfrm>
-          <a:prstGeom prst="rect">
-            <a:avLst/>
-          </a:prstGeom>
-        </p:spPr>
-      </p:pic>
-      <p:sp>
-        <p:nvSpPr>
-          <p:cNvPr id="5" name="sources"/>
-          <p:cNvSpPr txBox="1"/>
-          <p:nvPr/>
-        </p:nvSpPr>
-        <p:spPr>
-          <a:xfrm>
-            <a:off x="502920" y="4700016"/>
-            <a:ext cx="8183879" cy="530352"/>
-          </a:xfrm>
-          <a:prstGeom prst="rect">
-            <a:avLst/>
-          </a:prstGeom>
-          <a:noFill/>
-        </p:spPr>
-        <p:txBody>
-          <a:bodyPr wrap="square" lIns="0" rIns="0" tIns="0" bIns="0">
-            <a:noAutofit/>
-          </a:bodyPr>
-          <a:lstStyle/>
-          <a:p>
-            <a:pPr algn="l">
-              <a:lnSpc>
-                <a:spcPts val="940"/>
-              </a:lnSpc>
-              <a:spcBef>
-                <a:spcPts val="0"/>
-              </a:spcBef>
-              <a:spcAft>
-                <a:spcPts val="140"/>
-              </a:spcAft>
-              <a:buNone/>
-              <a:defRPr sz="810" b="0">
-                <a:solidFill>
-                  <a:srgbClr val="303437"/>
-                </a:solidFill>
-                <a:latin typeface="Noto Sans"/>
-              </a:defRPr>
-            </a:pPr>
-            <a:r>
-              <a:rPr sz="810" b="0" lang="ja-JP" altLang="en-US">
-                <a:solidFill>
-                  <a:srgbClr val="626669"/>
-                </a:solidFill>
-                <a:latin typeface="Noto Sans"/>
-                <a:ea typeface="Noto Sans CJK JP"/>
-                <a:cs typeface="Noto Sans"/>
-              </a:rPr>
-              <a:t>[1] Stanford CRFM. HELM Classic v0.4.0 — WikiFact（2023）。 </a:t>
-            </a:r>
-            <a:r>
-              <a:rPr sz="810" b="0" lang="ja-JP" altLang="en-US">
-                <a:solidFill>
-                  <a:srgbClr val="626669"/>
-                </a:solidFill>
-                <a:latin typeface="Noto Sans"/>
-                <a:ea typeface="Noto Sans CJK JP"/>
-                <a:cs typeface="Noto Sans"/>
-              </a:rPr>
-              <a:t>  </a:t>
-            </a:r>
-            <a:r>
-              <a:rPr sz="810" b="0" lang="ja-JP" altLang="en-US">
-                <a:solidFill>
-                  <a:srgbClr val="626669"/>
-                </a:solidFill>
-                <a:latin typeface="Noto Sans"/>
-                <a:ea typeface="Noto Sans CJK JP"/>
-                <a:cs typeface="Noto Sans"/>
-                <a:hlinkClick r:id="rId3"/>
-              </a:rPr>
-              <a:t>https://crfm.stanford.edu/helm/classic/v0.4.0/#/groups/wikifact</a:t>
-            </a:r>
-          </a:p>
-        </p:txBody>
-      </p:sp>
-    </p:spTree>
-  </p:cSld>
-  <p:clrMapOvr>
-    <a:masterClrMapping/>
-  </p:clrMapOvr>
-</p:sld>
-</file>
-
-<file path=ppt/slides/slide20.xml><?xml version="1.0" encoding="utf-8"?>
-<p:sld xmlns:a="http://schemas.openxmlformats.org/drawingml/2006/main" xmlns:p="http://schemas.openxmlformats.org/presentationml/2006/main" xmlns:r="http://schemas.openxmlformats.org/officeDocument/2006/relationships">
-  <p:cSld>
-    <p:spTree>
-      <p:nvGrpSpPr>
-        <p:cNvPr id="1" name=""/>
-        <p:cNvGrpSpPr/>
-        <p:nvPr/>
-      </p:nvGrpSpPr>
-      <p:grpSpPr/>
-      <p:sp>
-        <p:nvSpPr>
-          <p:cNvPr id="2" name="Title 1"/>
-          <p:cNvSpPr>
-            <a:spLocks noGrp="1"/>
-          </p:cNvSpPr>
-          <p:nvPr>
-            <p:ph type="title"/>
-          </p:nvPr>
-        </p:nvSpPr>
-        <p:spPr>
-          <a:xfrm>
-            <a:off x="468172" y="650138"/>
-            <a:ext cx="8206740" cy="616305"/>
-          </a:xfrm>
-        </p:spPr>
-        <p:txBody>
-          <a:bodyPr wrap="square" lIns="0" rIns="0" tIns="0" bIns="0">
-            <a:noAutofit/>
-          </a:bodyPr>
-          <a:lstStyle/>
-          <a:p>
-            <a:pPr algn="l">
-              <a:lnSpc>
-                <a:spcPct val="110000"/>
-              </a:lnSpc>
-              <a:buNone/>
-              <a:defRPr sz="2800" b="0">
-                <a:solidFill>
-                  <a:srgbClr val="303437"/>
-                </a:solidFill>
-                <a:latin typeface="Noto Sans"/>
-              </a:defRPr>
-            </a:pPr>
-            <a:r>
-              <a:rPr sz="2800" b="1" lang="ja-JP" altLang="en-US">
-                <a:solidFill>
-                  <a:srgbClr val="303437"/>
-                </a:solidFill>
-                <a:latin typeface="Noto Sans"/>
-                <a:ea typeface="Noto Sans CJK JP"/>
-                <a:cs typeface="Noto Sans"/>
-              </a:rPr>
-              <a:t>モデルごとに、候補数と評価回数が異なる</a:t>
-            </a:r>
-          </a:p>
-        </p:txBody>
-      </p:sp>
-      <p:sp>
-        <p:nvSpPr>
-          <p:cNvPr id="3" name="Title 2"/>
-          <p:cNvSpPr>
-            <a:spLocks noGrp="1"/>
-          </p:cNvSpPr>
-          <p:nvPr>
-            <p:ph type="title" idx="2"/>
-          </p:nvPr>
-        </p:nvSpPr>
-        <p:spPr>
-          <a:xfrm>
-            <a:off x="75895" y="0"/>
-            <a:ext cx="8115300" cy="480060"/>
-          </a:xfrm>
-        </p:spPr>
-        <p:txBody>
-          <a:bodyPr wrap="square" lIns="0" rIns="0" tIns="0" bIns="0" anchor="ctr">
-            <a:noAutofit/>
-          </a:bodyPr>
-          <a:lstStyle/>
-          <a:p>
-            <a:pPr algn="l">
-              <a:lnSpc>
-                <a:spcPct val="110000"/>
-              </a:lnSpc>
-              <a:buNone/>
-              <a:defRPr sz="1400" b="0">
-                <a:solidFill>
-                  <a:srgbClr val="303437"/>
-                </a:solidFill>
-                <a:latin typeface="Noto Sans"/>
-              </a:defRPr>
-            </a:pPr>
-            <a:r>
-              <a:rPr sz="1400" b="1" lang="ja-JP" altLang="en-US">
-                <a:solidFill>
-                  <a:srgbClr val="FFFEF8"/>
-                </a:solidFill>
-                <a:latin typeface="Noto Sans"/>
-                <a:ea typeface="Noto Sans CJK JP"/>
-                <a:cs typeface="Noto Sans"/>
-              </a:rPr>
-              <a:t>3. HELMの採点と公開成績</a:t>
-            </a:r>
-          </a:p>
-        </p:txBody>
-      </p:sp>
-      <p:sp>
-        <p:nvSpPr>
-          <p:cNvPr id="4" name="TextBox 3"/>
-          <p:cNvSpPr txBox="1"/>
-          <p:nvPr/>
-        </p:nvSpPr>
-        <p:spPr>
-          <a:xfrm>
-            <a:off x="594360" y="1463040"/>
-            <a:ext cx="7955279" cy="3044952"/>
-          </a:xfrm>
-          <a:prstGeom prst="rect">
-            <a:avLst/>
-          </a:prstGeom>
-          <a:noFill/>
-        </p:spPr>
-        <p:txBody>
-          <a:bodyPr wrap="square" lIns="0" rIns="0" tIns="0" bIns="0">
-            <a:noAutofit/>
-          </a:bodyPr>
-          <a:lstStyle/>
-          <a:p>
-            <a:pPr algn="l">
-              <a:lnSpc>
-                <a:spcPts val="2379"/>
-              </a:lnSpc>
-              <a:spcBef>
-                <a:spcPts val="0"/>
-              </a:spcBef>
-              <a:spcAft>
-                <a:spcPts val="1200"/>
-              </a:spcAft>
-              <a:buNone/>
-              <a:defRPr sz="2000" b="0">
-                <a:solidFill>
-                  <a:srgbClr val="303437"/>
-                </a:solidFill>
-                <a:latin typeface="Noto Sans"/>
-              </a:defRPr>
-            </a:pPr>
-            <a:r>
-              <a:rPr sz="2000" b="0" lang="ja-JP" altLang="en-US">
-                <a:solidFill>
-                  <a:srgbClr val="303437"/>
-                </a:solidFill>
-                <a:latin typeface="Noto Sans"/>
-                <a:ea typeface="Noto Sans CJK JP"/>
-                <a:cs typeface="Noto Sans"/>
-              </a:rPr>
-              <a:t>OPT-175Bとtext-davinci-003は、1問につき5候補を生成し、対数確率が最大の候補を採点する。異なる提示例を使う3試行の正答率を平均した。</a:t>
-            </a:r>
-          </a:p>
-          <a:p>
-            <a:pPr>
-              <a:lnSpc>
-                <a:spcPts val="2379"/>
-              </a:lnSpc>
-              <a:spcAft>
-                <a:spcPts val="1200"/>
-              </a:spcAft>
-              <a:buNone/>
-              <a:defRPr sz="2000" b="0">
-                <a:solidFill>
-                  <a:srgbClr val="303437"/>
-                </a:solidFill>
-                <a:latin typeface="Noto Sans"/>
-              </a:defRPr>
-            </a:pPr>
-            <a:r>
-              <a:rPr sz="2000" b="0" lang="ja-JP" altLang="en-US">
-                <a:solidFill>
-                  <a:srgbClr val="303437"/>
-                </a:solidFill>
-                <a:latin typeface="Noto Sans"/>
-                <a:ea typeface="Noto Sans CJK JP"/>
-                <a:cs typeface="Noto Sans"/>
-              </a:rPr>
-              <a:t>Llama 2 70Bの公開出力は1問につき1候補で、評価は1試行である。そのためAccuracy@1と@5は同じ値になる。</a:t>
-            </a:r>
-          </a:p>
-        </p:txBody>
-      </p:sp>
-      <p:sp>
-        <p:nvSpPr>
-          <p:cNvPr id="5" name="sources"/>
-          <p:cNvSpPr txBox="1"/>
-          <p:nvPr/>
-        </p:nvSpPr>
-        <p:spPr>
-          <a:xfrm>
-            <a:off x="502920" y="4700016"/>
-            <a:ext cx="8183879" cy="530352"/>
-          </a:xfrm>
-          <a:prstGeom prst="rect">
-            <a:avLst/>
-          </a:prstGeom>
-          <a:noFill/>
-        </p:spPr>
-        <p:txBody>
-          <a:bodyPr wrap="square" lIns="0" rIns="0" tIns="0" bIns="0">
-            <a:noAutofit/>
-          </a:bodyPr>
-          <a:lstStyle/>
-          <a:p>
-            <a:pPr algn="l">
-              <a:lnSpc>
-                <a:spcPts val="940"/>
-              </a:lnSpc>
-              <a:spcBef>
-                <a:spcPts val="0"/>
-              </a:spcBef>
-              <a:spcAft>
-                <a:spcPts val="140"/>
-              </a:spcAft>
-              <a:buNone/>
-              <a:defRPr sz="810" b="0">
-                <a:solidFill>
-                  <a:srgbClr val="303437"/>
-                </a:solidFill>
-                <a:latin typeface="Noto Sans"/>
-              </a:defRPr>
-            </a:pPr>
-            <a:r>
-              <a:rPr sz="810" b="0" lang="ja-JP" altLang="en-US">
-                <a:solidFill>
-                  <a:srgbClr val="626669"/>
-                </a:solidFill>
-                <a:latin typeface="Noto Sans"/>
-                <a:ea typeface="Noto Sans CJK JP"/>
-                <a:cs typeface="Noto Sans"/>
-              </a:rPr>
-              <a:t>[1] Stanford CRFM. HELM Classic v0.4.0 — WikiFact（2023）。 </a:t>
-            </a:r>
-            <a:r>
-              <a:rPr sz="810" b="0" lang="ja-JP" altLang="en-US">
-                <a:solidFill>
-                  <a:srgbClr val="626669"/>
-                </a:solidFill>
-                <a:latin typeface="Noto Sans"/>
-                <a:ea typeface="Noto Sans CJK JP"/>
-                <a:cs typeface="Noto Sans"/>
-              </a:rPr>
-              <a:t>  </a:t>
-            </a:r>
-            <a:r>
-              <a:rPr sz="810" b="0" lang="ja-JP" altLang="en-US">
-                <a:solidFill>
-                  <a:srgbClr val="626669"/>
-                </a:solidFill>
-                <a:latin typeface="Noto Sans"/>
-                <a:ea typeface="Noto Sans CJK JP"/>
-                <a:cs typeface="Noto Sans"/>
-                <a:hlinkClick r:id="rId2"/>
-              </a:rPr>
-              <a:t>https://crfm.stanford.edu/helm/classic/v0.4.0/#/groups/wikifact</a:t>
-            </a:r>
-          </a:p>
-        </p:txBody>
-      </p:sp>
-    </p:spTree>
-  </p:cSld>
-  <p:clrMapOvr>
-    <a:masterClrMapping/>
-  </p:clrMapOvr>
-</p:sld>
-</file>
-
-<file path=ppt/slides/slide21.xml><?xml version="1.0" encoding="utf-8"?>
-<p:sld xmlns:a="http://schemas.openxmlformats.org/drawingml/2006/main" xmlns:p="http://schemas.openxmlformats.org/presentationml/2006/main" xmlns:r="http://schemas.openxmlformats.org/officeDocument/2006/relationships">
-  <p:cSld>
-    <p:spTree>
-      <p:nvGrpSpPr>
-        <p:cNvPr id="1" name=""/>
-        <p:cNvGrpSpPr/>
-        <p:nvPr/>
-      </p:nvGrpSpPr>
-      <p:grpSpPr/>
-      <p:sp>
-        <p:nvSpPr>
-          <p:cNvPr id="2" name="Title 1"/>
-          <p:cNvSpPr>
-            <a:spLocks noGrp="1"/>
-          </p:cNvSpPr>
-          <p:nvPr>
-            <p:ph type="title"/>
-          </p:nvPr>
-        </p:nvSpPr>
-        <p:spPr>
-          <a:xfrm>
-            <a:off x="468172" y="650138"/>
-            <a:ext cx="8206740" cy="616305"/>
-          </a:xfrm>
-        </p:spPr>
-        <p:txBody>
-          <a:bodyPr wrap="square" lIns="0" rIns="0" tIns="0" bIns="0">
-            <a:noAutofit/>
-          </a:bodyPr>
-          <a:lstStyle/>
-          <a:p>
-            <a:pPr algn="l">
-              <a:lnSpc>
-                <a:spcPct val="110000"/>
-              </a:lnSpc>
-              <a:buNone/>
-              <a:defRPr sz="2800" b="0">
-                <a:solidFill>
-                  <a:srgbClr val="303437"/>
-                </a:solidFill>
-                <a:latin typeface="Noto Sans"/>
-              </a:defRPr>
-            </a:pPr>
-            <a:r>
-              <a:rPr sz="2800" b="1" lang="ja-JP" altLang="en-US">
-                <a:solidFill>
-                  <a:srgbClr val="303437"/>
-                </a:solidFill>
-                <a:latin typeface="Noto Sans"/>
-                <a:ea typeface="Noto Sans CJK JP"/>
-                <a:cs typeface="Noto Sans"/>
-              </a:rPr>
-              <a:t>HELM ClassicのAccuracy@1</a:t>
-            </a:r>
-          </a:p>
-        </p:txBody>
-      </p:sp>
-      <p:sp>
-        <p:nvSpPr>
-          <p:cNvPr id="3" name="Title 2"/>
-          <p:cNvSpPr>
-            <a:spLocks noGrp="1"/>
-          </p:cNvSpPr>
-          <p:nvPr>
-            <p:ph type="title" idx="2"/>
-          </p:nvPr>
-        </p:nvSpPr>
-        <p:spPr>
-          <a:xfrm>
-            <a:off x="75895" y="0"/>
-            <a:ext cx="8115300" cy="480060"/>
-          </a:xfrm>
-        </p:spPr>
-        <p:txBody>
-          <a:bodyPr wrap="square" lIns="0" rIns="0" tIns="0" bIns="0" anchor="ctr">
-            <a:noAutofit/>
-          </a:bodyPr>
-          <a:lstStyle/>
-          <a:p>
-            <a:pPr algn="l">
-              <a:lnSpc>
-                <a:spcPct val="110000"/>
-              </a:lnSpc>
-              <a:buNone/>
-              <a:defRPr sz="1400" b="0">
-                <a:solidFill>
-                  <a:srgbClr val="303437"/>
-                </a:solidFill>
-                <a:latin typeface="Noto Sans"/>
-              </a:defRPr>
-            </a:pPr>
-            <a:r>
-              <a:rPr sz="1400" b="1" lang="ja-JP" altLang="en-US">
-                <a:solidFill>
-                  <a:srgbClr val="FFFEF8"/>
-                </a:solidFill>
-                <a:latin typeface="Noto Sans"/>
-                <a:ea typeface="Noto Sans CJK JP"/>
-                <a:cs typeface="Noto Sans"/>
-              </a:rPr>
-              <a:t>3. HELMの採点と公開成績</a:t>
-            </a:r>
-          </a:p>
-        </p:txBody>
-      </p:sp>
-      <p:graphicFrame>
-        <p:nvGraphicFramePr>
-          <p:cNvPr id="4" name="Table 3"/>
-          <p:cNvGraphicFramePr>
-            <a:graphicFrameLocks noGrp="1"/>
-          </p:cNvGraphicFramePr>
-          <p:nvPr/>
-        </p:nvGraphicFramePr>
-        <p:xfrm>
-          <a:off x="548640" y="1508760"/>
-          <a:ext cx="8046720" cy="1828800"/>
-        </p:xfrm>
-        <a:graphic>
-          <a:graphicData uri="http://schemas.openxmlformats.org/drawingml/2006/table">
-            <a:tbl>
-              <a:tblPr firstRow="0" bandRow="0"/>
-              <a:tblGrid>
-                <a:gridCol w="5212080"/>
-                <a:gridCol w="2834640"/>
-              </a:tblGrid>
-              <a:tr h="457200">
-                <a:tc>
-                  <a:txBody>
-                    <a:bodyPr wrap="square">
-                      <a:noAutofit/>
-                    </a:bodyPr>
-                    <a:lstStyle/>
-                    <a:p>
-                      <a:pPr algn="l">
-                        <a:lnSpc>
-                          <a:spcPts val="2415"/>
-                        </a:lnSpc>
-                        <a:buNone/>
-                        <a:defRPr sz="2100" b="0">
-                          <a:solidFill>
-                            <a:srgbClr val="303437"/>
-                          </a:solidFill>
-                          <a:latin typeface="Noto Sans"/>
-                        </a:defRPr>
-                      </a:pPr>
-                      <a:r>
-                        <a:rPr sz="2100" b="0" lang="ja-JP" altLang="en-US">
-                          <a:solidFill>
-                            <a:srgbClr val="303437"/>
-                          </a:solidFill>
-                          <a:latin typeface="Noto Sans"/>
-                          <a:ea typeface="Noto Sans CJK JP"/>
-                          <a:cs typeface="Noto Sans"/>
-                        </a:rPr>
-                        <a:t>モデル（公開年）</a:t>
-                      </a:r>
-                    </a:p>
-                  </a:txBody>
-                  <a:tcPr marL="63500" marR="63500" marT="38100" marB="38100" anchor="ctr">
-                    <a:lnL w="7620">
-                      <a:noFill/>
-                    </a:lnL>
-                    <a:lnR w="7620">
-                      <a:noFill/>
-                    </a:lnR>
-                    <a:lnT w="15240">
-                      <a:solidFill>
-                        <a:srgbClr val="626669"/>
-                      </a:solidFill>
-                      <a:prstDash val="solid"/>
-                    </a:lnT>
-                    <a:lnB w="7620">
-                      <a:solidFill>
-                        <a:srgbClr val="626669"/>
-                      </a:solidFill>
-                      <a:prstDash val="solid"/>
-                    </a:lnB>
-                    <a:solidFill>
-                      <a:srgbClr val="FFFEF8"/>
-                    </a:solidFill>
-                  </a:tcPr>
-                </a:tc>
-                <a:tc>
-                  <a:txBody>
-                    <a:bodyPr wrap="square">
-                      <a:noAutofit/>
-                    </a:bodyPr>
-                    <a:lstStyle/>
-                    <a:p>
-                      <a:pPr algn="r">
-                        <a:lnSpc>
-                          <a:spcPts val="2415"/>
-                        </a:lnSpc>
-                        <a:buNone/>
-                        <a:defRPr sz="2100" b="0">
-                          <a:solidFill>
-                            <a:srgbClr val="303437"/>
-                          </a:solidFill>
-                          <a:latin typeface="Noto Sans"/>
-                        </a:defRPr>
-                      </a:pPr>
-                      <a:r>
-                        <a:rPr sz="2100" b="0" lang="ja-JP" altLang="en-US">
-                          <a:solidFill>
-                            <a:srgbClr val="303437"/>
-                          </a:solidFill>
-                          <a:latin typeface="Noto Sans"/>
-                          <a:ea typeface="Noto Sans CJK JP"/>
-                          <a:cs typeface="Noto Sans"/>
-                        </a:rPr>
-                        <a:t>10関係平均（%）</a:t>
-                      </a:r>
-                    </a:p>
-                  </a:txBody>
-                  <a:tcPr marL="63500" marR="63500" marT="38100" marB="38100" anchor="ctr">
-                    <a:lnL w="7620">
-                      <a:noFill/>
-                    </a:lnL>
-                    <a:lnR w="7620">
-                      <a:noFill/>
-                    </a:lnR>
-                    <a:lnT w="15240">
-                      <a:solidFill>
-                        <a:srgbClr val="626669"/>
-                      </a:solidFill>
-                      <a:prstDash val="solid"/>
-                    </a:lnT>
-                    <a:lnB w="7620">
-                      <a:solidFill>
-                        <a:srgbClr val="626669"/>
-                      </a:solidFill>
-                      <a:prstDash val="solid"/>
-                    </a:lnB>
-                    <a:solidFill>
-                      <a:srgbClr val="FFFEF8"/>
-                    </a:solidFill>
-                  </a:tcPr>
-                </a:tc>
-              </a:tr>
-              <a:tr h="457200">
-                <a:tc>
-                  <a:txBody>
-                    <a:bodyPr wrap="square">
-                      <a:noAutofit/>
-                    </a:bodyPr>
-                    <a:lstStyle/>
-                    <a:p>
-                      <a:pPr algn="l">
-                        <a:lnSpc>
-                          <a:spcPts val="2415"/>
-                        </a:lnSpc>
-                        <a:buNone/>
-                        <a:defRPr sz="2100" b="0">
-                          <a:solidFill>
-                            <a:srgbClr val="303437"/>
-                          </a:solidFill>
-                          <a:latin typeface="Noto Sans"/>
-                        </a:defRPr>
-                      </a:pPr>
-                      <a:r>
-                        <a:rPr sz="2100" b="0" lang="ja-JP" altLang="en-US">
-                          <a:solidFill>
-                            <a:srgbClr val="303437"/>
-                          </a:solidFill>
-                          <a:latin typeface="Noto Sans"/>
-                          <a:ea typeface="Noto Sans CJK JP"/>
-                          <a:cs typeface="Noto Sans"/>
-                        </a:rPr>
-                        <a:t>OPT-175B（2022）</a:t>
-                      </a:r>
-                    </a:p>
-                  </a:txBody>
-                  <a:tcPr marL="63500" marR="63500" marT="38100" marB="38100" anchor="ctr">
-                    <a:lnL w="7620">
-                      <a:noFill/>
-                    </a:lnL>
-                    <a:lnR w="7620">
-                      <a:noFill/>
-                    </a:lnR>
-                    <a:lnT w="7620">
-                      <a:solidFill>
-                        <a:srgbClr val="626669"/>
-                      </a:solidFill>
-                      <a:prstDash val="solid"/>
-                    </a:lnT>
-                    <a:lnB w="7620">
-                      <a:noFill/>
-                    </a:lnB>
-                    <a:solidFill>
-                      <a:srgbClr val="FFFEF8"/>
-                    </a:solidFill>
-                  </a:tcPr>
-                </a:tc>
-                <a:tc>
-                  <a:txBody>
-                    <a:bodyPr wrap="square">
-                      <a:noAutofit/>
-                    </a:bodyPr>
-                    <a:lstStyle/>
-                    <a:p>
-                      <a:pPr algn="r">
-                        <a:lnSpc>
-                          <a:spcPts val="2415"/>
-                        </a:lnSpc>
-                        <a:buNone/>
-                        <a:defRPr sz="2100" b="0">
-                          <a:solidFill>
-                            <a:srgbClr val="303437"/>
-                          </a:solidFill>
-                          <a:latin typeface="Noto Sans"/>
-                        </a:defRPr>
-                      </a:pPr>
-                      <a:r>
-                        <a:rPr sz="2100" b="0" lang="ja-JP" altLang="en-US">
-                          <a:solidFill>
-                            <a:srgbClr val="303437"/>
-                          </a:solidFill>
-                          <a:latin typeface="Noto Sans"/>
-                          <a:ea typeface="Noto Sans CJK JP"/>
-                          <a:cs typeface="Noto Sans"/>
-                        </a:rPr>
-                        <a:t>22.03</a:t>
-                      </a:r>
-                    </a:p>
-                  </a:txBody>
-                  <a:tcPr marL="63500" marR="63500" marT="38100" marB="38100" anchor="ctr">
-                    <a:lnL w="7620">
-                      <a:noFill/>
-                    </a:lnL>
-                    <a:lnR w="7620">
-                      <a:noFill/>
-                    </a:lnR>
-                    <a:lnT w="7620">
-                      <a:solidFill>
-                        <a:srgbClr val="626669"/>
-                      </a:solidFill>
-                      <a:prstDash val="solid"/>
-                    </a:lnT>
-                    <a:lnB w="7620">
-                      <a:noFill/>
-                    </a:lnB>
-                    <a:solidFill>
-                      <a:srgbClr val="FFFEF8"/>
-                    </a:solidFill>
-                  </a:tcPr>
-                </a:tc>
-              </a:tr>
-              <a:tr h="457200">
-                <a:tc>
-                  <a:txBody>
-                    <a:bodyPr wrap="square">
-                      <a:noAutofit/>
-                    </a:bodyPr>
-                    <a:lstStyle/>
-                    <a:p>
-                      <a:pPr algn="l">
-                        <a:lnSpc>
-                          <a:spcPts val="2415"/>
-                        </a:lnSpc>
-                        <a:buNone/>
-                        <a:defRPr sz="2100" b="0">
-                          <a:solidFill>
-                            <a:srgbClr val="303437"/>
-                          </a:solidFill>
-                          <a:latin typeface="Noto Sans"/>
-                        </a:defRPr>
-                      </a:pPr>
-                      <a:r>
-                        <a:rPr sz="2100" b="0" lang="ja-JP" altLang="en-US">
-                          <a:solidFill>
-                            <a:srgbClr val="303437"/>
-                          </a:solidFill>
-                          <a:latin typeface="Noto Sans"/>
-                          <a:ea typeface="Noto Sans CJK JP"/>
-                          <a:cs typeface="Noto Sans"/>
-                        </a:rPr>
-                        <a:t>text-davinci-003（2022）</a:t>
-                      </a:r>
-                    </a:p>
-                  </a:txBody>
-                  <a:tcPr marL="63500" marR="63500" marT="38100" marB="38100" anchor="ctr">
-                    <a:lnL w="7620">
-                      <a:noFill/>
-                    </a:lnL>
-                    <a:lnR w="7620">
-                      <a:noFill/>
-                    </a:lnR>
-                    <a:lnT w="7620">
-                      <a:noFill/>
-                    </a:lnT>
-                    <a:lnB w="7620">
-                      <a:noFill/>
-                    </a:lnB>
-                    <a:solidFill>
-                      <a:srgbClr val="FFFEF8"/>
-                    </a:solidFill>
-                  </a:tcPr>
-                </a:tc>
-                <a:tc>
-                  <a:txBody>
-                    <a:bodyPr wrap="square">
-                      <a:noAutofit/>
-                    </a:bodyPr>
-                    <a:lstStyle/>
-                    <a:p>
-                      <a:pPr algn="r">
-                        <a:lnSpc>
-                          <a:spcPts val="2415"/>
-                        </a:lnSpc>
-                        <a:buNone/>
-                        <a:defRPr sz="2100" b="0">
-                          <a:solidFill>
-                            <a:srgbClr val="303437"/>
-                          </a:solidFill>
-                          <a:latin typeface="Noto Sans"/>
-                        </a:defRPr>
-                      </a:pPr>
-                      <a:r>
-                        <a:rPr sz="2100" b="0" lang="ja-JP" altLang="en-US">
-                          <a:solidFill>
-                            <a:srgbClr val="303437"/>
-                          </a:solidFill>
-                          <a:latin typeface="Noto Sans"/>
-                          <a:ea typeface="Noto Sans CJK JP"/>
-                          <a:cs typeface="Noto Sans"/>
-                        </a:rPr>
-                        <a:t>37.34</a:t>
-                      </a:r>
-                    </a:p>
-                  </a:txBody>
-                  <a:tcPr marL="63500" marR="63500" marT="38100" marB="38100" anchor="ctr">
-                    <a:lnL w="7620">
-                      <a:noFill/>
-                    </a:lnL>
-                    <a:lnR w="7620">
-                      <a:noFill/>
-                    </a:lnR>
-                    <a:lnT w="7620">
-                      <a:noFill/>
-                    </a:lnT>
-                    <a:lnB w="7620">
-                      <a:noFill/>
-                    </a:lnB>
-                    <a:solidFill>
-                      <a:srgbClr val="FFFEF8"/>
-                    </a:solidFill>
-                  </a:tcPr>
-                </a:tc>
-              </a:tr>
-              <a:tr h="457200">
-                <a:tc>
-                  <a:txBody>
-                    <a:bodyPr wrap="square">
-                      <a:noAutofit/>
-                    </a:bodyPr>
-                    <a:lstStyle/>
-                    <a:p>
-                      <a:pPr algn="l">
-                        <a:lnSpc>
-                          <a:spcPts val="2415"/>
-                        </a:lnSpc>
-                        <a:buNone/>
-                        <a:defRPr sz="2100" b="0">
-                          <a:solidFill>
-                            <a:srgbClr val="303437"/>
-                          </a:solidFill>
-                          <a:latin typeface="Noto Sans"/>
-                        </a:defRPr>
-                      </a:pPr>
-                      <a:r>
-                        <a:rPr sz="2100" b="0" lang="ja-JP" altLang="en-US">
-                          <a:solidFill>
-                            <a:srgbClr val="303437"/>
-                          </a:solidFill>
-                          <a:latin typeface="Noto Sans"/>
-                          <a:ea typeface="Noto Sans CJK JP"/>
-                          <a:cs typeface="Noto Sans"/>
-                        </a:rPr>
-                        <a:t>Llama 2 70B（2023）</a:t>
-                      </a:r>
-                    </a:p>
-                  </a:txBody>
-                  <a:tcPr marL="63500" marR="63500" marT="38100" marB="38100" anchor="ctr">
-                    <a:lnL w="7620">
-                      <a:noFill/>
-                    </a:lnL>
-                    <a:lnR w="7620">
-                      <a:noFill/>
-                    </a:lnR>
-                    <a:lnT w="7620">
-                      <a:noFill/>
-                    </a:lnT>
-                    <a:lnB w="15240">
-                      <a:solidFill>
-                        <a:srgbClr val="626669"/>
-                      </a:solidFill>
-                      <a:prstDash val="solid"/>
-                    </a:lnB>
-                    <a:solidFill>
-                      <a:srgbClr val="FFFEF8"/>
-                    </a:solidFill>
-                  </a:tcPr>
-                </a:tc>
-                <a:tc>
-                  <a:txBody>
-                    <a:bodyPr wrap="square">
-                      <a:noAutofit/>
-                    </a:bodyPr>
-                    <a:lstStyle/>
-                    <a:p>
-                      <a:pPr algn="r">
-                        <a:lnSpc>
-                          <a:spcPts val="2415"/>
-                        </a:lnSpc>
-                        <a:buNone/>
-                        <a:defRPr sz="2100" b="0">
-                          <a:solidFill>
-                            <a:srgbClr val="303437"/>
-                          </a:solidFill>
-                          <a:latin typeface="Noto Sans"/>
-                        </a:defRPr>
-                      </a:pPr>
-                      <a:r>
-                        <a:rPr sz="2100" b="0" lang="ja-JP" altLang="en-US">
-                          <a:solidFill>
-                            <a:srgbClr val="303437"/>
-                          </a:solidFill>
-                          <a:latin typeface="Noto Sans"/>
-                          <a:ea typeface="Noto Sans CJK JP"/>
-                          <a:cs typeface="Noto Sans"/>
-                        </a:rPr>
-                        <a:t>44.92</a:t>
-                      </a:r>
-                    </a:p>
-                  </a:txBody>
-                  <a:tcPr marL="63500" marR="63500" marT="38100" marB="38100" anchor="ctr">
-                    <a:lnL w="7620">
-                      <a:noFill/>
-                    </a:lnL>
-                    <a:lnR w="7620">
-                      <a:noFill/>
-                    </a:lnR>
-                    <a:lnT w="7620">
-                      <a:noFill/>
-                    </a:lnT>
-                    <a:lnB w="15240">
-                      <a:solidFill>
-                        <a:srgbClr val="626669"/>
-                      </a:solidFill>
-                      <a:prstDash val="solid"/>
-                    </a:lnB>
-                    <a:solidFill>
-                      <a:srgbClr val="FFFEF8"/>
-                    </a:solidFill>
-                  </a:tcPr>
-                </a:tc>
-              </a:tr>
-            </a:tbl>
-          </a:graphicData>
-        </a:graphic>
-      </p:graphicFrame>
-      <p:sp>
-        <p:nvSpPr>
-          <p:cNvPr id="5" name="TextBox 4"/>
-          <p:cNvSpPr txBox="1"/>
-          <p:nvPr/>
-        </p:nvSpPr>
-        <p:spPr>
-          <a:xfrm>
-            <a:off x="594360" y="3538728"/>
-            <a:ext cx="7955279" cy="658368"/>
-          </a:xfrm>
-          <a:prstGeom prst="rect">
-            <a:avLst/>
-          </a:prstGeom>
-          <a:noFill/>
-        </p:spPr>
-        <p:txBody>
-          <a:bodyPr wrap="square" lIns="0" rIns="0" tIns="0" bIns="0">
-            <a:noAutofit/>
-          </a:bodyPr>
-          <a:lstStyle/>
-          <a:p>
-            <a:pPr algn="l">
-              <a:lnSpc>
-                <a:spcPts val="2047"/>
-              </a:lnSpc>
-              <a:spcBef>
-                <a:spcPts val="0"/>
-              </a:spcBef>
-              <a:spcAft>
-                <a:spcPts val="0"/>
-              </a:spcAft>
-              <a:buNone/>
-              <a:defRPr sz="1750" b="0">
-                <a:solidFill>
-                  <a:srgbClr val="303437"/>
-                </a:solidFill>
-                <a:latin typeface="Noto Sans"/>
-              </a:defRPr>
-            </a:pPr>
-            <a:r>
-              <a:rPr sz="1750" b="0" lang="ja-JP" altLang="en-US">
-                <a:solidFill>
-                  <a:srgbClr val="303437"/>
-                </a:solidFill>
-                <a:latin typeface="Noto Sans"/>
-                <a:ea typeface="Noto Sans CJK JP"/>
-                <a:cs typeface="Noto Sans"/>
-              </a:rPr>
-              <a:t>HELM Classicで2023年に公開された結果。各問に最大5例を提示。</a:t>
-            </a:r>
-          </a:p>
-        </p:txBody>
-      </p:sp>
-      <p:sp>
-        <p:nvSpPr>
-          <p:cNvPr id="6" name="sources"/>
-          <p:cNvSpPr txBox="1"/>
-          <p:nvPr/>
-        </p:nvSpPr>
-        <p:spPr>
-          <a:xfrm>
-            <a:off x="502920" y="4700016"/>
-            <a:ext cx="8183879" cy="530352"/>
-          </a:xfrm>
-          <a:prstGeom prst="rect">
-            <a:avLst/>
-          </a:prstGeom>
-          <a:noFill/>
-        </p:spPr>
-        <p:txBody>
-          <a:bodyPr wrap="square" lIns="0" rIns="0" tIns="0" bIns="0">
-            <a:noAutofit/>
-          </a:bodyPr>
-          <a:lstStyle/>
-          <a:p>
-            <a:pPr algn="l">
-              <a:lnSpc>
-                <a:spcPts val="940"/>
-              </a:lnSpc>
-              <a:spcBef>
-                <a:spcPts val="0"/>
-              </a:spcBef>
-              <a:spcAft>
-                <a:spcPts val="140"/>
-              </a:spcAft>
-              <a:buNone/>
-              <a:defRPr sz="810" b="0">
-                <a:solidFill>
-                  <a:srgbClr val="303437"/>
-                </a:solidFill>
-                <a:latin typeface="Noto Sans"/>
-              </a:defRPr>
-            </a:pPr>
-            <a:r>
-              <a:rPr sz="810" b="0" lang="ja-JP" altLang="en-US">
-                <a:solidFill>
-                  <a:srgbClr val="626669"/>
-                </a:solidFill>
-                <a:latin typeface="Noto Sans"/>
-                <a:ea typeface="Noto Sans CJK JP"/>
-                <a:cs typeface="Noto Sans"/>
-              </a:rPr>
-              <a:t>[1] Stanford CRFM. HELM Classic v0.4.0 — WikiFact（2023）。 </a:t>
-            </a:r>
-            <a:r>
-              <a:rPr sz="810" b="0" lang="ja-JP" altLang="en-US">
-                <a:solidFill>
-                  <a:srgbClr val="626669"/>
-                </a:solidFill>
-                <a:latin typeface="Noto Sans"/>
-                <a:ea typeface="Noto Sans CJK JP"/>
-                <a:cs typeface="Noto Sans"/>
-              </a:rPr>
-              <a:t>  </a:t>
-            </a:r>
-            <a:r>
-              <a:rPr sz="810" b="0" lang="ja-JP" altLang="en-US">
-                <a:solidFill>
-                  <a:srgbClr val="626669"/>
-                </a:solidFill>
-                <a:latin typeface="Noto Sans"/>
-                <a:ea typeface="Noto Sans CJK JP"/>
-                <a:cs typeface="Noto Sans"/>
-                <a:hlinkClick r:id="rId2"/>
-              </a:rPr>
-              <a:t>https://crfm.stanford.edu/helm/classic/v0.4.0/#/groups/wikifact</a:t>
-            </a:r>
-          </a:p>
-        </p:txBody>
-      </p:sp>
-    </p:spTree>
-  </p:cSld>
-  <p:clrMapOvr>
-    <a:masterClrMapping/>
-  </p:clrMapOvr>
-</p:sld>
-</file>
-
-<file path=ppt/slides/slide22.xml><?xml version="1.0" encoding="utf-8"?>
-<p:sld xmlns:a="http://schemas.openxmlformats.org/drawingml/2006/main" xmlns:p="http://schemas.openxmlformats.org/presentationml/2006/main" xmlns:r="http://schemas.openxmlformats.org/officeDocument/2006/relationships">
-  <p:cSld>
-    <p:spTree>
-      <p:nvGrpSpPr>
-        <p:cNvPr id="1" name=""/>
-        <p:cNvGrpSpPr/>
-        <p:nvPr/>
-      </p:nvGrpSpPr>
-      <p:grpSpPr/>
-      <p:sp>
-        <p:nvSpPr>
-          <p:cNvPr id="2" name="Title 1"/>
-          <p:cNvSpPr>
-            <a:spLocks noGrp="1"/>
-          </p:cNvSpPr>
-          <p:nvPr>
-            <p:ph type="title"/>
-          </p:nvPr>
-        </p:nvSpPr>
-        <p:spPr>
-          <a:xfrm>
-            <a:off x="468172" y="650138"/>
-            <a:ext cx="8206740" cy="616305"/>
-          </a:xfrm>
-        </p:spPr>
-        <p:txBody>
-          <a:bodyPr wrap="square" lIns="0" rIns="0" tIns="0" bIns="0">
-            <a:noAutofit/>
-          </a:bodyPr>
-          <a:lstStyle/>
-          <a:p>
-            <a:pPr algn="l">
-              <a:lnSpc>
-                <a:spcPct val="110000"/>
-              </a:lnSpc>
-              <a:buNone/>
-              <a:defRPr sz="2800" b="0">
-                <a:solidFill>
-                  <a:srgbClr val="303437"/>
-                </a:solidFill>
-                <a:latin typeface="Noto Sans"/>
-              </a:defRPr>
-            </a:pPr>
-            <a:r>
-              <a:rPr sz="2800" b="1" lang="ja-JP" altLang="en-US">
-                <a:solidFill>
-                  <a:srgbClr val="303437"/>
-                </a:solidFill>
-                <a:latin typeface="Noto Sans"/>
-                <a:ea typeface="Noto Sans CJK JP"/>
-                <a:cs typeface="Noto Sans"/>
-              </a:rPr>
-              <a:t>関係によって正答率は大きく違う</a:t>
-            </a:r>
-          </a:p>
-        </p:txBody>
-      </p:sp>
-      <p:sp>
-        <p:nvSpPr>
-          <p:cNvPr id="3" name="Title 2"/>
-          <p:cNvSpPr>
-            <a:spLocks noGrp="1"/>
-          </p:cNvSpPr>
-          <p:nvPr>
-            <p:ph type="title" idx="2"/>
-          </p:nvPr>
-        </p:nvSpPr>
-        <p:spPr>
-          <a:xfrm>
-            <a:off x="75895" y="0"/>
-            <a:ext cx="8115300" cy="480060"/>
-          </a:xfrm>
-        </p:spPr>
-        <p:txBody>
-          <a:bodyPr wrap="square" lIns="0" rIns="0" tIns="0" bIns="0" anchor="ctr">
-            <a:noAutofit/>
-          </a:bodyPr>
-          <a:lstStyle/>
-          <a:p>
-            <a:pPr algn="l">
-              <a:lnSpc>
-                <a:spcPct val="110000"/>
-              </a:lnSpc>
-              <a:buNone/>
-              <a:defRPr sz="1400" b="0">
-                <a:solidFill>
-                  <a:srgbClr val="303437"/>
-                </a:solidFill>
-                <a:latin typeface="Noto Sans"/>
-              </a:defRPr>
-            </a:pPr>
-            <a:r>
-              <a:rPr sz="1400" b="1" lang="ja-JP" altLang="en-US">
-                <a:solidFill>
-                  <a:srgbClr val="FFFEF8"/>
-                </a:solidFill>
-                <a:latin typeface="Noto Sans"/>
-                <a:ea typeface="Noto Sans CJK JP"/>
-                <a:cs typeface="Noto Sans"/>
-              </a:rPr>
-              <a:t>3. HELMの採点と公開成績</a:t>
-            </a:r>
-          </a:p>
-        </p:txBody>
-      </p:sp>
-      <p:graphicFrame>
-        <p:nvGraphicFramePr>
-          <p:cNvPr id="4" name="Table 3"/>
-          <p:cNvGraphicFramePr>
-            <a:graphicFrameLocks noGrp="1"/>
-          </p:cNvGraphicFramePr>
-          <p:nvPr/>
-        </p:nvGraphicFramePr>
-        <p:xfrm>
-          <a:off x="548640" y="1508760"/>
-          <a:ext cx="8046719" cy="2103120"/>
-        </p:xfrm>
-        <a:graphic>
-          <a:graphicData uri="http://schemas.openxmlformats.org/drawingml/2006/table">
-            <a:tbl>
-              <a:tblPr firstRow="0" bandRow="0"/>
-              <a:tblGrid>
-                <a:gridCol w="2651760"/>
-                <a:gridCol w="1691640"/>
-                <a:gridCol w="1828800"/>
-                <a:gridCol w="1874519"/>
-              </a:tblGrid>
-              <a:tr h="420624">
-                <a:tc>
-                  <a:txBody>
-                    <a:bodyPr wrap="square">
-                      <a:noAutofit/>
-                    </a:bodyPr>
-                    <a:lstStyle/>
-                    <a:p>
-                      <a:pPr algn="l">
-                        <a:lnSpc>
-                          <a:spcPts val="2127"/>
-                        </a:lnSpc>
-                        <a:buNone/>
-                        <a:defRPr sz="1850" b="0">
-                          <a:solidFill>
-                            <a:srgbClr val="303437"/>
-                          </a:solidFill>
-                          <a:latin typeface="Noto Sans"/>
-                        </a:defRPr>
-                      </a:pPr>
-                      <a:r>
-                        <a:rPr sz="1850" b="0" lang="ja-JP" altLang="en-US">
-                          <a:solidFill>
-                            <a:srgbClr val="303437"/>
-                          </a:solidFill>
-                          <a:latin typeface="Noto Sans"/>
-                          <a:ea typeface="Noto Sans CJK JP"/>
-                          <a:cs typeface="Noto Sans"/>
-                        </a:rPr>
-                        <a:t>関係</a:t>
-                      </a:r>
-                    </a:p>
-                  </a:txBody>
-                  <a:tcPr marL="63500" marR="63500" marT="38100" marB="38100" anchor="ctr">
-                    <a:lnL w="7620">
-                      <a:noFill/>
-                    </a:lnL>
-                    <a:lnR w="7620">
-                      <a:noFill/>
-                    </a:lnR>
-                    <a:lnT w="15240">
-                      <a:solidFill>
-                        <a:srgbClr val="626669"/>
-                      </a:solidFill>
-                      <a:prstDash val="solid"/>
-                    </a:lnT>
-                    <a:lnB w="7620">
-                      <a:solidFill>
-                        <a:srgbClr val="626669"/>
-                      </a:solidFill>
-                      <a:prstDash val="solid"/>
-                    </a:lnB>
-                    <a:solidFill>
-                      <a:srgbClr val="FFFEF8"/>
-                    </a:solidFill>
-                  </a:tcPr>
-                </a:tc>
-                <a:tc>
-                  <a:txBody>
-                    <a:bodyPr wrap="square">
-                      <a:noAutofit/>
-                    </a:bodyPr>
-                    <a:lstStyle/>
-                    <a:p>
-                      <a:pPr algn="r">
-                        <a:lnSpc>
-                          <a:spcPts val="2127"/>
-                        </a:lnSpc>
-                        <a:buNone/>
-                        <a:defRPr sz="1850" b="0">
-                          <a:solidFill>
-                            <a:srgbClr val="303437"/>
-                          </a:solidFill>
-                          <a:latin typeface="Noto Sans"/>
-                        </a:defRPr>
-                      </a:pPr>
-                      <a:r>
-                        <a:rPr sz="1850" b="0" lang="ja-JP" altLang="en-US">
-                          <a:solidFill>
-                            <a:srgbClr val="303437"/>
-                          </a:solidFill>
-                          <a:latin typeface="Noto Sans"/>
-                          <a:ea typeface="Noto Sans CJK JP"/>
-                          <a:cs typeface="Noto Sans"/>
-                        </a:rPr>
-                        <a:t>OPT-175B</a:t>
-                      </a:r>
-                    </a:p>
-                  </a:txBody>
-                  <a:tcPr marL="63500" marR="63500" marT="38100" marB="38100" anchor="ctr">
-                    <a:lnL w="7620">
-                      <a:noFill/>
-                    </a:lnL>
-                    <a:lnR w="7620">
-                      <a:noFill/>
-                    </a:lnR>
-                    <a:lnT w="15240">
-                      <a:solidFill>
-                        <a:srgbClr val="626669"/>
-                      </a:solidFill>
-                      <a:prstDash val="solid"/>
-                    </a:lnT>
-                    <a:lnB w="7620">
-                      <a:solidFill>
-                        <a:srgbClr val="626669"/>
-                      </a:solidFill>
-                      <a:prstDash val="solid"/>
-                    </a:lnB>
-                    <a:solidFill>
-                      <a:srgbClr val="FFFEF8"/>
-                    </a:solidFill>
-                  </a:tcPr>
-                </a:tc>
-                <a:tc>
-                  <a:txBody>
-                    <a:bodyPr wrap="square">
-                      <a:noAutofit/>
-                    </a:bodyPr>
-                    <a:lstStyle/>
-                    <a:p>
-                      <a:pPr algn="r">
-                        <a:lnSpc>
-                          <a:spcPts val="2127"/>
-                        </a:lnSpc>
-                        <a:buNone/>
-                        <a:defRPr sz="1850" b="0">
-                          <a:solidFill>
-                            <a:srgbClr val="303437"/>
-                          </a:solidFill>
-                          <a:latin typeface="Noto Sans"/>
-                        </a:defRPr>
-                      </a:pPr>
-                      <a:r>
-                        <a:rPr sz="1850" b="0" lang="ja-JP" altLang="en-US">
-                          <a:solidFill>
-                            <a:srgbClr val="303437"/>
-                          </a:solidFill>
-                          <a:latin typeface="Noto Sans"/>
-                          <a:ea typeface="Noto Sans CJK JP"/>
-                          <a:cs typeface="Noto Sans"/>
-                        </a:rPr>
-                        <a:t>davinci-003</a:t>
-                      </a:r>
-                    </a:p>
-                  </a:txBody>
-                  <a:tcPr marL="63500" marR="63500" marT="38100" marB="38100" anchor="ctr">
-                    <a:lnL w="7620">
-                      <a:noFill/>
-                    </a:lnL>
-                    <a:lnR w="7620">
-                      <a:noFill/>
-                    </a:lnR>
-                    <a:lnT w="15240">
-                      <a:solidFill>
-                        <a:srgbClr val="626669"/>
-                      </a:solidFill>
-                      <a:prstDash val="solid"/>
-                    </a:lnT>
-                    <a:lnB w="7620">
-                      <a:solidFill>
-                        <a:srgbClr val="626669"/>
-                      </a:solidFill>
-                      <a:prstDash val="solid"/>
-                    </a:lnB>
-                    <a:solidFill>
-                      <a:srgbClr val="FFFEF8"/>
-                    </a:solidFill>
-                  </a:tcPr>
-                </a:tc>
-                <a:tc>
-                  <a:txBody>
-                    <a:bodyPr wrap="square">
-                      <a:noAutofit/>
-                    </a:bodyPr>
-                    <a:lstStyle/>
-                    <a:p>
-                      <a:pPr algn="r">
-                        <a:lnSpc>
-                          <a:spcPts val="2127"/>
-                        </a:lnSpc>
-                        <a:buNone/>
-                        <a:defRPr sz="1850" b="0">
-                          <a:solidFill>
-                            <a:srgbClr val="303437"/>
-                          </a:solidFill>
-                          <a:latin typeface="Noto Sans"/>
-                        </a:defRPr>
-                      </a:pPr>
-                      <a:r>
-                        <a:rPr sz="1850" b="0" lang="ja-JP" altLang="en-US">
-                          <a:solidFill>
-                            <a:srgbClr val="303437"/>
-                          </a:solidFill>
-                          <a:latin typeface="Noto Sans"/>
-                          <a:ea typeface="Noto Sans CJK JP"/>
-                          <a:cs typeface="Noto Sans"/>
-                        </a:rPr>
-                        <a:t>Llama 2 70B</a:t>
-                      </a:r>
-                    </a:p>
-                  </a:txBody>
-                  <a:tcPr marL="63500" marR="63500" marT="38100" marB="38100" anchor="ctr">
-                    <a:lnL w="7620">
-                      <a:noFill/>
-                    </a:lnL>
-                    <a:lnR w="7620">
-                      <a:noFill/>
-                    </a:lnR>
-                    <a:lnT w="15240">
-                      <a:solidFill>
-                        <a:srgbClr val="626669"/>
-                      </a:solidFill>
-                      <a:prstDash val="solid"/>
-                    </a:lnT>
-                    <a:lnB w="7620">
-                      <a:solidFill>
-                        <a:srgbClr val="626669"/>
-                      </a:solidFill>
-                      <a:prstDash val="solid"/>
-                    </a:lnB>
-                    <a:solidFill>
-                      <a:srgbClr val="FFFEF8"/>
-                    </a:solidFill>
-                  </a:tcPr>
-                </a:tc>
-              </a:tr>
-              <a:tr h="420624">
-                <a:tc>
-                  <a:txBody>
-                    <a:bodyPr wrap="square">
-                      <a:noAutofit/>
-                    </a:bodyPr>
-                    <a:lstStyle/>
-                    <a:p>
-                      <a:pPr algn="l">
-                        <a:lnSpc>
-                          <a:spcPts val="2127"/>
-                        </a:lnSpc>
-                        <a:buNone/>
-                        <a:defRPr sz="1850" b="0">
-                          <a:solidFill>
-                            <a:srgbClr val="303437"/>
-                          </a:solidFill>
-                          <a:latin typeface="Noto Sans"/>
-                        </a:defRPr>
-                      </a:pPr>
-                      <a:r>
-                        <a:rPr sz="1850" b="0" lang="ja-JP" altLang="en-US">
-                          <a:solidFill>
-                            <a:srgbClr val="303437"/>
-                          </a:solidFill>
-                          <a:latin typeface="Noto Sans"/>
-                          <a:ea typeface="Noto Sans CJK JP"/>
-                          <a:cs typeface="Noto Sans"/>
-                        </a:rPr>
-                        <a:t>通貨</a:t>
-                      </a:r>
-                    </a:p>
-                  </a:txBody>
-                  <a:tcPr marL="63500" marR="63500" marT="38100" marB="38100" anchor="ctr">
-                    <a:lnL w="7620">
-                      <a:noFill/>
-                    </a:lnL>
-                    <a:lnR w="7620">
-                      <a:noFill/>
-                    </a:lnR>
-                    <a:lnT w="7620">
-                      <a:solidFill>
-                        <a:srgbClr val="626669"/>
-                      </a:solidFill>
-                      <a:prstDash val="solid"/>
-                    </a:lnT>
-                    <a:lnB w="7620">
-                      <a:noFill/>
-                    </a:lnB>
-                    <a:solidFill>
-                      <a:srgbClr val="FFFEF8"/>
-                    </a:solidFill>
-                  </a:tcPr>
-                </a:tc>
-                <a:tc>
-                  <a:txBody>
-                    <a:bodyPr wrap="square">
-                      <a:noAutofit/>
-                    </a:bodyPr>
-                    <a:lstStyle/>
-                    <a:p>
-                      <a:pPr algn="r">
-                        <a:lnSpc>
-                          <a:spcPts val="2127"/>
-                        </a:lnSpc>
-                        <a:buNone/>
-                        <a:defRPr sz="1850" b="0">
-                          <a:solidFill>
-                            <a:srgbClr val="303437"/>
-                          </a:solidFill>
-                          <a:latin typeface="Noto Sans"/>
-                        </a:defRPr>
-                      </a:pPr>
-                      <a:r>
-                        <a:rPr sz="1850" b="0" lang="ja-JP" altLang="en-US">
-                          <a:solidFill>
-                            <a:srgbClr val="303437"/>
-                          </a:solidFill>
-                          <a:latin typeface="Noto Sans"/>
-                          <a:ea typeface="Noto Sans CJK JP"/>
-                          <a:cs typeface="Noto Sans"/>
-                        </a:rPr>
-                        <a:t>42.16</a:t>
-                      </a:r>
-                    </a:p>
-                  </a:txBody>
-                  <a:tcPr marL="63500" marR="63500" marT="38100" marB="38100" anchor="ctr">
-                    <a:lnL w="7620">
-                      <a:noFill/>
-                    </a:lnL>
-                    <a:lnR w="7620">
-                      <a:noFill/>
-                    </a:lnR>
-                    <a:lnT w="7620">
-                      <a:solidFill>
-                        <a:srgbClr val="626669"/>
-                      </a:solidFill>
-                      <a:prstDash val="solid"/>
-                    </a:lnT>
-                    <a:lnB w="7620">
-                      <a:noFill/>
-                    </a:lnB>
-                    <a:solidFill>
-                      <a:srgbClr val="FFFEF8"/>
-                    </a:solidFill>
-                  </a:tcPr>
-                </a:tc>
-                <a:tc>
-                  <a:txBody>
-                    <a:bodyPr wrap="square">
-                      <a:noAutofit/>
-                    </a:bodyPr>
-                    <a:lstStyle/>
-                    <a:p>
-                      <a:pPr algn="r">
-                        <a:lnSpc>
-                          <a:spcPts val="2127"/>
-                        </a:lnSpc>
-                        <a:buNone/>
-                        <a:defRPr sz="1850" b="0">
-                          <a:solidFill>
-                            <a:srgbClr val="303437"/>
-                          </a:solidFill>
-                          <a:latin typeface="Noto Sans"/>
-                        </a:defRPr>
-                      </a:pPr>
-                      <a:r>
-                        <a:rPr sz="1850" b="0" lang="ja-JP" altLang="en-US">
-                          <a:solidFill>
-                            <a:srgbClr val="303437"/>
-                          </a:solidFill>
-                          <a:latin typeface="Noto Sans"/>
-                          <a:ea typeface="Noto Sans CJK JP"/>
-                          <a:cs typeface="Noto Sans"/>
-                        </a:rPr>
-                        <a:t>57.10</a:t>
-                      </a:r>
-                    </a:p>
-                  </a:txBody>
-                  <a:tcPr marL="63500" marR="63500" marT="38100" marB="38100" anchor="ctr">
-                    <a:lnL w="7620">
-                      <a:noFill/>
-                    </a:lnL>
-                    <a:lnR w="7620">
-                      <a:noFill/>
-                    </a:lnR>
-                    <a:lnT w="7620">
-                      <a:solidFill>
-                        <a:srgbClr val="626669"/>
-                      </a:solidFill>
-                      <a:prstDash val="solid"/>
-                    </a:lnT>
-                    <a:lnB w="7620">
-                      <a:noFill/>
-                    </a:lnB>
-                    <a:solidFill>
-                      <a:srgbClr val="FFFEF8"/>
-                    </a:solidFill>
-                  </a:tcPr>
-                </a:tc>
-                <a:tc>
-                  <a:txBody>
-                    <a:bodyPr wrap="square">
-                      <a:noAutofit/>
-                    </a:bodyPr>
-                    <a:lstStyle/>
-                    <a:p>
-                      <a:pPr algn="r">
-                        <a:lnSpc>
-                          <a:spcPts val="2127"/>
-                        </a:lnSpc>
-                        <a:buNone/>
-                        <a:defRPr sz="1850" b="0">
-                          <a:solidFill>
-                            <a:srgbClr val="303437"/>
-                          </a:solidFill>
-                          <a:latin typeface="Noto Sans"/>
-                        </a:defRPr>
-                      </a:pPr>
-                      <a:r>
-                        <a:rPr sz="1850" b="0" lang="ja-JP" altLang="en-US">
-                          <a:solidFill>
-                            <a:srgbClr val="303437"/>
-                          </a:solidFill>
-                          <a:latin typeface="Noto Sans"/>
-                          <a:ea typeface="Noto Sans CJK JP"/>
-                          <a:cs typeface="Noto Sans"/>
-                        </a:rPr>
-                        <a:t>62.71</a:t>
-                      </a:r>
-                    </a:p>
-                  </a:txBody>
-                  <a:tcPr marL="63500" marR="63500" marT="38100" marB="38100" anchor="ctr">
-                    <a:lnL w="7620">
-                      <a:noFill/>
-                    </a:lnL>
-                    <a:lnR w="7620">
-                      <a:noFill/>
-                    </a:lnR>
-                    <a:lnT w="7620">
-                      <a:solidFill>
-                        <a:srgbClr val="626669"/>
-                      </a:solidFill>
-                      <a:prstDash val="solid"/>
-                    </a:lnT>
-                    <a:lnB w="7620">
-                      <a:noFill/>
-                    </a:lnB>
-                    <a:solidFill>
-                      <a:srgbClr val="FFFEF8"/>
-                    </a:solidFill>
-                  </a:tcPr>
-                </a:tc>
-              </a:tr>
-              <a:tr h="420624">
-                <a:tc>
-                  <a:txBody>
-                    <a:bodyPr wrap="square">
-                      <a:noAutofit/>
-                    </a:bodyPr>
-                    <a:lstStyle/>
-                    <a:p>
-                      <a:pPr algn="l">
-                        <a:lnSpc>
-                          <a:spcPts val="2127"/>
-                        </a:lnSpc>
-                        <a:buNone/>
-                        <a:defRPr sz="1850" b="0">
-                          <a:solidFill>
-                            <a:srgbClr val="303437"/>
-                          </a:solidFill>
-                          <a:latin typeface="Noto Sans"/>
-                        </a:defRPr>
-                      </a:pPr>
-                      <a:r>
-                        <a:rPr sz="1850" b="0" lang="ja-JP" altLang="en-US">
-                          <a:solidFill>
-                            <a:srgbClr val="303437"/>
-                          </a:solidFill>
-                          <a:latin typeface="Noto Sans"/>
-                          <a:ea typeface="Noto Sans CJK JP"/>
-                          <a:cs typeface="Noto Sans"/>
-                        </a:rPr>
-                        <a:t>発見者・発明者</a:t>
-                      </a:r>
-                    </a:p>
-                  </a:txBody>
-                  <a:tcPr marL="63500" marR="63500" marT="38100" marB="38100" anchor="ctr">
-                    <a:lnL w="7620">
-                      <a:noFill/>
-                    </a:lnL>
-                    <a:lnR w="7620">
-                      <a:noFill/>
-                    </a:lnR>
-                    <a:lnT w="7620">
-                      <a:noFill/>
-                    </a:lnT>
-                    <a:lnB w="7620">
-                      <a:noFill/>
-                    </a:lnB>
-                    <a:solidFill>
-                      <a:srgbClr val="FFFEF8"/>
-                    </a:solidFill>
-                  </a:tcPr>
-                </a:tc>
-                <a:tc>
-                  <a:txBody>
-                    <a:bodyPr wrap="square">
-                      <a:noAutofit/>
-                    </a:bodyPr>
-                    <a:lstStyle/>
-                    <a:p>
-                      <a:pPr algn="r">
-                        <a:lnSpc>
-                          <a:spcPts val="2127"/>
-                        </a:lnSpc>
-                        <a:buNone/>
-                        <a:defRPr sz="1850" b="0">
-                          <a:solidFill>
-                            <a:srgbClr val="303437"/>
-                          </a:solidFill>
-                          <a:latin typeface="Noto Sans"/>
-                        </a:defRPr>
-                      </a:pPr>
-                      <a:r>
-                        <a:rPr sz="1850" b="0" lang="ja-JP" altLang="en-US">
-                          <a:solidFill>
-                            <a:srgbClr val="303437"/>
-                          </a:solidFill>
-                          <a:latin typeface="Noto Sans"/>
-                          <a:ea typeface="Noto Sans CJK JP"/>
-                          <a:cs typeface="Noto Sans"/>
-                        </a:rPr>
-                        <a:t>6.27</a:t>
-                      </a:r>
-                    </a:p>
-                  </a:txBody>
-                  <a:tcPr marL="63500" marR="63500" marT="38100" marB="38100" anchor="ctr">
-                    <a:lnL w="7620">
-                      <a:noFill/>
-                    </a:lnL>
-                    <a:lnR w="7620">
-                      <a:noFill/>
-                    </a:lnR>
-                    <a:lnT w="7620">
-                      <a:noFill/>
-                    </a:lnT>
-                    <a:lnB w="7620">
-                      <a:noFill/>
-                    </a:lnB>
-                    <a:solidFill>
-                      <a:srgbClr val="FFFEF8"/>
-                    </a:solidFill>
-                  </a:tcPr>
-                </a:tc>
-                <a:tc>
-                  <a:txBody>
-                    <a:bodyPr wrap="square">
-                      <a:noAutofit/>
-                    </a:bodyPr>
-                    <a:lstStyle/>
-                    <a:p>
-                      <a:pPr algn="r">
-                        <a:lnSpc>
-                          <a:spcPts val="2127"/>
-                        </a:lnSpc>
-                        <a:buNone/>
-                        <a:defRPr sz="1850" b="0">
-                          <a:solidFill>
-                            <a:srgbClr val="303437"/>
-                          </a:solidFill>
-                          <a:latin typeface="Noto Sans"/>
-                        </a:defRPr>
-                      </a:pPr>
-                      <a:r>
-                        <a:rPr sz="1850" b="0" lang="ja-JP" altLang="en-US">
-                          <a:solidFill>
-                            <a:srgbClr val="303437"/>
-                          </a:solidFill>
-                          <a:latin typeface="Noto Sans"/>
-                          <a:ea typeface="Noto Sans CJK JP"/>
-                          <a:cs typeface="Noto Sans"/>
-                        </a:rPr>
-                        <a:t>17.88</a:t>
-                      </a:r>
-                    </a:p>
-                  </a:txBody>
-                  <a:tcPr marL="63500" marR="63500" marT="38100" marB="38100" anchor="ctr">
-                    <a:lnL w="7620">
-                      <a:noFill/>
-                    </a:lnL>
-                    <a:lnR w="7620">
-                      <a:noFill/>
-                    </a:lnR>
-                    <a:lnT w="7620">
-                      <a:noFill/>
-                    </a:lnT>
-                    <a:lnB w="7620">
-                      <a:noFill/>
-                    </a:lnB>
-                    <a:solidFill>
-                      <a:srgbClr val="FFFEF8"/>
-                    </a:solidFill>
-                  </a:tcPr>
-                </a:tc>
-                <a:tc>
-                  <a:txBody>
-                    <a:bodyPr wrap="square">
-                      <a:noAutofit/>
-                    </a:bodyPr>
-                    <a:lstStyle/>
-                    <a:p>
-                      <a:pPr algn="r">
-                        <a:lnSpc>
-                          <a:spcPts val="2127"/>
-                        </a:lnSpc>
-                        <a:buNone/>
-                        <a:defRPr sz="1850" b="0">
-                          <a:solidFill>
-                            <a:srgbClr val="303437"/>
-                          </a:solidFill>
-                          <a:latin typeface="Noto Sans"/>
-                        </a:defRPr>
-                      </a:pPr>
-                      <a:r>
-                        <a:rPr sz="1850" b="0" lang="ja-JP" altLang="en-US">
-                          <a:solidFill>
-                            <a:srgbClr val="303437"/>
-                          </a:solidFill>
-                          <a:latin typeface="Noto Sans"/>
-                          <a:ea typeface="Noto Sans CJK JP"/>
-                          <a:cs typeface="Noto Sans"/>
-                        </a:rPr>
-                        <a:t>26.12</a:t>
-                      </a:r>
-                    </a:p>
-                  </a:txBody>
-                  <a:tcPr marL="63500" marR="63500" marT="38100" marB="38100" anchor="ctr">
-                    <a:lnL w="7620">
-                      <a:noFill/>
-                    </a:lnL>
-                    <a:lnR w="7620">
-                      <a:noFill/>
-                    </a:lnR>
-                    <a:lnT w="7620">
-                      <a:noFill/>
-                    </a:lnT>
-                    <a:lnB w="7620">
-                      <a:noFill/>
-                    </a:lnB>
-                    <a:solidFill>
-                      <a:srgbClr val="FFFEF8"/>
-                    </a:solidFill>
-                  </a:tcPr>
-                </a:tc>
-              </a:tr>
-              <a:tr h="420624">
-                <a:tc>
-                  <a:txBody>
-                    <a:bodyPr wrap="square">
-                      <a:noAutofit/>
-                    </a:bodyPr>
-                    <a:lstStyle/>
-                    <a:p>
-                      <a:pPr algn="l">
-                        <a:lnSpc>
-                          <a:spcPts val="2127"/>
-                        </a:lnSpc>
-                        <a:buNone/>
-                        <a:defRPr sz="1850" b="0">
-                          <a:solidFill>
-                            <a:srgbClr val="303437"/>
-                          </a:solidFill>
-                          <a:latin typeface="Noto Sans"/>
-                        </a:defRPr>
-                      </a:pPr>
-                      <a:r>
-                        <a:rPr sz="1850" b="0" lang="ja-JP" altLang="en-US">
-                          <a:solidFill>
-                            <a:srgbClr val="303437"/>
-                          </a:solidFill>
-                          <a:latin typeface="Noto Sans"/>
-                          <a:ea typeface="Noto Sans CJK JP"/>
-                          <a:cs typeface="Noto Sans"/>
-                        </a:rPr>
-                        <a:t>出生地</a:t>
-                      </a:r>
-                    </a:p>
-                  </a:txBody>
-                  <a:tcPr marL="63500" marR="63500" marT="38100" marB="38100" anchor="ctr">
-                    <a:lnL w="7620">
-                      <a:noFill/>
-                    </a:lnL>
-                    <a:lnR w="7620">
-                      <a:noFill/>
-                    </a:lnR>
-                    <a:lnT w="7620">
-                      <a:noFill/>
-                    </a:lnT>
-                    <a:lnB w="7620">
-                      <a:noFill/>
-                    </a:lnB>
-                    <a:solidFill>
-                      <a:srgbClr val="FFFEF8"/>
-                    </a:solidFill>
-                  </a:tcPr>
-                </a:tc>
-                <a:tc>
-                  <a:txBody>
-                    <a:bodyPr wrap="square">
-                      <a:noAutofit/>
-                    </a:bodyPr>
-                    <a:lstStyle/>
-                    <a:p>
-                      <a:pPr algn="r">
-                        <a:lnSpc>
-                          <a:spcPts val="2127"/>
-                        </a:lnSpc>
-                        <a:buNone/>
-                        <a:defRPr sz="1850" b="0">
-                          <a:solidFill>
-                            <a:srgbClr val="303437"/>
-                          </a:solidFill>
-                          <a:latin typeface="Noto Sans"/>
-                        </a:defRPr>
-                      </a:pPr>
-                      <a:r>
-                        <a:rPr sz="1850" b="0" lang="ja-JP" altLang="en-US">
-                          <a:solidFill>
-                            <a:srgbClr val="303437"/>
-                          </a:solidFill>
-                          <a:latin typeface="Noto Sans"/>
-                          <a:ea typeface="Noto Sans CJK JP"/>
-                          <a:cs typeface="Noto Sans"/>
-                        </a:rPr>
-                        <a:t>3.33</a:t>
-                      </a:r>
-                    </a:p>
-                  </a:txBody>
-                  <a:tcPr marL="63500" marR="63500" marT="38100" marB="38100" anchor="ctr">
-                    <a:lnL w="7620">
-                      <a:noFill/>
-                    </a:lnL>
-                    <a:lnR w="7620">
-                      <a:noFill/>
-                    </a:lnR>
-                    <a:lnT w="7620">
-                      <a:noFill/>
-                    </a:lnT>
-                    <a:lnB w="7620">
-                      <a:noFill/>
-                    </a:lnB>
-                    <a:solidFill>
-                      <a:srgbClr val="FFFEF8"/>
-                    </a:solidFill>
-                  </a:tcPr>
-                </a:tc>
-                <a:tc>
-                  <a:txBody>
-                    <a:bodyPr wrap="square">
-                      <a:noAutofit/>
-                    </a:bodyPr>
-                    <a:lstStyle/>
-                    <a:p>
-                      <a:pPr algn="r">
-                        <a:lnSpc>
-                          <a:spcPts val="2127"/>
-                        </a:lnSpc>
-                        <a:buNone/>
-                        <a:defRPr sz="1850" b="0">
-                          <a:solidFill>
-                            <a:srgbClr val="303437"/>
-                          </a:solidFill>
-                          <a:latin typeface="Noto Sans"/>
-                        </a:defRPr>
-                      </a:pPr>
-                      <a:r>
-                        <a:rPr sz="1850" b="0" lang="ja-JP" altLang="en-US">
-                          <a:solidFill>
-                            <a:srgbClr val="303437"/>
-                          </a:solidFill>
-                          <a:latin typeface="Noto Sans"/>
-                          <a:ea typeface="Noto Sans CJK JP"/>
-                          <a:cs typeface="Noto Sans"/>
-                        </a:rPr>
-                        <a:t>16.43</a:t>
-                      </a:r>
-                    </a:p>
-                  </a:txBody>
-                  <a:tcPr marL="63500" marR="63500" marT="38100" marB="38100" anchor="ctr">
-                    <a:lnL w="7620">
-                      <a:noFill/>
-                    </a:lnL>
-                    <a:lnR w="7620">
-                      <a:noFill/>
-                    </a:lnR>
-                    <a:lnT w="7620">
-                      <a:noFill/>
-                    </a:lnT>
-                    <a:lnB w="7620">
-                      <a:noFill/>
-                    </a:lnB>
-                    <a:solidFill>
-                      <a:srgbClr val="FFFEF8"/>
-                    </a:solidFill>
-                  </a:tcPr>
-                </a:tc>
-                <a:tc>
-                  <a:txBody>
-                    <a:bodyPr wrap="square">
-                      <a:noAutofit/>
-                    </a:bodyPr>
-                    <a:lstStyle/>
-                    <a:p>
-                      <a:pPr algn="r">
-                        <a:lnSpc>
-                          <a:spcPts val="2127"/>
-                        </a:lnSpc>
-                        <a:buNone/>
-                        <a:defRPr sz="1850" b="0">
-                          <a:solidFill>
-                            <a:srgbClr val="303437"/>
-                          </a:solidFill>
-                          <a:latin typeface="Noto Sans"/>
-                        </a:defRPr>
-                      </a:pPr>
-                      <a:r>
-                        <a:rPr sz="1850" b="0" lang="ja-JP" altLang="en-US">
-                          <a:solidFill>
-                            <a:srgbClr val="303437"/>
-                          </a:solidFill>
-                          <a:latin typeface="Noto Sans"/>
-                          <a:ea typeface="Noto Sans CJK JP"/>
-                          <a:cs typeface="Noto Sans"/>
-                        </a:rPr>
-                        <a:t>22.94</a:t>
-                      </a:r>
-                    </a:p>
-                  </a:txBody>
-                  <a:tcPr marL="63500" marR="63500" marT="38100" marB="38100" anchor="ctr">
-                    <a:lnL w="7620">
-                      <a:noFill/>
-                    </a:lnL>
-                    <a:lnR w="7620">
-                      <a:noFill/>
-                    </a:lnR>
-                    <a:lnT w="7620">
-                      <a:noFill/>
-                    </a:lnT>
-                    <a:lnB w="7620">
-                      <a:noFill/>
-                    </a:lnB>
-                    <a:solidFill>
-                      <a:srgbClr val="FFFEF8"/>
-                    </a:solidFill>
-                  </a:tcPr>
-                </a:tc>
-              </a:tr>
-              <a:tr h="420624">
-                <a:tc>
-                  <a:txBody>
-                    <a:bodyPr wrap="square">
-                      <a:noAutofit/>
-                    </a:bodyPr>
-                    <a:lstStyle/>
-                    <a:p>
-                      <a:pPr algn="l">
-                        <a:lnSpc>
-                          <a:spcPts val="2127"/>
-                        </a:lnSpc>
-                        <a:buNone/>
-                        <a:defRPr sz="1850" b="0">
-                          <a:solidFill>
-                            <a:srgbClr val="303437"/>
-                          </a:solidFill>
-                          <a:latin typeface="Noto Sans"/>
-                        </a:defRPr>
-                      </a:pPr>
-                      <a:r>
-                        <a:rPr sz="1850" b="0" lang="ja-JP" altLang="en-US">
-                          <a:solidFill>
-                            <a:srgbClr val="303437"/>
-                          </a:solidFill>
-                          <a:latin typeface="Noto Sans"/>
-                          <a:ea typeface="Noto Sans CJK JP"/>
-                          <a:cs typeface="Noto Sans"/>
-                        </a:rPr>
-                        <a:t>原告</a:t>
-                      </a:r>
-                    </a:p>
-                  </a:txBody>
-                  <a:tcPr marL="63500" marR="63500" marT="38100" marB="38100" anchor="ctr">
-                    <a:lnL w="7620">
-                      <a:noFill/>
-                    </a:lnL>
-                    <a:lnR w="7620">
-                      <a:noFill/>
-                    </a:lnR>
-                    <a:lnT w="7620">
-                      <a:noFill/>
-                    </a:lnT>
-                    <a:lnB w="15240">
-                      <a:solidFill>
-                        <a:srgbClr val="626669"/>
-                      </a:solidFill>
-                      <a:prstDash val="solid"/>
-                    </a:lnB>
-                    <a:solidFill>
-                      <a:srgbClr val="FFFEF8"/>
-                    </a:solidFill>
-                  </a:tcPr>
-                </a:tc>
-                <a:tc>
-                  <a:txBody>
-                    <a:bodyPr wrap="square">
-                      <a:noAutofit/>
-                    </a:bodyPr>
-                    <a:lstStyle/>
-                    <a:p>
-                      <a:pPr algn="r">
-                        <a:lnSpc>
-                          <a:spcPts val="2127"/>
-                        </a:lnSpc>
-                        <a:buNone/>
-                        <a:defRPr sz="1850" b="0">
-                          <a:solidFill>
-                            <a:srgbClr val="303437"/>
-                          </a:solidFill>
-                          <a:latin typeface="Noto Sans"/>
-                        </a:defRPr>
-                      </a:pPr>
-                      <a:r>
-                        <a:rPr sz="1850" b="0" lang="ja-JP" altLang="en-US">
-                          <a:solidFill>
-                            <a:srgbClr val="303437"/>
-                          </a:solidFill>
-                          <a:latin typeface="Noto Sans"/>
-                          <a:ea typeface="Noto Sans CJK JP"/>
-                          <a:cs typeface="Noto Sans"/>
-                        </a:rPr>
-                        <a:t>50.69</a:t>
-                      </a:r>
-                    </a:p>
-                  </a:txBody>
-                  <a:tcPr marL="63500" marR="63500" marT="38100" marB="38100" anchor="ctr">
-                    <a:lnL w="7620">
-                      <a:noFill/>
-                    </a:lnL>
-                    <a:lnR w="7620">
-                      <a:noFill/>
-                    </a:lnR>
-                    <a:lnT w="7620">
-                      <a:noFill/>
-                    </a:lnT>
-                    <a:lnB w="15240">
-                      <a:solidFill>
-                        <a:srgbClr val="626669"/>
-                      </a:solidFill>
-                      <a:prstDash val="solid"/>
-                    </a:lnB>
-                    <a:solidFill>
-                      <a:srgbClr val="FFFEF8"/>
-                    </a:solidFill>
-                  </a:tcPr>
-                </a:tc>
-                <a:tc>
-                  <a:txBody>
-                    <a:bodyPr wrap="square">
-                      <a:noAutofit/>
-                    </a:bodyPr>
-                    <a:lstStyle/>
-                    <a:p>
-                      <a:pPr algn="r">
-                        <a:lnSpc>
-                          <a:spcPts val="2127"/>
-                        </a:lnSpc>
-                        <a:buNone/>
-                        <a:defRPr sz="1850" b="0">
-                          <a:solidFill>
-                            <a:srgbClr val="303437"/>
-                          </a:solidFill>
-                          <a:latin typeface="Noto Sans"/>
-                        </a:defRPr>
-                      </a:pPr>
-                      <a:r>
-                        <a:rPr sz="1850" b="0" lang="ja-JP" altLang="en-US">
-                          <a:solidFill>
-                            <a:srgbClr val="303437"/>
-                          </a:solidFill>
-                          <a:latin typeface="Noto Sans"/>
-                          <a:ea typeface="Noto Sans CJK JP"/>
-                          <a:cs typeface="Noto Sans"/>
-                        </a:rPr>
-                        <a:t>60.42</a:t>
-                      </a:r>
-                    </a:p>
-                  </a:txBody>
-                  <a:tcPr marL="63500" marR="63500" marT="38100" marB="38100" anchor="ctr">
-                    <a:lnL w="7620">
-                      <a:noFill/>
-                    </a:lnL>
-                    <a:lnR w="7620">
-                      <a:noFill/>
-                    </a:lnR>
-                    <a:lnT w="7620">
-                      <a:noFill/>
-                    </a:lnT>
-                    <a:lnB w="15240">
-                      <a:solidFill>
-                        <a:srgbClr val="626669"/>
-                      </a:solidFill>
-                      <a:prstDash val="solid"/>
-                    </a:lnB>
-                    <a:solidFill>
-                      <a:srgbClr val="FFFEF8"/>
-                    </a:solidFill>
-                  </a:tcPr>
-                </a:tc>
-                <a:tc>
-                  <a:txBody>
-                    <a:bodyPr wrap="square">
-                      <a:noAutofit/>
-                    </a:bodyPr>
-                    <a:lstStyle/>
-                    <a:p>
-                      <a:pPr algn="r">
-                        <a:lnSpc>
-                          <a:spcPts val="2127"/>
-                        </a:lnSpc>
-                        <a:buNone/>
-                        <a:defRPr sz="1850" b="0">
-                          <a:solidFill>
-                            <a:srgbClr val="303437"/>
-                          </a:solidFill>
-                          <a:latin typeface="Noto Sans"/>
-                        </a:defRPr>
-                      </a:pPr>
-                      <a:r>
-                        <a:rPr sz="1850" b="0" lang="ja-JP" altLang="en-US">
-                          <a:solidFill>
-                            <a:srgbClr val="303437"/>
-                          </a:solidFill>
-                          <a:latin typeface="Noto Sans"/>
-                          <a:ea typeface="Noto Sans CJK JP"/>
-                          <a:cs typeface="Noto Sans"/>
-                        </a:rPr>
-                        <a:t>68.75</a:t>
-                      </a:r>
-                    </a:p>
-                  </a:txBody>
-                  <a:tcPr marL="63500" marR="63500" marT="38100" marB="38100" anchor="ctr">
-                    <a:lnL w="7620">
-                      <a:noFill/>
-                    </a:lnL>
-                    <a:lnR w="7620">
-                      <a:noFill/>
-                    </a:lnR>
-                    <a:lnT w="7620">
-                      <a:noFill/>
-                    </a:lnT>
-                    <a:lnB w="15240">
-                      <a:solidFill>
-                        <a:srgbClr val="626669"/>
-                      </a:solidFill>
-                      <a:prstDash val="solid"/>
-                    </a:lnB>
-                    <a:solidFill>
-                      <a:srgbClr val="FFFEF8"/>
-                    </a:solidFill>
-                  </a:tcPr>
-                </a:tc>
-              </a:tr>
-            </a:tbl>
-          </a:graphicData>
-        </a:graphic>
-      </p:graphicFrame>
-      <p:sp>
-        <p:nvSpPr>
-          <p:cNvPr id="5" name="TextBox 4"/>
-          <p:cNvSpPr txBox="1"/>
-          <p:nvPr/>
-        </p:nvSpPr>
-        <p:spPr>
-          <a:xfrm>
-            <a:off x="594360" y="3813048"/>
-            <a:ext cx="7955279" cy="658368"/>
-          </a:xfrm>
-          <a:prstGeom prst="rect">
-            <a:avLst/>
-          </a:prstGeom>
-          <a:noFill/>
-        </p:spPr>
-        <p:txBody>
-          <a:bodyPr wrap="square" lIns="0" rIns="0" tIns="0" bIns="0">
-            <a:noAutofit/>
-          </a:bodyPr>
-          <a:lstStyle/>
-          <a:p>
-            <a:pPr algn="l">
-              <a:lnSpc>
-                <a:spcPts val="2047"/>
-              </a:lnSpc>
-              <a:spcBef>
-                <a:spcPts val="0"/>
-              </a:spcBef>
-              <a:spcAft>
-                <a:spcPts val="0"/>
-              </a:spcAft>
-              <a:buNone/>
-              <a:defRPr sz="1750" b="0">
-                <a:solidFill>
-                  <a:srgbClr val="303437"/>
-                </a:solidFill>
-                <a:latin typeface="Noto Sans"/>
-              </a:defRPr>
-            </a:pPr>
-            <a:r>
-              <a:rPr sz="1750" b="0" lang="ja-JP" altLang="en-US">
-                <a:solidFill>
-                  <a:srgbClr val="303437"/>
-                </a:solidFill>
-                <a:latin typeface="Noto Sans"/>
-                <a:ea typeface="Noto Sans CJK JP"/>
-                <a:cs typeface="Noto Sans"/>
-              </a:rPr>
-              <a:t>Accuracy@1（%）。各関係を独立に評価。候補数は5／5／1、試行数は3／3／1。</a:t>
-            </a:r>
-          </a:p>
-        </p:txBody>
-      </p:sp>
-      <p:sp>
-        <p:nvSpPr>
-          <p:cNvPr id="6" name="sources"/>
-          <p:cNvSpPr txBox="1"/>
-          <p:nvPr/>
-        </p:nvSpPr>
-        <p:spPr>
-          <a:xfrm>
-            <a:off x="502920" y="4700016"/>
-            <a:ext cx="8183879" cy="530352"/>
-          </a:xfrm>
-          <a:prstGeom prst="rect">
-            <a:avLst/>
-          </a:prstGeom>
-          <a:noFill/>
-        </p:spPr>
-        <p:txBody>
-          <a:bodyPr wrap="square" lIns="0" rIns="0" tIns="0" bIns="0">
-            <a:noAutofit/>
-          </a:bodyPr>
-          <a:lstStyle/>
-          <a:p>
-            <a:pPr algn="l">
-              <a:lnSpc>
-                <a:spcPts val="940"/>
-              </a:lnSpc>
-              <a:spcBef>
-                <a:spcPts val="0"/>
-              </a:spcBef>
-              <a:spcAft>
-                <a:spcPts val="140"/>
-              </a:spcAft>
-              <a:buNone/>
-              <a:defRPr sz="810" b="0">
-                <a:solidFill>
-                  <a:srgbClr val="303437"/>
-                </a:solidFill>
-                <a:latin typeface="Noto Sans"/>
-              </a:defRPr>
-            </a:pPr>
-            <a:r>
-              <a:rPr sz="810" b="0" lang="ja-JP" altLang="en-US">
-                <a:solidFill>
-                  <a:srgbClr val="626669"/>
-                </a:solidFill>
-                <a:latin typeface="Noto Sans"/>
-                <a:ea typeface="Noto Sans CJK JP"/>
-                <a:cs typeface="Noto Sans"/>
-              </a:rPr>
-              <a:t>[1] Stanford CRFM. HELM Classic v0.4.0 — WikiFact（2023）。 </a:t>
-            </a:r>
-            <a:r>
-              <a:rPr sz="810" b="0" lang="ja-JP" altLang="en-US">
-                <a:solidFill>
-                  <a:srgbClr val="626669"/>
-                </a:solidFill>
-                <a:latin typeface="Noto Sans"/>
-                <a:ea typeface="Noto Sans CJK JP"/>
-                <a:cs typeface="Noto Sans"/>
-              </a:rPr>
-              <a:t>  </a:t>
-            </a:r>
-            <a:r>
-              <a:rPr sz="810" b="0" lang="ja-JP" altLang="en-US">
-                <a:solidFill>
-                  <a:srgbClr val="626669"/>
-                </a:solidFill>
-                <a:latin typeface="Noto Sans"/>
-                <a:ea typeface="Noto Sans CJK JP"/>
-                <a:cs typeface="Noto Sans"/>
-                <a:hlinkClick r:id="rId2"/>
-              </a:rPr>
-              <a:t>https://crfm.stanford.edu/helm/classic/v0.4.0/#/groups/wikifact</a:t>
+              <a:t>3. 参照回答に一致するかを評価する</a:t>
             </a:r>
           </a:p>
         </p:txBody>
@@ -15838,7 +12122,7 @@
                 <a:ea typeface="Noto Sans CJK JP"/>
                 <a:cs typeface="Noto Sans"/>
               </a:rPr>
-              <a:t>短い補完でも、参照と生成形式が効く</a:t>
+              <a:t>参照に含まれる名前が、正誤を左右する</a:t>
             </a:r>
           </a:p>
         </p:txBody>
@@ -15886,7 +12170,7 @@
                 <a:ea typeface="Noto Sans CJK JP"/>
                 <a:cs typeface="Noto Sans"/>
               </a:rPr>
-              <a:t>3. HELMの採点と公開成績</a:t>
+              <a:t>3. 参照回答に一致するかを評価する</a:t>
             </a:r>
           </a:p>
         </p:txBody>
@@ -15940,7 +12224,7 @@
                 <a:ea typeface="Noto Sans CJK JP"/>
                 <a:cs typeface="Noto Sans"/>
               </a:rPr>
-              <a:t>実例3ではUSLという略称は参照に含まれず、会社名の全文が必要だった。正規化は略語の展開や、意味の同一性の推論を行わない。</a:t>
+              <a:t>実例3のUSLという略称は、参照回答に含まれていない。人が同じ組織を思い浮かべても、参照に一致する名前でなければ正解にならない。</a:t>
             </a:r>
           </a:p>
           <a:p>
@@ -15968,7 +12252,7 @@
                 <a:ea typeface="Noto Sans CJK JP"/>
                 <a:cs typeface="Noto Sans"/>
               </a:rPr>
-              <a:t>出力上限は8トークンなので、長い固有名や複数の答えをまとめる出力は途中で切れる場合がある。参照のいずれか一つに合う短い補完を求める評価となる。</a:t>
+              <a:t>知識基盤の名前や別名の収録範囲が、評価に影響する。複数の参照を持つ場合は、そのうち一つに合う補完を求める。</a:t>
             </a:r>
           </a:p>
         </p:txBody>
@@ -16022,7 +12306,7 @@
                 <a:ea typeface="Noto Sans CJK JP"/>
                 <a:cs typeface="Noto Sans"/>
               </a:rPr>
-              <a:t>[1] Stanford CRFM. HELM evaluate_reference_metrics。 </a:t>
+              <a:t>[1] Stanford CRFM. evaluate_reference_metrics。 </a:t>
             </a:r>
           </a:p>
           <a:p>
@@ -16114,7 +12398,7 @@
                 <a:ea typeface="Noto Sans CJK JP"/>
                 <a:cs typeface="Noto Sans"/>
               </a:rPr>
-              <a:t>利用の位置付けと入手方法</a:t>
+              <a:t>データの入手と利用条件</a:t>
             </a:r>
           </a:p>
         </p:txBody>
@@ -16162,283 +12446,7 @@
                 <a:ea typeface="Noto Sans CJK JP"/>
                 <a:cs typeface="Noto Sans"/>
               </a:rPr>
-              <a:t>4. 利用の位置付けと入手方法</a:t>
-            </a:r>
-          </a:p>
-        </p:txBody>
-      </p:sp>
-    </p:spTree>
-  </p:cSld>
-  <p:clrMapOvr>
-    <a:masterClrMapping/>
-  </p:clrMapOvr>
-</p:sld>
-</file>
-
-<file path=ppt/slides/slide25.xml><?xml version="1.0" encoding="utf-8"?>
-<p:sld xmlns:a="http://schemas.openxmlformats.org/drawingml/2006/main" xmlns:p="http://schemas.openxmlformats.org/presentationml/2006/main" xmlns:r="http://schemas.openxmlformats.org/officeDocument/2006/relationships">
-  <p:cSld>
-    <p:spTree>
-      <p:nvGrpSpPr>
-        <p:cNvPr id="1" name=""/>
-        <p:cNvGrpSpPr/>
-        <p:nvPr/>
-      </p:nvGrpSpPr>
-      <p:grpSpPr/>
-      <p:sp>
-        <p:nvSpPr>
-          <p:cNvPr id="2" name="Title 1"/>
-          <p:cNvSpPr>
-            <a:spLocks noGrp="1"/>
-          </p:cNvSpPr>
-          <p:nvPr>
-            <p:ph type="title"/>
-          </p:nvPr>
-        </p:nvSpPr>
-        <p:spPr>
-          <a:xfrm>
-            <a:off x="468172" y="650138"/>
-            <a:ext cx="8206740" cy="616305"/>
-          </a:xfrm>
-        </p:spPr>
-        <p:txBody>
-          <a:bodyPr wrap="square" lIns="0" rIns="0" tIns="0" bIns="0">
-            <a:noAutofit/>
-          </a:bodyPr>
-          <a:lstStyle/>
-          <a:p>
-            <a:pPr algn="l">
-              <a:lnSpc>
-                <a:spcPct val="110000"/>
-              </a:lnSpc>
-              <a:buNone/>
-              <a:defRPr sz="2800" b="0">
-                <a:solidFill>
-                  <a:srgbClr val="303437"/>
-                </a:solidFill>
-                <a:latin typeface="Noto Sans"/>
-              </a:defRPr>
-            </a:pPr>
-            <a:r>
-              <a:rPr sz="2800" b="1" lang="ja-JP" altLang="en-US">
-                <a:solidFill>
-                  <a:srgbClr val="303437"/>
-                </a:solidFill>
-                <a:latin typeface="Noto Sans"/>
-                <a:ea typeface="Noto Sans CJK JP"/>
-                <a:cs typeface="Noto Sans"/>
-              </a:rPr>
-              <a:t>根拠文を与えずに、事実知識を尋ねる</a:t>
-            </a:r>
-          </a:p>
-        </p:txBody>
-      </p:sp>
-      <p:sp>
-        <p:nvSpPr>
-          <p:cNvPr id="3" name="Title 2"/>
-          <p:cNvSpPr>
-            <a:spLocks noGrp="1"/>
-          </p:cNvSpPr>
-          <p:nvPr>
-            <p:ph type="title" idx="2"/>
-          </p:nvPr>
-        </p:nvSpPr>
-        <p:spPr>
-          <a:xfrm>
-            <a:off x="75895" y="0"/>
-            <a:ext cx="8115300" cy="480060"/>
-          </a:xfrm>
-        </p:spPr>
-        <p:txBody>
-          <a:bodyPr wrap="square" lIns="0" rIns="0" tIns="0" bIns="0" anchor="ctr">
-            <a:noAutofit/>
-          </a:bodyPr>
-          <a:lstStyle/>
-          <a:p>
-            <a:pPr algn="l">
-              <a:lnSpc>
-                <a:spcPct val="110000"/>
-              </a:lnSpc>
-              <a:buNone/>
-              <a:defRPr sz="1400" b="0">
-                <a:solidFill>
-                  <a:srgbClr val="303437"/>
-                </a:solidFill>
-                <a:latin typeface="Noto Sans"/>
-              </a:defRPr>
-            </a:pPr>
-            <a:r>
-              <a:rPr sz="1400" b="1" lang="ja-JP" altLang="en-US">
-                <a:solidFill>
-                  <a:srgbClr val="FFFEF8"/>
-                </a:solidFill>
-                <a:latin typeface="Noto Sans"/>
-                <a:ea typeface="Noto Sans CJK JP"/>
-                <a:cs typeface="Noto Sans"/>
-              </a:rPr>
-              <a:t>4. 利用の位置付けと入手方法</a:t>
-            </a:r>
-          </a:p>
-        </p:txBody>
-      </p:sp>
-      <p:sp>
-        <p:nvSpPr>
-          <p:cNvPr id="4" name="TextBox 3"/>
-          <p:cNvSpPr txBox="1"/>
-          <p:nvPr/>
-        </p:nvSpPr>
-        <p:spPr>
-          <a:xfrm>
-            <a:off x="594360" y="1463040"/>
-            <a:ext cx="7955279" cy="3044952"/>
-          </a:xfrm>
-          <a:prstGeom prst="rect">
-            <a:avLst/>
-          </a:prstGeom>
-          <a:noFill/>
-        </p:spPr>
-        <p:txBody>
-          <a:bodyPr wrap="square" lIns="0" rIns="0" tIns="0" bIns="0">
-            <a:noAutofit/>
-          </a:bodyPr>
-          <a:lstStyle/>
-          <a:p>
-            <a:pPr algn="l">
-              <a:lnSpc>
-                <a:spcPts val="2439"/>
-              </a:lnSpc>
-              <a:spcBef>
-                <a:spcPts val="0"/>
-              </a:spcBef>
-              <a:spcAft>
-                <a:spcPts val="1200"/>
-              </a:spcAft>
-              <a:buNone/>
-              <a:defRPr sz="2050" b="0">
-                <a:solidFill>
-                  <a:srgbClr val="303437"/>
-                </a:solidFill>
-                <a:latin typeface="Noto Sans"/>
-              </a:defRPr>
-            </a:pPr>
-            <a:r>
-              <a:rPr sz="2050" b="0" lang="ja-JP" altLang="en-US">
-                <a:solidFill>
-                  <a:srgbClr val="303437"/>
-                </a:solidFill>
-                <a:latin typeface="Noto Sans"/>
-                <a:ea typeface="Noto Sans CJK JP"/>
-                <a:cs typeface="Noto Sans"/>
-              </a:rPr>
-              <a:t>WikiFactは、主語と関係を示す短い文から、目的語となる名前を生成する。文章中の根拠を読み取る読解課題や、検索器で根拠を探す課題とは入力が異なる。</a:t>
-            </a:r>
-          </a:p>
-          <a:p>
-            <a:pPr>
-              <a:lnSpc>
-                <a:spcPts val="2439"/>
-              </a:lnSpc>
-              <a:spcAft>
-                <a:spcPts val="0"/>
-              </a:spcAft>
-              <a:buNone/>
-              <a:defRPr sz="2050" b="0">
-                <a:solidFill>
-                  <a:srgbClr val="303437"/>
-                </a:solidFill>
-                <a:latin typeface="Noto Sans"/>
-              </a:defRPr>
-            </a:pPr>
-            <a:r>
-              <a:rPr sz="2050" b="0" lang="ja-JP" altLang="en-US">
-                <a:solidFill>
-                  <a:srgbClr val="303437"/>
-                </a:solidFill>
-                <a:latin typeface="Noto Sans"/>
-                <a:ea typeface="Noto Sans CJK JP"/>
-                <a:cs typeface="Noto Sans"/>
-              </a:rPr>
-              <a:t>HELMの公開実装は86関係に対応する。ここで紹介した2023年の公開成績は、そのうち10関係に対するものである。</a:t>
-            </a:r>
-          </a:p>
-        </p:txBody>
-      </p:sp>
-      <p:sp>
-        <p:nvSpPr>
-          <p:cNvPr id="5" name="sources"/>
-          <p:cNvSpPr txBox="1"/>
-          <p:nvPr/>
-        </p:nvSpPr>
-        <p:spPr>
-          <a:xfrm>
-            <a:off x="502920" y="4700016"/>
-            <a:ext cx="8183879" cy="530352"/>
-          </a:xfrm>
-          <a:prstGeom prst="rect">
-            <a:avLst/>
-          </a:prstGeom>
-          <a:noFill/>
-        </p:spPr>
-        <p:txBody>
-          <a:bodyPr wrap="square" lIns="0" rIns="0" tIns="0" bIns="0">
-            <a:noAutofit/>
-          </a:bodyPr>
-          <a:lstStyle/>
-          <a:p>
-            <a:pPr algn="l">
-              <a:lnSpc>
-                <a:spcPts val="940"/>
-              </a:lnSpc>
-              <a:spcBef>
-                <a:spcPts val="0"/>
-              </a:spcBef>
-              <a:spcAft>
-                <a:spcPts val="140"/>
-              </a:spcAft>
-              <a:buNone/>
-              <a:defRPr sz="810" b="0">
-                <a:solidFill>
-                  <a:srgbClr val="303437"/>
-                </a:solidFill>
-                <a:latin typeface="Noto Sans"/>
-              </a:defRPr>
-            </a:pPr>
-            <a:r>
-              <a:rPr sz="810" b="0" lang="ja-JP" altLang="en-US">
-                <a:solidFill>
-                  <a:srgbClr val="626669"/>
-                </a:solidFill>
-                <a:latin typeface="Noto Sans"/>
-                <a:ea typeface="Noto Sans CJK JP"/>
-                <a:cs typeface="Noto Sans"/>
-              </a:rPr>
-              <a:t>[1] Stanford CRFM. HELM WIKIFactScenario。 </a:t>
-            </a:r>
-          </a:p>
-          <a:p>
-            <a:pPr>
-              <a:lnSpc>
-                <a:spcPts val="940"/>
-              </a:lnSpc>
-              <a:buNone/>
-              <a:defRPr sz="810" b="0">
-                <a:solidFill>
-                  <a:srgbClr val="303437"/>
-                </a:solidFill>
-                <a:latin typeface="Noto Sans"/>
-              </a:defRPr>
-            </a:pPr>
-            <a:r>
-              <a:rPr sz="810" b="0" lang="ja-JP" altLang="en-US">
-                <a:solidFill>
-                  <a:srgbClr val="626669"/>
-                </a:solidFill>
-                <a:latin typeface="Noto Sans"/>
-                <a:ea typeface="Noto Sans CJK JP"/>
-                <a:cs typeface="Noto Sans"/>
-                <a:hlinkClick r:id="rId2"/>
-              </a:rPr>
-              <a:t>https://github.com/stanford-crfm/helm/blob/main/src/helm/benchmark/scenarios/wikifact_scenario.py</a:t>
+              <a:t>4. データの入手と利用条件</a:t>
             </a:r>
           </a:p>
         </p:txBody>
@@ -16504,7 +12512,7 @@
                 <a:ea typeface="Noto Sans CJK JP"/>
                 <a:cs typeface="Noto Sans"/>
               </a:rPr>
-              <a:t>公式サイトで、関係別の成績と出力を見られる</a:t>
+              <a:t>配布JSONLと、公開例から利用を始める</a:t>
             </a:r>
           </a:p>
         </p:txBody>
@@ -16552,7 +12560,7 @@
                 <a:ea typeface="Noto Sans CJK JP"/>
                 <a:cs typeface="Noto Sans"/>
               </a:rPr>
-              <a:t>4. 利用の位置付けと入手方法</a:t>
+              <a:t>4. データの入手と利用条件</a:t>
             </a:r>
           </a:p>
         </p:txBody>
@@ -16606,7 +12614,7 @@
                 <a:ea typeface="Noto Sans CJK JP"/>
                 <a:cs typeface="Noto Sans"/>
               </a:rPr>
-              <a:t>公式HELMページでは、WikiFactの関係別・モデル別成績と、各問の入力・参照回答・生成結果を閲覧できる。</a:t>
+              <a:t>全86関係の問題は、CodaLabのtrain・dev・test JSONLとして案内されている。データの読込実装は、関係を指定して文章と参照回答を取り出す。</a:t>
             </a:r>
           </a:p>
           <a:p>
@@ -16634,7 +12642,7 @@
                 <a:ea typeface="Noto Sans CJK JP"/>
                 <a:cs typeface="Noto Sans"/>
               </a:rPr>
-              <a:t>全86関係の問題は、CodaLabのtrain・dev・test JSONLとして案内されている。公式サイトでは、10関係の公開実行に含まれる入力・参照回答・出力を利用できる。</a:t>
+              <a:t>公式サイトでは、10関係の公開入力・参照回答・出力を閲覧できる。問題の形を調べたり、名前の照合を試したりするために使える。</a:t>
             </a:r>
           </a:p>
         </p:txBody>
@@ -16688,7 +12696,7 @@
                 <a:ea typeface="Noto Sans CJK JP"/>
                 <a:cs typeface="Noto Sans"/>
               </a:rPr>
-              <a:t>[1] Stanford CRFM. HELM WIKIFactScenario。 </a:t>
+              <a:t>[1] Stanford CRFM. WIKIFactScenario。 </a:t>
             </a:r>
           </a:p>
           <a:p>
@@ -16780,7 +12788,7 @@
                 <a:ea typeface="Noto Sans CJK JP"/>
                 <a:cs typeface="Noto Sans"/>
               </a:rPr>
-              <a:t>実装コードはApache 2.0で公開される</a:t>
+              <a:t>読込コードと、加工済みデータの利用条件</a:t>
             </a:r>
           </a:p>
         </p:txBody>
@@ -16828,7 +12836,7 @@
                 <a:ea typeface="Noto Sans CJK JP"/>
                 <a:cs typeface="Noto Sans"/>
               </a:rPr>
-              <a:t>4. 利用の位置付けと入手方法</a:t>
+              <a:t>4. データの入手と利用条件</a:t>
             </a:r>
           </a:p>
         </p:txBody>
@@ -16882,7 +12890,7 @@
                 <a:ea typeface="Noto Sans CJK JP"/>
                 <a:cs typeface="Noto Sans"/>
               </a:rPr>
-              <a:t>HELMの実装コードはApache License 2.0で公開される。加工済みWikiFactデータの専用ライセンスは、公式論文と読込コードには明記されていない。</a:t>
+              <a:t>公開されている読込実装はApache License 2.0で提供される。加工済みWikiFactデータの専用ライセンスは、論文と読込コードには明記されていない。</a:t>
             </a:r>
           </a:p>
           <a:p>
@@ -16964,7 +12972,7 @@
                 <a:ea typeface="Noto Sans CJK JP"/>
                 <a:cs typeface="Noto Sans"/>
               </a:rPr>
-              <a:t>[1] Stanford CRFM, HELM. Apache License 2.0（コード）。</a:t>
+              <a:t>[1] Stanford CRFM. Apache License 2.0（読込コード）。 </a:t>
             </a:r>
             <a:r>
               <a:rPr sz="810" b="0" lang="ja-JP" altLang="en-US">
@@ -17101,7 +13109,7 @@
                 <a:ea typeface="Noto Sans CJK JP"/>
                 <a:cs typeface="Noto Sans"/>
               </a:rPr>
-              <a:t>4. 利用の位置付けと入手方法</a:t>
+              <a:t>4. データの入手と利用条件</a:t>
             </a:r>
           </a:p>
         </p:txBody>
@@ -17183,7 +13191,7 @@
                 <a:ea typeface="Noto Sans CJK JP"/>
                 <a:cs typeface="Noto Sans"/>
               </a:rPr>
-              <a:t>HELM Classicの公開成績は10関係の正答率を同じ重みで平均する。候補数の違いと、参照に含まれる名前の範囲が得点に影響する。</a:t>
+              <a:t>根拠文を与えず、モデルが事実を表す名前を答えられるかを調べる。入力の関係や知識の時点、参照に含まれる名前の範囲が評価の意味を決める。</a:t>
             </a:r>
           </a:p>
         </p:txBody>
@@ -17553,7 +13561,7 @@
                 <a:ea typeface="Noto Sans CJK JP"/>
                 <a:cs typeface="Noto Sans"/>
               </a:rPr>
-              <a:t>HELMの採点と公開成績</a:t>
+              <a:t>参照回答に一致するかを評価する</a:t>
             </a:r>
           </a:p>
           <a:p>
@@ -17583,7 +13591,7 @@
                 <a:ea typeface="Noto Sans CJK JP"/>
                 <a:cs typeface="Noto Sans"/>
               </a:rPr>
-              <a:t>利用の位置付けと入手方法</a:t>
+              <a:t>データの入手と利用条件</a:t>
             </a:r>
           </a:p>
         </p:txBody>
@@ -17780,7 +13788,7 @@
                 <a:ea typeface="Noto Sans CJK JP"/>
                 <a:cs typeface="Noto Sans"/>
               </a:rPr>
-              <a:t>関係別成績とデータの読込</a:t>
+              <a:t>公開例のデータ形式</a:t>
             </a:r>
           </a:p>
           <a:p>
@@ -18612,7 +14620,7 @@
                 <a:ea typeface="Noto Sans CJK JP"/>
                 <a:cs typeface="Noto Sans"/>
               </a:rPr>
-              <a:t>[1] Stanford CRFM. HELM Classic v0.4.0 — WikiFact（2023）。 </a:t>
+              <a:t>[1] Stanford CRFM (2023). WikiFact — 公開入力・参照回答。 </a:t>
             </a:r>
           </a:p>
           <a:p>
@@ -19278,7 +15286,7 @@
                 <a:ea typeface="Noto Sans CJK JP"/>
                 <a:cs typeface="Noto Sans"/>
               </a:rPr>
-              <a:t>[1] Stanford CRFM. HELM Classic v0.4.0 — WikiFact（2023）。 </a:t>
+              <a:t>[1] Stanford CRFM (2023). WikiFact — 公開入力・参照回答。 </a:t>
             </a:r>
           </a:p>
           <a:p>
@@ -19944,7 +15952,7 @@
                 <a:ea typeface="Noto Sans CJK JP"/>
                 <a:cs typeface="Noto Sans"/>
               </a:rPr>
-              <a:t>[1] Stanford CRFM. HELM Classic v0.4.0 — WikiFact（2023）。 </a:t>
+              <a:t>[1] Stanford CRFM (2023). WikiFact — 公開入力・参照回答。 </a:t>
             </a:r>
           </a:p>
           <a:p>
@@ -20610,7 +16618,7 @@
                 <a:ea typeface="Noto Sans CJK JP"/>
                 <a:cs typeface="Noto Sans"/>
               </a:rPr>
-              <a:t>[1] Stanford CRFM. HELM Classic v0.4.0 — WikiFact（2023）。 </a:t>
+              <a:t>[1] Stanford CRFM (2023). WikiFact — 公開入力・参照回答。 </a:t>
             </a:r>
           </a:p>
           <a:p>
@@ -21276,7 +17284,7 @@
                 <a:ea typeface="Noto Sans CJK JP"/>
                 <a:cs typeface="Noto Sans"/>
               </a:rPr>
-              <a:t>[1] Stanford CRFM. HELM Classic v0.4.0 — WikiFact（2023）。 </a:t>
+              <a:t>[1] Stanford CRFM (2023). WikiFact — 公開入力・参照回答。 </a:t>
             </a:r>
           </a:p>
           <a:p>
@@ -21942,7 +17950,7 @@
                 <a:ea typeface="Noto Sans CJK JP"/>
                 <a:cs typeface="Noto Sans"/>
               </a:rPr>
-              <a:t>[1] Stanford CRFM. HELM Classic v0.4.0 — WikiFact（2023）。 </a:t>
+              <a:t>[1] Stanford CRFM (2023). WikiFact — 公開入力・参照回答。 </a:t>
             </a:r>
           </a:p>
           <a:p>
@@ -22554,7 +18562,7 @@
                 <a:ea typeface="Noto Sans CJK JP"/>
                 <a:cs typeface="Noto Sans"/>
               </a:rPr>
-              <a:t>[1] Stanford CRFM. HELM Classic v0.4.0 — WikiFact（2023）。 </a:t>
+              <a:t>[1] Stanford CRFM (2023). WikiFact — 公開入力・参照回答。 </a:t>
             </a:r>
           </a:p>
           <a:p>
@@ -23220,7 +19228,7 @@
                 <a:ea typeface="Noto Sans CJK JP"/>
                 <a:cs typeface="Noto Sans"/>
               </a:rPr>
-              <a:t>[1] Stanford CRFM. HELM Classic v0.4.0 — WikiFact（2023）。 </a:t>
+              <a:t>[1] Stanford CRFM (2023). WikiFact — 公開入力・参照回答。 </a:t>
             </a:r>
           </a:p>
           <a:p>
@@ -24000,7 +20008,7 @@
                 <a:ea typeface="Noto Sans CJK JP"/>
                 <a:cs typeface="Noto Sans"/>
               </a:rPr>
-              <a:t>[1] Stanford CRFM. HELM Classic v0.4.0 — WikiFact（2023）。 </a:t>
+              <a:t>[1] Stanford CRFM (2023). WikiFact — 公開入力・参照回答。 </a:t>
             </a:r>
           </a:p>
           <a:p>
@@ -24666,7 +20674,7 @@
                 <a:ea typeface="Noto Sans CJK JP"/>
                 <a:cs typeface="Noto Sans"/>
               </a:rPr>
-              <a:t>[1] Stanford CRFM. HELM Classic v0.4.0 — WikiFact（2023）。 </a:t>
+              <a:t>[1] Stanford CRFM (2023). WikiFact — 公開入力・参照回答。 </a:t>
             </a:r>
           </a:p>
           <a:p>
@@ -24758,7 +20766,7 @@
                 <a:ea typeface="Noto Sans CJK JP"/>
                 <a:cs typeface="Noto Sans"/>
               </a:rPr>
-              <a:t>関係別成績とデータの読込</a:t>
+              <a:t>公開例のデータ形式</a:t>
             </a:r>
           </a:p>
         </p:txBody>
@@ -24806,3831 +20814,7 @@
                 <a:ea typeface="Noto Sans CJK JP"/>
                 <a:cs typeface="Noto Sans"/>
               </a:rPr>
-              <a:t>Appendix: 2. 関係別成績とデータの読込</a:t>
-            </a:r>
-          </a:p>
-        </p:txBody>
-      </p:sp>
-    </p:spTree>
-  </p:cSld>
-  <p:clrMapOvr>
-    <a:masterClrMapping/>
-  </p:clrMapOvr>
-</p:sld>
-</file>
-
-<file path=ppt/slides/slide43.xml><?xml version="1.0" encoding="utf-8"?>
-<p:sld xmlns:a="http://schemas.openxmlformats.org/drawingml/2006/main" xmlns:p="http://schemas.openxmlformats.org/presentationml/2006/main" xmlns:r="http://schemas.openxmlformats.org/officeDocument/2006/relationships">
-  <p:cSld>
-    <p:spTree>
-      <p:nvGrpSpPr>
-        <p:cNvPr id="1" name=""/>
-        <p:cNvGrpSpPr/>
-        <p:nvPr/>
-      </p:nvGrpSpPr>
-      <p:grpSpPr/>
-      <p:sp>
-        <p:nvSpPr>
-          <p:cNvPr id="2" name="Title 1"/>
-          <p:cNvSpPr>
-            <a:spLocks noGrp="1"/>
-          </p:cNvSpPr>
-          <p:nvPr>
-            <p:ph type="title"/>
-          </p:nvPr>
-        </p:nvSpPr>
-        <p:spPr>
-          <a:xfrm>
-            <a:off x="468172" y="650138"/>
-            <a:ext cx="8206740" cy="616305"/>
-          </a:xfrm>
-        </p:spPr>
-        <p:txBody>
-          <a:bodyPr wrap="square" lIns="0" rIns="0" tIns="0" bIns="0">
-            <a:noAutofit/>
-          </a:bodyPr>
-          <a:lstStyle/>
-          <a:p>
-            <a:pPr algn="l">
-              <a:lnSpc>
-                <a:spcPct val="110000"/>
-              </a:lnSpc>
-              <a:buNone/>
-              <a:defRPr sz="2800" b="0">
-                <a:solidFill>
-                  <a:srgbClr val="303437"/>
-                </a:solidFill>
-                <a:latin typeface="Noto Sans"/>
-              </a:defRPr>
-            </a:pPr>
-            <a:r>
-              <a:rPr sz="2800" b="1" lang="ja-JP" altLang="en-US">
-                <a:solidFill>
-                  <a:srgbClr val="303437"/>
-                </a:solidFill>
-                <a:latin typeface="Noto Sans"/>
-                <a:ea typeface="Noto Sans CJK JP"/>
-                <a:cs typeface="Noto Sans"/>
-              </a:rPr>
-              <a:t>10関係のAccuracy@1（前半）</a:t>
-            </a:r>
-          </a:p>
-        </p:txBody>
-      </p:sp>
-      <p:sp>
-        <p:nvSpPr>
-          <p:cNvPr id="3" name="Title 2"/>
-          <p:cNvSpPr>
-            <a:spLocks noGrp="1"/>
-          </p:cNvSpPr>
-          <p:nvPr>
-            <p:ph type="title" idx="2"/>
-          </p:nvPr>
-        </p:nvSpPr>
-        <p:spPr>
-          <a:xfrm>
-            <a:off x="75895" y="0"/>
-            <a:ext cx="8115300" cy="480060"/>
-          </a:xfrm>
-        </p:spPr>
-        <p:txBody>
-          <a:bodyPr wrap="square" lIns="0" rIns="0" tIns="0" bIns="0" anchor="ctr">
-            <a:noAutofit/>
-          </a:bodyPr>
-          <a:lstStyle/>
-          <a:p>
-            <a:pPr algn="l">
-              <a:lnSpc>
-                <a:spcPct val="110000"/>
-              </a:lnSpc>
-              <a:buNone/>
-              <a:defRPr sz="1400" b="0">
-                <a:solidFill>
-                  <a:srgbClr val="303437"/>
-                </a:solidFill>
-                <a:latin typeface="Noto Sans"/>
-              </a:defRPr>
-            </a:pPr>
-            <a:r>
-              <a:rPr sz="1400" b="1" lang="ja-JP" altLang="en-US">
-                <a:solidFill>
-                  <a:srgbClr val="FFFEF8"/>
-                </a:solidFill>
-                <a:latin typeface="Noto Sans"/>
-                <a:ea typeface="Noto Sans CJK JP"/>
-                <a:cs typeface="Noto Sans"/>
-              </a:rPr>
-              <a:t>Appendix: 2. 関係別成績とデータの読込</a:t>
-            </a:r>
-          </a:p>
-        </p:txBody>
-      </p:sp>
-      <p:graphicFrame>
-        <p:nvGraphicFramePr>
-          <p:cNvPr id="4" name="Table 3"/>
-          <p:cNvGraphicFramePr>
-            <a:graphicFrameLocks noGrp="1"/>
-          </p:cNvGraphicFramePr>
-          <p:nvPr/>
-        </p:nvGraphicFramePr>
-        <p:xfrm>
-          <a:off x="548640" y="1508760"/>
-          <a:ext cx="8046720" cy="2523744"/>
-        </p:xfrm>
-        <a:graphic>
-          <a:graphicData uri="http://schemas.openxmlformats.org/drawingml/2006/table">
-            <a:tbl>
-              <a:tblPr firstRow="0" bandRow="0"/>
-              <a:tblGrid>
-                <a:gridCol w="2788920"/>
-                <a:gridCol w="1737360"/>
-                <a:gridCol w="1783080"/>
-                <a:gridCol w="1737360"/>
-              </a:tblGrid>
-              <a:tr h="420624">
-                <a:tc>
-                  <a:txBody>
-                    <a:bodyPr wrap="square">
-                      <a:noAutofit/>
-                    </a:bodyPr>
-                    <a:lstStyle/>
-                    <a:p>
-                      <a:pPr algn="l">
-                        <a:lnSpc>
-                          <a:spcPts val="2012"/>
-                        </a:lnSpc>
-                        <a:buNone/>
-                        <a:defRPr sz="1750" b="0">
-                          <a:solidFill>
-                            <a:srgbClr val="303437"/>
-                          </a:solidFill>
-                          <a:latin typeface="Noto Sans"/>
-                        </a:defRPr>
-                      </a:pPr>
-                      <a:r>
-                        <a:rPr sz="1750" b="0" lang="ja-JP" altLang="en-US">
-                          <a:solidFill>
-                            <a:srgbClr val="303437"/>
-                          </a:solidFill>
-                          <a:latin typeface="Noto Sans"/>
-                          <a:ea typeface="Noto Sans CJK JP"/>
-                          <a:cs typeface="Noto Sans"/>
-                        </a:rPr>
-                        <a:t>関係</a:t>
-                      </a:r>
-                    </a:p>
-                  </a:txBody>
-                  <a:tcPr marL="63500" marR="63500" marT="38100" marB="38100" anchor="ctr">
-                    <a:lnL w="7620">
-                      <a:noFill/>
-                    </a:lnL>
-                    <a:lnR w="7620">
-                      <a:noFill/>
-                    </a:lnR>
-                    <a:lnT w="15240">
-                      <a:solidFill>
-                        <a:srgbClr val="626669"/>
-                      </a:solidFill>
-                      <a:prstDash val="solid"/>
-                    </a:lnT>
-                    <a:lnB w="7620">
-                      <a:solidFill>
-                        <a:srgbClr val="626669"/>
-                      </a:solidFill>
-                      <a:prstDash val="solid"/>
-                    </a:lnB>
-                    <a:solidFill>
-                      <a:srgbClr val="FFFEF8"/>
-                    </a:solidFill>
-                  </a:tcPr>
-                </a:tc>
-                <a:tc>
-                  <a:txBody>
-                    <a:bodyPr wrap="square">
-                      <a:noAutofit/>
-                    </a:bodyPr>
-                    <a:lstStyle/>
-                    <a:p>
-                      <a:pPr algn="r">
-                        <a:lnSpc>
-                          <a:spcPts val="2012"/>
-                        </a:lnSpc>
-                        <a:buNone/>
-                        <a:defRPr sz="1750" b="0">
-                          <a:solidFill>
-                            <a:srgbClr val="303437"/>
-                          </a:solidFill>
-                          <a:latin typeface="Noto Sans"/>
-                        </a:defRPr>
-                      </a:pPr>
-                      <a:r>
-                        <a:rPr sz="1750" b="0" lang="ja-JP" altLang="en-US">
-                          <a:solidFill>
-                            <a:srgbClr val="303437"/>
-                          </a:solidFill>
-                          <a:latin typeface="Noto Sans"/>
-                          <a:ea typeface="Noto Sans CJK JP"/>
-                          <a:cs typeface="Noto Sans"/>
-                        </a:rPr>
-                        <a:t>OPT-175B</a:t>
-                      </a:r>
-                    </a:p>
-                  </a:txBody>
-                  <a:tcPr marL="63500" marR="63500" marT="38100" marB="38100" anchor="ctr">
-                    <a:lnL w="7620">
-                      <a:noFill/>
-                    </a:lnL>
-                    <a:lnR w="7620">
-                      <a:noFill/>
-                    </a:lnR>
-                    <a:lnT w="15240">
-                      <a:solidFill>
-                        <a:srgbClr val="626669"/>
-                      </a:solidFill>
-                      <a:prstDash val="solid"/>
-                    </a:lnT>
-                    <a:lnB w="7620">
-                      <a:solidFill>
-                        <a:srgbClr val="626669"/>
-                      </a:solidFill>
-                      <a:prstDash val="solid"/>
-                    </a:lnB>
-                    <a:solidFill>
-                      <a:srgbClr val="FFFEF8"/>
-                    </a:solidFill>
-                  </a:tcPr>
-                </a:tc>
-                <a:tc>
-                  <a:txBody>
-                    <a:bodyPr wrap="square">
-                      <a:noAutofit/>
-                    </a:bodyPr>
-                    <a:lstStyle/>
-                    <a:p>
-                      <a:pPr algn="r">
-                        <a:lnSpc>
-                          <a:spcPts val="2012"/>
-                        </a:lnSpc>
-                        <a:buNone/>
-                        <a:defRPr sz="1750" b="0">
-                          <a:solidFill>
-                            <a:srgbClr val="303437"/>
-                          </a:solidFill>
-                          <a:latin typeface="Noto Sans"/>
-                        </a:defRPr>
-                      </a:pPr>
-                      <a:r>
-                        <a:rPr sz="1750" b="0" lang="ja-JP" altLang="en-US">
-                          <a:solidFill>
-                            <a:srgbClr val="303437"/>
-                          </a:solidFill>
-                          <a:latin typeface="Noto Sans"/>
-                          <a:ea typeface="Noto Sans CJK JP"/>
-                          <a:cs typeface="Noto Sans"/>
-                        </a:rPr>
-                        <a:t>davinci-003</a:t>
-                      </a:r>
-                    </a:p>
-                  </a:txBody>
-                  <a:tcPr marL="63500" marR="63500" marT="38100" marB="38100" anchor="ctr">
-                    <a:lnL w="7620">
-                      <a:noFill/>
-                    </a:lnL>
-                    <a:lnR w="7620">
-                      <a:noFill/>
-                    </a:lnR>
-                    <a:lnT w="15240">
-                      <a:solidFill>
-                        <a:srgbClr val="626669"/>
-                      </a:solidFill>
-                      <a:prstDash val="solid"/>
-                    </a:lnT>
-                    <a:lnB w="7620">
-                      <a:solidFill>
-                        <a:srgbClr val="626669"/>
-                      </a:solidFill>
-                      <a:prstDash val="solid"/>
-                    </a:lnB>
-                    <a:solidFill>
-                      <a:srgbClr val="FFFEF8"/>
-                    </a:solidFill>
-                  </a:tcPr>
-                </a:tc>
-                <a:tc>
-                  <a:txBody>
-                    <a:bodyPr wrap="square">
-                      <a:noAutofit/>
-                    </a:bodyPr>
-                    <a:lstStyle/>
-                    <a:p>
-                      <a:pPr algn="r">
-                        <a:lnSpc>
-                          <a:spcPts val="2012"/>
-                        </a:lnSpc>
-                        <a:buNone/>
-                        <a:defRPr sz="1750" b="0">
-                          <a:solidFill>
-                            <a:srgbClr val="303437"/>
-                          </a:solidFill>
-                          <a:latin typeface="Noto Sans"/>
-                        </a:defRPr>
-                      </a:pPr>
-                      <a:r>
-                        <a:rPr sz="1750" b="0" lang="ja-JP" altLang="en-US">
-                          <a:solidFill>
-                            <a:srgbClr val="303437"/>
-                          </a:solidFill>
-                          <a:latin typeface="Noto Sans"/>
-                          <a:ea typeface="Noto Sans CJK JP"/>
-                          <a:cs typeface="Noto Sans"/>
-                        </a:rPr>
-                        <a:t>Llama 2</a:t>
-                      </a:r>
-                    </a:p>
-                  </a:txBody>
-                  <a:tcPr marL="63500" marR="63500" marT="38100" marB="38100" anchor="ctr">
-                    <a:lnL w="7620">
-                      <a:noFill/>
-                    </a:lnL>
-                    <a:lnR w="7620">
-                      <a:noFill/>
-                    </a:lnR>
-                    <a:lnT w="15240">
-                      <a:solidFill>
-                        <a:srgbClr val="626669"/>
-                      </a:solidFill>
-                      <a:prstDash val="solid"/>
-                    </a:lnT>
-                    <a:lnB w="7620">
-                      <a:solidFill>
-                        <a:srgbClr val="626669"/>
-                      </a:solidFill>
-                      <a:prstDash val="solid"/>
-                    </a:lnB>
-                    <a:solidFill>
-                      <a:srgbClr val="FFFEF8"/>
-                    </a:solidFill>
-                  </a:tcPr>
-                </a:tc>
-              </a:tr>
-              <a:tr h="420624">
-                <a:tc>
-                  <a:txBody>
-                    <a:bodyPr wrap="square">
-                      <a:noAutofit/>
-                    </a:bodyPr>
-                    <a:lstStyle/>
-                    <a:p>
-                      <a:pPr algn="l">
-                        <a:lnSpc>
-                          <a:spcPts val="2012"/>
-                        </a:lnSpc>
-                        <a:buNone/>
-                        <a:defRPr sz="1750" b="0">
-                          <a:solidFill>
-                            <a:srgbClr val="303437"/>
-                          </a:solidFill>
-                          <a:latin typeface="Noto Sans"/>
-                        </a:defRPr>
-                      </a:pPr>
-                      <a:r>
-                        <a:rPr sz="1750" b="0" lang="ja-JP" altLang="en-US">
-                          <a:solidFill>
-                            <a:srgbClr val="303437"/>
-                          </a:solidFill>
-                          <a:latin typeface="Noto Sans"/>
-                          <a:ea typeface="Noto Sans CJK JP"/>
-                          <a:cs typeface="Noto Sans"/>
-                        </a:rPr>
-                        <a:t>著者</a:t>
-                      </a:r>
-                    </a:p>
-                  </a:txBody>
-                  <a:tcPr marL="63500" marR="63500" marT="38100" marB="38100" anchor="ctr">
-                    <a:lnL w="7620">
-                      <a:noFill/>
-                    </a:lnL>
-                    <a:lnR w="7620">
-                      <a:noFill/>
-                    </a:lnR>
-                    <a:lnT w="7620">
-                      <a:solidFill>
-                        <a:srgbClr val="626669"/>
-                      </a:solidFill>
-                      <a:prstDash val="solid"/>
-                    </a:lnT>
-                    <a:lnB w="7620">
-                      <a:noFill/>
-                    </a:lnB>
-                    <a:solidFill>
-                      <a:srgbClr val="FFFEF8"/>
-                    </a:solidFill>
-                  </a:tcPr>
-                </a:tc>
-                <a:tc>
-                  <a:txBody>
-                    <a:bodyPr wrap="square">
-                      <a:noAutofit/>
-                    </a:bodyPr>
-                    <a:lstStyle/>
-                    <a:p>
-                      <a:pPr algn="r">
-                        <a:lnSpc>
-                          <a:spcPts val="2012"/>
-                        </a:lnSpc>
-                        <a:buNone/>
-                        <a:defRPr sz="1750" b="0">
-                          <a:solidFill>
-                            <a:srgbClr val="303437"/>
-                          </a:solidFill>
-                          <a:latin typeface="Noto Sans"/>
-                        </a:defRPr>
-                      </a:pPr>
-                      <a:r>
-                        <a:rPr sz="1750" b="0" lang="ja-JP" altLang="en-US">
-                          <a:solidFill>
-                            <a:srgbClr val="303437"/>
-                          </a:solidFill>
-                          <a:latin typeface="Noto Sans"/>
-                          <a:ea typeface="Noto Sans CJK JP"/>
-                          <a:cs typeface="Noto Sans"/>
-                        </a:rPr>
-                        <a:t>17.06</a:t>
-                      </a:r>
-                    </a:p>
-                  </a:txBody>
-                  <a:tcPr marL="63500" marR="63500" marT="38100" marB="38100" anchor="ctr">
-                    <a:lnL w="7620">
-                      <a:noFill/>
-                    </a:lnL>
-                    <a:lnR w="7620">
-                      <a:noFill/>
-                    </a:lnR>
-                    <a:lnT w="7620">
-                      <a:solidFill>
-                        <a:srgbClr val="626669"/>
-                      </a:solidFill>
-                      <a:prstDash val="solid"/>
-                    </a:lnT>
-                    <a:lnB w="7620">
-                      <a:noFill/>
-                    </a:lnB>
-                    <a:solidFill>
-                      <a:srgbClr val="FFFEF8"/>
-                    </a:solidFill>
-                  </a:tcPr>
-                </a:tc>
-                <a:tc>
-                  <a:txBody>
-                    <a:bodyPr wrap="square">
-                      <a:noAutofit/>
-                    </a:bodyPr>
-                    <a:lstStyle/>
-                    <a:p>
-                      <a:pPr algn="r">
-                        <a:lnSpc>
-                          <a:spcPts val="2012"/>
-                        </a:lnSpc>
-                        <a:buNone/>
-                        <a:defRPr sz="1750" b="0">
-                          <a:solidFill>
-                            <a:srgbClr val="303437"/>
-                          </a:solidFill>
-                          <a:latin typeface="Noto Sans"/>
-                        </a:defRPr>
-                      </a:pPr>
-                      <a:r>
-                        <a:rPr sz="1750" b="0" lang="ja-JP" altLang="en-US">
-                          <a:solidFill>
-                            <a:srgbClr val="303437"/>
-                          </a:solidFill>
-                          <a:latin typeface="Noto Sans"/>
-                          <a:ea typeface="Noto Sans CJK JP"/>
-                          <a:cs typeface="Noto Sans"/>
-                        </a:rPr>
-                        <a:t>53.76</a:t>
-                      </a:r>
-                    </a:p>
-                  </a:txBody>
-                  <a:tcPr marL="63500" marR="63500" marT="38100" marB="38100" anchor="ctr">
-                    <a:lnL w="7620">
-                      <a:noFill/>
-                    </a:lnL>
-                    <a:lnR w="7620">
-                      <a:noFill/>
-                    </a:lnR>
-                    <a:lnT w="7620">
-                      <a:solidFill>
-                        <a:srgbClr val="626669"/>
-                      </a:solidFill>
-                      <a:prstDash val="solid"/>
-                    </a:lnT>
-                    <a:lnB w="7620">
-                      <a:noFill/>
-                    </a:lnB>
-                    <a:solidFill>
-                      <a:srgbClr val="FFFEF8"/>
-                    </a:solidFill>
-                  </a:tcPr>
-                </a:tc>
-                <a:tc>
-                  <a:txBody>
-                    <a:bodyPr wrap="square">
-                      <a:noAutofit/>
-                    </a:bodyPr>
-                    <a:lstStyle/>
-                    <a:p>
-                      <a:pPr algn="r">
-                        <a:lnSpc>
-                          <a:spcPts val="2012"/>
-                        </a:lnSpc>
-                        <a:buNone/>
-                        <a:defRPr sz="1750" b="0">
-                          <a:solidFill>
-                            <a:srgbClr val="303437"/>
-                          </a:solidFill>
-                          <a:latin typeface="Noto Sans"/>
-                        </a:defRPr>
-                      </a:pPr>
-                      <a:r>
-                        <a:rPr sz="1750" b="0" lang="ja-JP" altLang="en-US">
-                          <a:solidFill>
-                            <a:srgbClr val="303437"/>
-                          </a:solidFill>
-                          <a:latin typeface="Noto Sans"/>
-                          <a:ea typeface="Noto Sans CJK JP"/>
-                          <a:cs typeface="Noto Sans"/>
-                        </a:rPr>
-                        <a:t>61.53</a:t>
-                      </a:r>
-                    </a:p>
-                  </a:txBody>
-                  <a:tcPr marL="63500" marR="63500" marT="38100" marB="38100" anchor="ctr">
-                    <a:lnL w="7620">
-                      <a:noFill/>
-                    </a:lnL>
-                    <a:lnR w="7620">
-                      <a:noFill/>
-                    </a:lnR>
-                    <a:lnT w="7620">
-                      <a:solidFill>
-                        <a:srgbClr val="626669"/>
-                      </a:solidFill>
-                      <a:prstDash val="solid"/>
-                    </a:lnT>
-                    <a:lnB w="7620">
-                      <a:noFill/>
-                    </a:lnB>
-                    <a:solidFill>
-                      <a:srgbClr val="FFFEF8"/>
-                    </a:solidFill>
-                  </a:tcPr>
-                </a:tc>
-              </a:tr>
-              <a:tr h="420624">
-                <a:tc>
-                  <a:txBody>
-                    <a:bodyPr wrap="square">
-                      <a:noAutofit/>
-                    </a:bodyPr>
-                    <a:lstStyle/>
-                    <a:p>
-                      <a:pPr algn="l">
-                        <a:lnSpc>
-                          <a:spcPts val="2012"/>
-                        </a:lnSpc>
-                        <a:buNone/>
-                        <a:defRPr sz="1750" b="0">
-                          <a:solidFill>
-                            <a:srgbClr val="303437"/>
-                          </a:solidFill>
-                          <a:latin typeface="Noto Sans"/>
-                        </a:defRPr>
-                      </a:pPr>
-                      <a:r>
-                        <a:rPr sz="1750" b="0" lang="ja-JP" altLang="en-US">
-                          <a:solidFill>
-                            <a:srgbClr val="303437"/>
-                          </a:solidFill>
-                          <a:latin typeface="Noto Sans"/>
-                          <a:ea typeface="Noto Sans CJK JP"/>
-                          <a:cs typeface="Noto Sans"/>
-                        </a:rPr>
-                        <a:t>通貨</a:t>
-                      </a:r>
-                    </a:p>
-                  </a:txBody>
-                  <a:tcPr marL="63500" marR="63500" marT="38100" marB="38100" anchor="ctr">
-                    <a:lnL w="7620">
-                      <a:noFill/>
-                    </a:lnL>
-                    <a:lnR w="7620">
-                      <a:noFill/>
-                    </a:lnR>
-                    <a:lnT w="7620">
-                      <a:noFill/>
-                    </a:lnT>
-                    <a:lnB w="7620">
-                      <a:noFill/>
-                    </a:lnB>
-                    <a:solidFill>
-                      <a:srgbClr val="FFFEF8"/>
-                    </a:solidFill>
-                  </a:tcPr>
-                </a:tc>
-                <a:tc>
-                  <a:txBody>
-                    <a:bodyPr wrap="square">
-                      <a:noAutofit/>
-                    </a:bodyPr>
-                    <a:lstStyle/>
-                    <a:p>
-                      <a:pPr algn="r">
-                        <a:lnSpc>
-                          <a:spcPts val="2012"/>
-                        </a:lnSpc>
-                        <a:buNone/>
-                        <a:defRPr sz="1750" b="0">
-                          <a:solidFill>
-                            <a:srgbClr val="303437"/>
-                          </a:solidFill>
-                          <a:latin typeface="Noto Sans"/>
-                        </a:defRPr>
-                      </a:pPr>
-                      <a:r>
-                        <a:rPr sz="1750" b="0" lang="ja-JP" altLang="en-US">
-                          <a:solidFill>
-                            <a:srgbClr val="303437"/>
-                          </a:solidFill>
-                          <a:latin typeface="Noto Sans"/>
-                          <a:ea typeface="Noto Sans CJK JP"/>
-                          <a:cs typeface="Noto Sans"/>
-                        </a:rPr>
-                        <a:t>42.16</a:t>
-                      </a:r>
-                    </a:p>
-                  </a:txBody>
-                  <a:tcPr marL="63500" marR="63500" marT="38100" marB="38100" anchor="ctr">
-                    <a:lnL w="7620">
-                      <a:noFill/>
-                    </a:lnL>
-                    <a:lnR w="7620">
-                      <a:noFill/>
-                    </a:lnR>
-                    <a:lnT w="7620">
-                      <a:noFill/>
-                    </a:lnT>
-                    <a:lnB w="7620">
-                      <a:noFill/>
-                    </a:lnB>
-                    <a:solidFill>
-                      <a:srgbClr val="FFFEF8"/>
-                    </a:solidFill>
-                  </a:tcPr>
-                </a:tc>
-                <a:tc>
-                  <a:txBody>
-                    <a:bodyPr wrap="square">
-                      <a:noAutofit/>
-                    </a:bodyPr>
-                    <a:lstStyle/>
-                    <a:p>
-                      <a:pPr algn="r">
-                        <a:lnSpc>
-                          <a:spcPts val="2012"/>
-                        </a:lnSpc>
-                        <a:buNone/>
-                        <a:defRPr sz="1750" b="0">
-                          <a:solidFill>
-                            <a:srgbClr val="303437"/>
-                          </a:solidFill>
-                          <a:latin typeface="Noto Sans"/>
-                        </a:defRPr>
-                      </a:pPr>
-                      <a:r>
-                        <a:rPr sz="1750" b="0" lang="ja-JP" altLang="en-US">
-                          <a:solidFill>
-                            <a:srgbClr val="303437"/>
-                          </a:solidFill>
-                          <a:latin typeface="Noto Sans"/>
-                          <a:ea typeface="Noto Sans CJK JP"/>
-                          <a:cs typeface="Noto Sans"/>
-                        </a:rPr>
-                        <a:t>57.10</a:t>
-                      </a:r>
-                    </a:p>
-                  </a:txBody>
-                  <a:tcPr marL="63500" marR="63500" marT="38100" marB="38100" anchor="ctr">
-                    <a:lnL w="7620">
-                      <a:noFill/>
-                    </a:lnL>
-                    <a:lnR w="7620">
-                      <a:noFill/>
-                    </a:lnR>
-                    <a:lnT w="7620">
-                      <a:noFill/>
-                    </a:lnT>
-                    <a:lnB w="7620">
-                      <a:noFill/>
-                    </a:lnB>
-                    <a:solidFill>
-                      <a:srgbClr val="FFFEF8"/>
-                    </a:solidFill>
-                  </a:tcPr>
-                </a:tc>
-                <a:tc>
-                  <a:txBody>
-                    <a:bodyPr wrap="square">
-                      <a:noAutofit/>
-                    </a:bodyPr>
-                    <a:lstStyle/>
-                    <a:p>
-                      <a:pPr algn="r">
-                        <a:lnSpc>
-                          <a:spcPts val="2012"/>
-                        </a:lnSpc>
-                        <a:buNone/>
-                        <a:defRPr sz="1750" b="0">
-                          <a:solidFill>
-                            <a:srgbClr val="303437"/>
-                          </a:solidFill>
-                          <a:latin typeface="Noto Sans"/>
-                        </a:defRPr>
-                      </a:pPr>
-                      <a:r>
-                        <a:rPr sz="1750" b="0" lang="ja-JP" altLang="en-US">
-                          <a:solidFill>
-                            <a:srgbClr val="303437"/>
-                          </a:solidFill>
-                          <a:latin typeface="Noto Sans"/>
-                          <a:ea typeface="Noto Sans CJK JP"/>
-                          <a:cs typeface="Noto Sans"/>
-                        </a:rPr>
-                        <a:t>62.71</a:t>
-                      </a:r>
-                    </a:p>
-                  </a:txBody>
-                  <a:tcPr marL="63500" marR="63500" marT="38100" marB="38100" anchor="ctr">
-                    <a:lnL w="7620">
-                      <a:noFill/>
-                    </a:lnL>
-                    <a:lnR w="7620">
-                      <a:noFill/>
-                    </a:lnR>
-                    <a:lnT w="7620">
-                      <a:noFill/>
-                    </a:lnT>
-                    <a:lnB w="7620">
-                      <a:noFill/>
-                    </a:lnB>
-                    <a:solidFill>
-                      <a:srgbClr val="FFFEF8"/>
-                    </a:solidFill>
-                  </a:tcPr>
-                </a:tc>
-              </a:tr>
-              <a:tr h="420624">
-                <a:tc>
-                  <a:txBody>
-                    <a:bodyPr wrap="square">
-                      <a:noAutofit/>
-                    </a:bodyPr>
-                    <a:lstStyle/>
-                    <a:p>
-                      <a:pPr algn="l">
-                        <a:lnSpc>
-                          <a:spcPts val="2012"/>
-                        </a:lnSpc>
-                        <a:buNone/>
-                        <a:defRPr sz="1750" b="0">
-                          <a:solidFill>
-                            <a:srgbClr val="303437"/>
-                          </a:solidFill>
-                          <a:latin typeface="Noto Sans"/>
-                        </a:defRPr>
-                      </a:pPr>
-                      <a:r>
-                        <a:rPr sz="1750" b="0" lang="ja-JP" altLang="en-US">
-                          <a:solidFill>
-                            <a:srgbClr val="303437"/>
-                          </a:solidFill>
-                          <a:latin typeface="Noto Sans"/>
-                          <a:ea typeface="Noto Sans CJK JP"/>
-                          <a:cs typeface="Noto Sans"/>
-                        </a:rPr>
-                        <a:t>発見者・発明者</a:t>
-                      </a:r>
-                    </a:p>
-                  </a:txBody>
-                  <a:tcPr marL="63500" marR="63500" marT="38100" marB="38100" anchor="ctr">
-                    <a:lnL w="7620">
-                      <a:noFill/>
-                    </a:lnL>
-                    <a:lnR w="7620">
-                      <a:noFill/>
-                    </a:lnR>
-                    <a:lnT w="7620">
-                      <a:noFill/>
-                    </a:lnT>
-                    <a:lnB w="7620">
-                      <a:noFill/>
-                    </a:lnB>
-                    <a:solidFill>
-                      <a:srgbClr val="FFFEF8"/>
-                    </a:solidFill>
-                  </a:tcPr>
-                </a:tc>
-                <a:tc>
-                  <a:txBody>
-                    <a:bodyPr wrap="square">
-                      <a:noAutofit/>
-                    </a:bodyPr>
-                    <a:lstStyle/>
-                    <a:p>
-                      <a:pPr algn="r">
-                        <a:lnSpc>
-                          <a:spcPts val="2012"/>
-                        </a:lnSpc>
-                        <a:buNone/>
-                        <a:defRPr sz="1750" b="0">
-                          <a:solidFill>
-                            <a:srgbClr val="303437"/>
-                          </a:solidFill>
-                          <a:latin typeface="Noto Sans"/>
-                        </a:defRPr>
-                      </a:pPr>
-                      <a:r>
-                        <a:rPr sz="1750" b="0" lang="ja-JP" altLang="en-US">
-                          <a:solidFill>
-                            <a:srgbClr val="303437"/>
-                          </a:solidFill>
-                          <a:latin typeface="Noto Sans"/>
-                          <a:ea typeface="Noto Sans CJK JP"/>
-                          <a:cs typeface="Noto Sans"/>
-                        </a:rPr>
-                        <a:t>6.27</a:t>
-                      </a:r>
-                    </a:p>
-                  </a:txBody>
-                  <a:tcPr marL="63500" marR="63500" marT="38100" marB="38100" anchor="ctr">
-                    <a:lnL w="7620">
-                      <a:noFill/>
-                    </a:lnL>
-                    <a:lnR w="7620">
-                      <a:noFill/>
-                    </a:lnR>
-                    <a:lnT w="7620">
-                      <a:noFill/>
-                    </a:lnT>
-                    <a:lnB w="7620">
-                      <a:noFill/>
-                    </a:lnB>
-                    <a:solidFill>
-                      <a:srgbClr val="FFFEF8"/>
-                    </a:solidFill>
-                  </a:tcPr>
-                </a:tc>
-                <a:tc>
-                  <a:txBody>
-                    <a:bodyPr wrap="square">
-                      <a:noAutofit/>
-                    </a:bodyPr>
-                    <a:lstStyle/>
-                    <a:p>
-                      <a:pPr algn="r">
-                        <a:lnSpc>
-                          <a:spcPts val="2012"/>
-                        </a:lnSpc>
-                        <a:buNone/>
-                        <a:defRPr sz="1750" b="0">
-                          <a:solidFill>
-                            <a:srgbClr val="303437"/>
-                          </a:solidFill>
-                          <a:latin typeface="Noto Sans"/>
-                        </a:defRPr>
-                      </a:pPr>
-                      <a:r>
-                        <a:rPr sz="1750" b="0" lang="ja-JP" altLang="en-US">
-                          <a:solidFill>
-                            <a:srgbClr val="303437"/>
-                          </a:solidFill>
-                          <a:latin typeface="Noto Sans"/>
-                          <a:ea typeface="Noto Sans CJK JP"/>
-                          <a:cs typeface="Noto Sans"/>
-                        </a:rPr>
-                        <a:t>17.88</a:t>
-                      </a:r>
-                    </a:p>
-                  </a:txBody>
-                  <a:tcPr marL="63500" marR="63500" marT="38100" marB="38100" anchor="ctr">
-                    <a:lnL w="7620">
-                      <a:noFill/>
-                    </a:lnL>
-                    <a:lnR w="7620">
-                      <a:noFill/>
-                    </a:lnR>
-                    <a:lnT w="7620">
-                      <a:noFill/>
-                    </a:lnT>
-                    <a:lnB w="7620">
-                      <a:noFill/>
-                    </a:lnB>
-                    <a:solidFill>
-                      <a:srgbClr val="FFFEF8"/>
-                    </a:solidFill>
-                  </a:tcPr>
-                </a:tc>
-                <a:tc>
-                  <a:txBody>
-                    <a:bodyPr wrap="square">
-                      <a:noAutofit/>
-                    </a:bodyPr>
-                    <a:lstStyle/>
-                    <a:p>
-                      <a:pPr algn="r">
-                        <a:lnSpc>
-                          <a:spcPts val="2012"/>
-                        </a:lnSpc>
-                        <a:buNone/>
-                        <a:defRPr sz="1750" b="0">
-                          <a:solidFill>
-                            <a:srgbClr val="303437"/>
-                          </a:solidFill>
-                          <a:latin typeface="Noto Sans"/>
-                        </a:defRPr>
-                      </a:pPr>
-                      <a:r>
-                        <a:rPr sz="1750" b="0" lang="ja-JP" altLang="en-US">
-                          <a:solidFill>
-                            <a:srgbClr val="303437"/>
-                          </a:solidFill>
-                          <a:latin typeface="Noto Sans"/>
-                          <a:ea typeface="Noto Sans CJK JP"/>
-                          <a:cs typeface="Noto Sans"/>
-                        </a:rPr>
-                        <a:t>26.12</a:t>
-                      </a:r>
-                    </a:p>
-                  </a:txBody>
-                  <a:tcPr marL="63500" marR="63500" marT="38100" marB="38100" anchor="ctr">
-                    <a:lnL w="7620">
-                      <a:noFill/>
-                    </a:lnL>
-                    <a:lnR w="7620">
-                      <a:noFill/>
-                    </a:lnR>
-                    <a:lnT w="7620">
-                      <a:noFill/>
-                    </a:lnT>
-                    <a:lnB w="7620">
-                      <a:noFill/>
-                    </a:lnB>
-                    <a:solidFill>
-                      <a:srgbClr val="FFFEF8"/>
-                    </a:solidFill>
-                  </a:tcPr>
-                </a:tc>
-              </a:tr>
-              <a:tr h="420624">
-                <a:tc>
-                  <a:txBody>
-                    <a:bodyPr wrap="square">
-                      <a:noAutofit/>
-                    </a:bodyPr>
-                    <a:lstStyle/>
-                    <a:p>
-                      <a:pPr algn="l">
-                        <a:lnSpc>
-                          <a:spcPts val="2012"/>
-                        </a:lnSpc>
-                        <a:buNone/>
-                        <a:defRPr sz="1750" b="0">
-                          <a:solidFill>
-                            <a:srgbClr val="303437"/>
-                          </a:solidFill>
-                          <a:latin typeface="Noto Sans"/>
-                        </a:defRPr>
-                      </a:pPr>
-                      <a:r>
-                        <a:rPr sz="1750" b="0" lang="ja-JP" altLang="en-US">
-                          <a:solidFill>
-                            <a:srgbClr val="303437"/>
-                          </a:solidFill>
-                          <a:latin typeface="Noto Sans"/>
-                          <a:ea typeface="Noto Sans CJK JP"/>
-                          <a:cs typeface="Noto Sans"/>
-                        </a:rPr>
-                        <a:t>分類</a:t>
-                      </a:r>
-                    </a:p>
-                  </a:txBody>
-                  <a:tcPr marL="63500" marR="63500" marT="38100" marB="38100" anchor="ctr">
-                    <a:lnL w="7620">
-                      <a:noFill/>
-                    </a:lnL>
-                    <a:lnR w="7620">
-                      <a:noFill/>
-                    </a:lnR>
-                    <a:lnT w="7620">
-                      <a:noFill/>
-                    </a:lnT>
-                    <a:lnB w="7620">
-                      <a:noFill/>
-                    </a:lnB>
-                    <a:solidFill>
-                      <a:srgbClr val="FFFEF8"/>
-                    </a:solidFill>
-                  </a:tcPr>
-                </a:tc>
-                <a:tc>
-                  <a:txBody>
-                    <a:bodyPr wrap="square">
-                      <a:noAutofit/>
-                    </a:bodyPr>
-                    <a:lstStyle/>
-                    <a:p>
-                      <a:pPr algn="r">
-                        <a:lnSpc>
-                          <a:spcPts val="2012"/>
-                        </a:lnSpc>
-                        <a:buNone/>
-                        <a:defRPr sz="1750" b="0">
-                          <a:solidFill>
-                            <a:srgbClr val="303437"/>
-                          </a:solidFill>
-                          <a:latin typeface="Noto Sans"/>
-                        </a:defRPr>
-                      </a:pPr>
-                      <a:r>
-                        <a:rPr sz="1750" b="0" lang="ja-JP" altLang="en-US">
-                          <a:solidFill>
-                            <a:srgbClr val="303437"/>
-                          </a:solidFill>
-                          <a:latin typeface="Noto Sans"/>
-                          <a:ea typeface="Noto Sans CJK JP"/>
-                          <a:cs typeface="Noto Sans"/>
-                        </a:rPr>
-                        <a:t>34.24</a:t>
-                      </a:r>
-                    </a:p>
-                  </a:txBody>
-                  <a:tcPr marL="63500" marR="63500" marT="38100" marB="38100" anchor="ctr">
-                    <a:lnL w="7620">
-                      <a:noFill/>
-                    </a:lnL>
-                    <a:lnR w="7620">
-                      <a:noFill/>
-                    </a:lnR>
-                    <a:lnT w="7620">
-                      <a:noFill/>
-                    </a:lnT>
-                    <a:lnB w="7620">
-                      <a:noFill/>
-                    </a:lnB>
-                    <a:solidFill>
-                      <a:srgbClr val="FFFEF8"/>
-                    </a:solidFill>
-                  </a:tcPr>
-                </a:tc>
-                <a:tc>
-                  <a:txBody>
-                    <a:bodyPr wrap="square">
-                      <a:noAutofit/>
-                    </a:bodyPr>
-                    <a:lstStyle/>
-                    <a:p>
-                      <a:pPr algn="r">
-                        <a:lnSpc>
-                          <a:spcPts val="2012"/>
-                        </a:lnSpc>
-                        <a:buNone/>
-                        <a:defRPr sz="1750" b="0">
-                          <a:solidFill>
-                            <a:srgbClr val="303437"/>
-                          </a:solidFill>
-                          <a:latin typeface="Noto Sans"/>
-                        </a:defRPr>
-                      </a:pPr>
-                      <a:r>
-                        <a:rPr sz="1750" b="0" lang="ja-JP" altLang="en-US">
-                          <a:solidFill>
-                            <a:srgbClr val="303437"/>
-                          </a:solidFill>
-                          <a:latin typeface="Noto Sans"/>
-                          <a:ea typeface="Noto Sans CJK JP"/>
-                          <a:cs typeface="Noto Sans"/>
-                        </a:rPr>
-                        <a:t>45.73</a:t>
-                      </a:r>
-                    </a:p>
-                  </a:txBody>
-                  <a:tcPr marL="63500" marR="63500" marT="38100" marB="38100" anchor="ctr">
-                    <a:lnL w="7620">
-                      <a:noFill/>
-                    </a:lnL>
-                    <a:lnR w="7620">
-                      <a:noFill/>
-                    </a:lnR>
-                    <a:lnT w="7620">
-                      <a:noFill/>
-                    </a:lnT>
-                    <a:lnB w="7620">
-                      <a:noFill/>
-                    </a:lnB>
-                    <a:solidFill>
-                      <a:srgbClr val="FFFEF8"/>
-                    </a:solidFill>
-                  </a:tcPr>
-                </a:tc>
-                <a:tc>
-                  <a:txBody>
-                    <a:bodyPr wrap="square">
-                      <a:noAutofit/>
-                    </a:bodyPr>
-                    <a:lstStyle/>
-                    <a:p>
-                      <a:pPr algn="r">
-                        <a:lnSpc>
-                          <a:spcPts val="2012"/>
-                        </a:lnSpc>
-                        <a:buNone/>
-                        <a:defRPr sz="1750" b="0">
-                          <a:solidFill>
-                            <a:srgbClr val="303437"/>
-                          </a:solidFill>
-                          <a:latin typeface="Noto Sans"/>
-                        </a:defRPr>
-                      </a:pPr>
-                      <a:r>
-                        <a:rPr sz="1750" b="0" lang="ja-JP" altLang="en-US">
-                          <a:solidFill>
-                            <a:srgbClr val="303437"/>
-                          </a:solidFill>
-                          <a:latin typeface="Noto Sans"/>
-                          <a:ea typeface="Noto Sans CJK JP"/>
-                          <a:cs typeface="Noto Sans"/>
-                        </a:rPr>
-                        <a:t>60.47</a:t>
-                      </a:r>
-                    </a:p>
-                  </a:txBody>
-                  <a:tcPr marL="63500" marR="63500" marT="38100" marB="38100" anchor="ctr">
-                    <a:lnL w="7620">
-                      <a:noFill/>
-                    </a:lnL>
-                    <a:lnR w="7620">
-                      <a:noFill/>
-                    </a:lnR>
-                    <a:lnT w="7620">
-                      <a:noFill/>
-                    </a:lnT>
-                    <a:lnB w="7620">
-                      <a:noFill/>
-                    </a:lnB>
-                    <a:solidFill>
-                      <a:srgbClr val="FFFEF8"/>
-                    </a:solidFill>
-                  </a:tcPr>
-                </a:tc>
-              </a:tr>
-              <a:tr h="420624">
-                <a:tc>
-                  <a:txBody>
-                    <a:bodyPr wrap="square">
-                      <a:noAutofit/>
-                    </a:bodyPr>
-                    <a:lstStyle/>
-                    <a:p>
-                      <a:pPr algn="l">
-                        <a:lnSpc>
-                          <a:spcPts val="2012"/>
-                        </a:lnSpc>
-                        <a:buNone/>
-                        <a:defRPr sz="1750" b="0">
-                          <a:solidFill>
-                            <a:srgbClr val="303437"/>
-                          </a:solidFill>
-                          <a:latin typeface="Noto Sans"/>
-                        </a:defRPr>
-                      </a:pPr>
-                      <a:r>
-                        <a:rPr sz="1750" b="0" lang="ja-JP" altLang="en-US">
-                          <a:solidFill>
-                            <a:srgbClr val="303437"/>
-                          </a:solidFill>
-                          <a:latin typeface="Noto Sans"/>
-                          <a:ea typeface="Noto Sans CJK JP"/>
-                          <a:cs typeface="Noto Sans"/>
-                        </a:rPr>
-                        <a:t>治療対象</a:t>
-                      </a:r>
-                    </a:p>
-                  </a:txBody>
-                  <a:tcPr marL="63500" marR="63500" marT="38100" marB="38100" anchor="ctr">
-                    <a:lnL w="7620">
-                      <a:noFill/>
-                    </a:lnL>
-                    <a:lnR w="7620">
-                      <a:noFill/>
-                    </a:lnR>
-                    <a:lnT w="7620">
-                      <a:noFill/>
-                    </a:lnT>
-                    <a:lnB w="15240">
-                      <a:solidFill>
-                        <a:srgbClr val="626669"/>
-                      </a:solidFill>
-                      <a:prstDash val="solid"/>
-                    </a:lnB>
-                    <a:solidFill>
-                      <a:srgbClr val="FFFEF8"/>
-                    </a:solidFill>
-                  </a:tcPr>
-                </a:tc>
-                <a:tc>
-                  <a:txBody>
-                    <a:bodyPr wrap="square">
-                      <a:noAutofit/>
-                    </a:bodyPr>
-                    <a:lstStyle/>
-                    <a:p>
-                      <a:pPr algn="r">
-                        <a:lnSpc>
-                          <a:spcPts val="2012"/>
-                        </a:lnSpc>
-                        <a:buNone/>
-                        <a:defRPr sz="1750" b="0">
-                          <a:solidFill>
-                            <a:srgbClr val="303437"/>
-                          </a:solidFill>
-                          <a:latin typeface="Noto Sans"/>
-                        </a:defRPr>
-                      </a:pPr>
-                      <a:r>
-                        <a:rPr sz="1750" b="0" lang="ja-JP" altLang="en-US">
-                          <a:solidFill>
-                            <a:srgbClr val="303437"/>
-                          </a:solidFill>
-                          <a:latin typeface="Noto Sans"/>
-                          <a:ea typeface="Noto Sans CJK JP"/>
-                          <a:cs typeface="Noto Sans"/>
-                        </a:rPr>
-                        <a:t>19.65</a:t>
-                      </a:r>
-                    </a:p>
-                  </a:txBody>
-                  <a:tcPr marL="63500" marR="63500" marT="38100" marB="38100" anchor="ctr">
-                    <a:lnL w="7620">
-                      <a:noFill/>
-                    </a:lnL>
-                    <a:lnR w="7620">
-                      <a:noFill/>
-                    </a:lnR>
-                    <a:lnT w="7620">
-                      <a:noFill/>
-                    </a:lnT>
-                    <a:lnB w="15240">
-                      <a:solidFill>
-                        <a:srgbClr val="626669"/>
-                      </a:solidFill>
-                      <a:prstDash val="solid"/>
-                    </a:lnB>
-                    <a:solidFill>
-                      <a:srgbClr val="FFFEF8"/>
-                    </a:solidFill>
-                  </a:tcPr>
-                </a:tc>
-                <a:tc>
-                  <a:txBody>
-                    <a:bodyPr wrap="square">
-                      <a:noAutofit/>
-                    </a:bodyPr>
-                    <a:lstStyle/>
-                    <a:p>
-                      <a:pPr algn="r">
-                        <a:lnSpc>
-                          <a:spcPts val="2012"/>
-                        </a:lnSpc>
-                        <a:buNone/>
-                        <a:defRPr sz="1750" b="0">
-                          <a:solidFill>
-                            <a:srgbClr val="303437"/>
-                          </a:solidFill>
-                          <a:latin typeface="Noto Sans"/>
-                        </a:defRPr>
-                      </a:pPr>
-                      <a:r>
-                        <a:rPr sz="1750" b="0" lang="ja-JP" altLang="en-US">
-                          <a:solidFill>
-                            <a:srgbClr val="303437"/>
-                          </a:solidFill>
-                          <a:latin typeface="Noto Sans"/>
-                          <a:ea typeface="Noto Sans CJK JP"/>
-                          <a:cs typeface="Noto Sans"/>
-                        </a:rPr>
-                        <a:t>46.67</a:t>
-                      </a:r>
-                    </a:p>
-                  </a:txBody>
-                  <a:tcPr marL="63500" marR="63500" marT="38100" marB="38100" anchor="ctr">
-                    <a:lnL w="7620">
-                      <a:noFill/>
-                    </a:lnL>
-                    <a:lnR w="7620">
-                      <a:noFill/>
-                    </a:lnR>
-                    <a:lnT w="7620">
-                      <a:noFill/>
-                    </a:lnT>
-                    <a:lnB w="15240">
-                      <a:solidFill>
-                        <a:srgbClr val="626669"/>
-                      </a:solidFill>
-                      <a:prstDash val="solid"/>
-                    </a:lnB>
-                    <a:solidFill>
-                      <a:srgbClr val="FFFEF8"/>
-                    </a:solidFill>
-                  </a:tcPr>
-                </a:tc>
-                <a:tc>
-                  <a:txBody>
-                    <a:bodyPr wrap="square">
-                      <a:noAutofit/>
-                    </a:bodyPr>
-                    <a:lstStyle/>
-                    <a:p>
-                      <a:pPr algn="r">
-                        <a:lnSpc>
-                          <a:spcPts val="2012"/>
-                        </a:lnSpc>
-                        <a:buNone/>
-                        <a:defRPr sz="1750" b="0">
-                          <a:solidFill>
-                            <a:srgbClr val="303437"/>
-                          </a:solidFill>
-                          <a:latin typeface="Noto Sans"/>
-                        </a:defRPr>
-                      </a:pPr>
-                      <a:r>
-                        <a:rPr sz="1750" b="0" lang="ja-JP" altLang="en-US">
-                          <a:solidFill>
-                            <a:srgbClr val="303437"/>
-                          </a:solidFill>
-                          <a:latin typeface="Noto Sans"/>
-                          <a:ea typeface="Noto Sans CJK JP"/>
-                          <a:cs typeface="Noto Sans"/>
-                        </a:rPr>
-                        <a:t>52.12</a:t>
-                      </a:r>
-                    </a:p>
-                  </a:txBody>
-                  <a:tcPr marL="63500" marR="63500" marT="38100" marB="38100" anchor="ctr">
-                    <a:lnL w="7620">
-                      <a:noFill/>
-                    </a:lnL>
-                    <a:lnR w="7620">
-                      <a:noFill/>
-                    </a:lnR>
-                    <a:lnT w="7620">
-                      <a:noFill/>
-                    </a:lnT>
-                    <a:lnB w="15240">
-                      <a:solidFill>
-                        <a:srgbClr val="626669"/>
-                      </a:solidFill>
-                      <a:prstDash val="solid"/>
-                    </a:lnB>
-                    <a:solidFill>
-                      <a:srgbClr val="FFFEF8"/>
-                    </a:solidFill>
-                  </a:tcPr>
-                </a:tc>
-              </a:tr>
-            </a:tbl>
-          </a:graphicData>
-        </a:graphic>
-      </p:graphicFrame>
-      <p:sp>
-        <p:nvSpPr>
-          <p:cNvPr id="5" name="TextBox 4"/>
-          <p:cNvSpPr txBox="1"/>
-          <p:nvPr/>
-        </p:nvSpPr>
-        <p:spPr>
-          <a:xfrm>
-            <a:off x="594360" y="4233672"/>
-            <a:ext cx="7955279" cy="658368"/>
-          </a:xfrm>
-          <a:prstGeom prst="rect">
-            <a:avLst/>
-          </a:prstGeom>
-          <a:noFill/>
-        </p:spPr>
-        <p:txBody>
-          <a:bodyPr wrap="square" lIns="0" rIns="0" tIns="0" bIns="0">
-            <a:noAutofit/>
-          </a:bodyPr>
-          <a:lstStyle/>
-          <a:p>
-            <a:pPr algn="l">
-              <a:lnSpc>
-                <a:spcPts val="2047"/>
-              </a:lnSpc>
-              <a:spcBef>
-                <a:spcPts val="0"/>
-              </a:spcBef>
-              <a:spcAft>
-                <a:spcPts val="0"/>
-              </a:spcAft>
-              <a:buNone/>
-              <a:defRPr sz="1750" b="0">
-                <a:solidFill>
-                  <a:srgbClr val="303437"/>
-                </a:solidFill>
-                <a:latin typeface="Noto Sans"/>
-              </a:defRPr>
-            </a:pPr>
-            <a:r>
-              <a:rPr sz="1750" b="0" lang="ja-JP" altLang="en-US">
-                <a:solidFill>
-                  <a:srgbClr val="303437"/>
-                </a:solidFill>
-                <a:latin typeface="Noto Sans"/>
-                <a:ea typeface="Noto Sans CJK JP"/>
-                <a:cs typeface="Noto Sans"/>
-              </a:rPr>
-              <a:t>単位は%。候補数は5／5／1、試行数は3／3／1。</a:t>
-            </a:r>
-          </a:p>
-        </p:txBody>
-      </p:sp>
-      <p:sp>
-        <p:nvSpPr>
-          <p:cNvPr id="6" name="sources"/>
-          <p:cNvSpPr txBox="1"/>
-          <p:nvPr/>
-        </p:nvSpPr>
-        <p:spPr>
-          <a:xfrm>
-            <a:off x="502920" y="4700016"/>
-            <a:ext cx="8183879" cy="530352"/>
-          </a:xfrm>
-          <a:prstGeom prst="rect">
-            <a:avLst/>
-          </a:prstGeom>
-          <a:noFill/>
-        </p:spPr>
-        <p:txBody>
-          <a:bodyPr wrap="square" lIns="0" rIns="0" tIns="0" bIns="0">
-            <a:noAutofit/>
-          </a:bodyPr>
-          <a:lstStyle/>
-          <a:p>
-            <a:pPr algn="l">
-              <a:lnSpc>
-                <a:spcPts val="940"/>
-              </a:lnSpc>
-              <a:spcBef>
-                <a:spcPts val="0"/>
-              </a:spcBef>
-              <a:spcAft>
-                <a:spcPts val="140"/>
-              </a:spcAft>
-              <a:buNone/>
-              <a:defRPr sz="810" b="0">
-                <a:solidFill>
-                  <a:srgbClr val="303437"/>
-                </a:solidFill>
-                <a:latin typeface="Noto Sans"/>
-              </a:defRPr>
-            </a:pPr>
-            <a:r>
-              <a:rPr sz="810" b="0" lang="ja-JP" altLang="en-US">
-                <a:solidFill>
-                  <a:srgbClr val="626669"/>
-                </a:solidFill>
-                <a:latin typeface="Noto Sans"/>
-                <a:ea typeface="Noto Sans CJK JP"/>
-                <a:cs typeface="Noto Sans"/>
-              </a:rPr>
-              <a:t>[1] Stanford CRFM. HELM Classic v0.4.0 — WikiFact（2023）。 </a:t>
-            </a:r>
-            <a:r>
-              <a:rPr sz="810" b="0" lang="ja-JP" altLang="en-US">
-                <a:solidFill>
-                  <a:srgbClr val="626669"/>
-                </a:solidFill>
-                <a:latin typeface="Noto Sans"/>
-                <a:ea typeface="Noto Sans CJK JP"/>
-                <a:cs typeface="Noto Sans"/>
-              </a:rPr>
-              <a:t>  </a:t>
-            </a:r>
-            <a:r>
-              <a:rPr sz="810" b="0" lang="ja-JP" altLang="en-US">
-                <a:solidFill>
-                  <a:srgbClr val="626669"/>
-                </a:solidFill>
-                <a:latin typeface="Noto Sans"/>
-                <a:ea typeface="Noto Sans CJK JP"/>
-                <a:cs typeface="Noto Sans"/>
-                <a:hlinkClick r:id="rId2"/>
-              </a:rPr>
-              <a:t>https://crfm.stanford.edu/helm/classic/v0.4.0/#/groups/wikifact</a:t>
-            </a:r>
-          </a:p>
-        </p:txBody>
-      </p:sp>
-    </p:spTree>
-  </p:cSld>
-  <p:clrMapOvr>
-    <a:masterClrMapping/>
-  </p:clrMapOvr>
-</p:sld>
-</file>
-
-<file path=ppt/slides/slide44.xml><?xml version="1.0" encoding="utf-8"?>
-<p:sld xmlns:a="http://schemas.openxmlformats.org/drawingml/2006/main" xmlns:p="http://schemas.openxmlformats.org/presentationml/2006/main" xmlns:r="http://schemas.openxmlformats.org/officeDocument/2006/relationships">
-  <p:cSld>
-    <p:spTree>
-      <p:nvGrpSpPr>
-        <p:cNvPr id="1" name=""/>
-        <p:cNvGrpSpPr/>
-        <p:nvPr/>
-      </p:nvGrpSpPr>
-      <p:grpSpPr/>
-      <p:sp>
-        <p:nvSpPr>
-          <p:cNvPr id="2" name="Title 1"/>
-          <p:cNvSpPr>
-            <a:spLocks noGrp="1"/>
-          </p:cNvSpPr>
-          <p:nvPr>
-            <p:ph type="title"/>
-          </p:nvPr>
-        </p:nvSpPr>
-        <p:spPr>
-          <a:xfrm>
-            <a:off x="468172" y="650138"/>
-            <a:ext cx="8206740" cy="616305"/>
-          </a:xfrm>
-        </p:spPr>
-        <p:txBody>
-          <a:bodyPr wrap="square" lIns="0" rIns="0" tIns="0" bIns="0">
-            <a:noAutofit/>
-          </a:bodyPr>
-          <a:lstStyle/>
-          <a:p>
-            <a:pPr algn="l">
-              <a:lnSpc>
-                <a:spcPct val="110000"/>
-              </a:lnSpc>
-              <a:buNone/>
-              <a:defRPr sz="2800" b="0">
-                <a:solidFill>
-                  <a:srgbClr val="303437"/>
-                </a:solidFill>
-                <a:latin typeface="Noto Sans"/>
-              </a:defRPr>
-            </a:pPr>
-            <a:r>
-              <a:rPr sz="2800" b="1" lang="ja-JP" altLang="en-US">
-                <a:solidFill>
-                  <a:srgbClr val="303437"/>
-                </a:solidFill>
-                <a:latin typeface="Noto Sans"/>
-                <a:ea typeface="Noto Sans CJK JP"/>
-                <a:cs typeface="Noto Sans"/>
-              </a:rPr>
-              <a:t>10関係のAccuracy@1（後半）</a:t>
-            </a:r>
-          </a:p>
-        </p:txBody>
-      </p:sp>
-      <p:sp>
-        <p:nvSpPr>
-          <p:cNvPr id="3" name="Title 2"/>
-          <p:cNvSpPr>
-            <a:spLocks noGrp="1"/>
-          </p:cNvSpPr>
-          <p:nvPr>
-            <p:ph type="title" idx="2"/>
-          </p:nvPr>
-        </p:nvSpPr>
-        <p:spPr>
-          <a:xfrm>
-            <a:off x="75895" y="0"/>
-            <a:ext cx="8115300" cy="480060"/>
-          </a:xfrm>
-        </p:spPr>
-        <p:txBody>
-          <a:bodyPr wrap="square" lIns="0" rIns="0" tIns="0" bIns="0" anchor="ctr">
-            <a:noAutofit/>
-          </a:bodyPr>
-          <a:lstStyle/>
-          <a:p>
-            <a:pPr algn="l">
-              <a:lnSpc>
-                <a:spcPct val="110000"/>
-              </a:lnSpc>
-              <a:buNone/>
-              <a:defRPr sz="1400" b="0">
-                <a:solidFill>
-                  <a:srgbClr val="303437"/>
-                </a:solidFill>
-                <a:latin typeface="Noto Sans"/>
-              </a:defRPr>
-            </a:pPr>
-            <a:r>
-              <a:rPr sz="1400" b="1" lang="ja-JP" altLang="en-US">
-                <a:solidFill>
-                  <a:srgbClr val="FFFEF8"/>
-                </a:solidFill>
-                <a:latin typeface="Noto Sans"/>
-                <a:ea typeface="Noto Sans CJK JP"/>
-                <a:cs typeface="Noto Sans"/>
-              </a:rPr>
-              <a:t>Appendix: 2. 関係別成績とデータの読込</a:t>
-            </a:r>
-          </a:p>
-        </p:txBody>
-      </p:sp>
-      <p:graphicFrame>
-        <p:nvGraphicFramePr>
-          <p:cNvPr id="4" name="Table 3"/>
-          <p:cNvGraphicFramePr>
-            <a:graphicFrameLocks noGrp="1"/>
-          </p:cNvGraphicFramePr>
-          <p:nvPr/>
-        </p:nvGraphicFramePr>
-        <p:xfrm>
-          <a:off x="548640" y="1508760"/>
-          <a:ext cx="8046720" cy="2523744"/>
-        </p:xfrm>
-        <a:graphic>
-          <a:graphicData uri="http://schemas.openxmlformats.org/drawingml/2006/table">
-            <a:tbl>
-              <a:tblPr firstRow="0" bandRow="0"/>
-              <a:tblGrid>
-                <a:gridCol w="2788920"/>
-                <a:gridCol w="1737360"/>
-                <a:gridCol w="1783080"/>
-                <a:gridCol w="1737360"/>
-              </a:tblGrid>
-              <a:tr h="420624">
-                <a:tc>
-                  <a:txBody>
-                    <a:bodyPr wrap="square">
-                      <a:noAutofit/>
-                    </a:bodyPr>
-                    <a:lstStyle/>
-                    <a:p>
-                      <a:pPr algn="l">
-                        <a:lnSpc>
-                          <a:spcPts val="2012"/>
-                        </a:lnSpc>
-                        <a:buNone/>
-                        <a:defRPr sz="1750" b="0">
-                          <a:solidFill>
-                            <a:srgbClr val="303437"/>
-                          </a:solidFill>
-                          <a:latin typeface="Noto Sans"/>
-                        </a:defRPr>
-                      </a:pPr>
-                      <a:r>
-                        <a:rPr sz="1750" b="0" lang="ja-JP" altLang="en-US">
-                          <a:solidFill>
-                            <a:srgbClr val="303437"/>
-                          </a:solidFill>
-                          <a:latin typeface="Noto Sans"/>
-                          <a:ea typeface="Noto Sans CJK JP"/>
-                          <a:cs typeface="Noto Sans"/>
-                        </a:rPr>
-                        <a:t>関係</a:t>
-                      </a:r>
-                    </a:p>
-                  </a:txBody>
-                  <a:tcPr marL="63500" marR="63500" marT="38100" marB="38100" anchor="ctr">
-                    <a:lnL w="7620">
-                      <a:noFill/>
-                    </a:lnL>
-                    <a:lnR w="7620">
-                      <a:noFill/>
-                    </a:lnR>
-                    <a:lnT w="15240">
-                      <a:solidFill>
-                        <a:srgbClr val="626669"/>
-                      </a:solidFill>
-                      <a:prstDash val="solid"/>
-                    </a:lnT>
-                    <a:lnB w="7620">
-                      <a:solidFill>
-                        <a:srgbClr val="626669"/>
-                      </a:solidFill>
-                      <a:prstDash val="solid"/>
-                    </a:lnB>
-                    <a:solidFill>
-                      <a:srgbClr val="FFFEF8"/>
-                    </a:solidFill>
-                  </a:tcPr>
-                </a:tc>
-                <a:tc>
-                  <a:txBody>
-                    <a:bodyPr wrap="square">
-                      <a:noAutofit/>
-                    </a:bodyPr>
-                    <a:lstStyle/>
-                    <a:p>
-                      <a:pPr algn="r">
-                        <a:lnSpc>
-                          <a:spcPts val="2012"/>
-                        </a:lnSpc>
-                        <a:buNone/>
-                        <a:defRPr sz="1750" b="0">
-                          <a:solidFill>
-                            <a:srgbClr val="303437"/>
-                          </a:solidFill>
-                          <a:latin typeface="Noto Sans"/>
-                        </a:defRPr>
-                      </a:pPr>
-                      <a:r>
-                        <a:rPr sz="1750" b="0" lang="ja-JP" altLang="en-US">
-                          <a:solidFill>
-                            <a:srgbClr val="303437"/>
-                          </a:solidFill>
-                          <a:latin typeface="Noto Sans"/>
-                          <a:ea typeface="Noto Sans CJK JP"/>
-                          <a:cs typeface="Noto Sans"/>
-                        </a:rPr>
-                        <a:t>OPT-175B</a:t>
-                      </a:r>
-                    </a:p>
-                  </a:txBody>
-                  <a:tcPr marL="63500" marR="63500" marT="38100" marB="38100" anchor="ctr">
-                    <a:lnL w="7620">
-                      <a:noFill/>
-                    </a:lnL>
-                    <a:lnR w="7620">
-                      <a:noFill/>
-                    </a:lnR>
-                    <a:lnT w="15240">
-                      <a:solidFill>
-                        <a:srgbClr val="626669"/>
-                      </a:solidFill>
-                      <a:prstDash val="solid"/>
-                    </a:lnT>
-                    <a:lnB w="7620">
-                      <a:solidFill>
-                        <a:srgbClr val="626669"/>
-                      </a:solidFill>
-                      <a:prstDash val="solid"/>
-                    </a:lnB>
-                    <a:solidFill>
-                      <a:srgbClr val="FFFEF8"/>
-                    </a:solidFill>
-                  </a:tcPr>
-                </a:tc>
-                <a:tc>
-                  <a:txBody>
-                    <a:bodyPr wrap="square">
-                      <a:noAutofit/>
-                    </a:bodyPr>
-                    <a:lstStyle/>
-                    <a:p>
-                      <a:pPr algn="r">
-                        <a:lnSpc>
-                          <a:spcPts val="2012"/>
-                        </a:lnSpc>
-                        <a:buNone/>
-                        <a:defRPr sz="1750" b="0">
-                          <a:solidFill>
-                            <a:srgbClr val="303437"/>
-                          </a:solidFill>
-                          <a:latin typeface="Noto Sans"/>
-                        </a:defRPr>
-                      </a:pPr>
-                      <a:r>
-                        <a:rPr sz="1750" b="0" lang="ja-JP" altLang="en-US">
-                          <a:solidFill>
-                            <a:srgbClr val="303437"/>
-                          </a:solidFill>
-                          <a:latin typeface="Noto Sans"/>
-                          <a:ea typeface="Noto Sans CJK JP"/>
-                          <a:cs typeface="Noto Sans"/>
-                        </a:rPr>
-                        <a:t>davinci-003</a:t>
-                      </a:r>
-                    </a:p>
-                  </a:txBody>
-                  <a:tcPr marL="63500" marR="63500" marT="38100" marB="38100" anchor="ctr">
-                    <a:lnL w="7620">
-                      <a:noFill/>
-                    </a:lnL>
-                    <a:lnR w="7620">
-                      <a:noFill/>
-                    </a:lnR>
-                    <a:lnT w="15240">
-                      <a:solidFill>
-                        <a:srgbClr val="626669"/>
-                      </a:solidFill>
-                      <a:prstDash val="solid"/>
-                    </a:lnT>
-                    <a:lnB w="7620">
-                      <a:solidFill>
-                        <a:srgbClr val="626669"/>
-                      </a:solidFill>
-                      <a:prstDash val="solid"/>
-                    </a:lnB>
-                    <a:solidFill>
-                      <a:srgbClr val="FFFEF8"/>
-                    </a:solidFill>
-                  </a:tcPr>
-                </a:tc>
-                <a:tc>
-                  <a:txBody>
-                    <a:bodyPr wrap="square">
-                      <a:noAutofit/>
-                    </a:bodyPr>
-                    <a:lstStyle/>
-                    <a:p>
-                      <a:pPr algn="r">
-                        <a:lnSpc>
-                          <a:spcPts val="2012"/>
-                        </a:lnSpc>
-                        <a:buNone/>
-                        <a:defRPr sz="1750" b="0">
-                          <a:solidFill>
-                            <a:srgbClr val="303437"/>
-                          </a:solidFill>
-                          <a:latin typeface="Noto Sans"/>
-                        </a:defRPr>
-                      </a:pPr>
-                      <a:r>
-                        <a:rPr sz="1750" b="0" lang="ja-JP" altLang="en-US">
-                          <a:solidFill>
-                            <a:srgbClr val="303437"/>
-                          </a:solidFill>
-                          <a:latin typeface="Noto Sans"/>
-                          <a:ea typeface="Noto Sans CJK JP"/>
-                          <a:cs typeface="Noto Sans"/>
-                        </a:rPr>
-                        <a:t>Llama 2</a:t>
-                      </a:r>
-                    </a:p>
-                  </a:txBody>
-                  <a:tcPr marL="63500" marR="63500" marT="38100" marB="38100" anchor="ctr">
-                    <a:lnL w="7620">
-                      <a:noFill/>
-                    </a:lnL>
-                    <a:lnR w="7620">
-                      <a:noFill/>
-                    </a:lnR>
-                    <a:lnT w="15240">
-                      <a:solidFill>
-                        <a:srgbClr val="626669"/>
-                      </a:solidFill>
-                      <a:prstDash val="solid"/>
-                    </a:lnT>
-                    <a:lnB w="7620">
-                      <a:solidFill>
-                        <a:srgbClr val="626669"/>
-                      </a:solidFill>
-                      <a:prstDash val="solid"/>
-                    </a:lnB>
-                    <a:solidFill>
-                      <a:srgbClr val="FFFEF8"/>
-                    </a:solidFill>
-                  </a:tcPr>
-                </a:tc>
-              </a:tr>
-              <a:tr h="420624">
-                <a:tc>
-                  <a:txBody>
-                    <a:bodyPr wrap="square">
-                      <a:noAutofit/>
-                    </a:bodyPr>
-                    <a:lstStyle/>
-                    <a:p>
-                      <a:pPr algn="l">
-                        <a:lnSpc>
-                          <a:spcPts val="2012"/>
-                        </a:lnSpc>
-                        <a:buNone/>
-                        <a:defRPr sz="1750" b="0">
-                          <a:solidFill>
-                            <a:srgbClr val="303437"/>
-                          </a:solidFill>
-                          <a:latin typeface="Noto Sans"/>
-                        </a:defRPr>
-                      </a:pPr>
-                      <a:r>
-                        <a:rPr sz="1750" b="0" lang="ja-JP" altLang="en-US">
-                          <a:solidFill>
-                            <a:srgbClr val="303437"/>
-                          </a:solidFill>
-                          <a:latin typeface="Noto Sans"/>
-                          <a:ea typeface="Noto Sans CJK JP"/>
-                          <a:cs typeface="Noto Sans"/>
-                        </a:rPr>
-                        <a:t>部分・所属先</a:t>
-                      </a:r>
-                    </a:p>
-                  </a:txBody>
-                  <a:tcPr marL="63500" marR="63500" marT="38100" marB="38100" anchor="ctr">
-                    <a:lnL w="7620">
-                      <a:noFill/>
-                    </a:lnL>
-                    <a:lnR w="7620">
-                      <a:noFill/>
-                    </a:lnR>
-                    <a:lnT w="7620">
-                      <a:solidFill>
-                        <a:srgbClr val="626669"/>
-                      </a:solidFill>
-                      <a:prstDash val="solid"/>
-                    </a:lnT>
-                    <a:lnB w="7620">
-                      <a:noFill/>
-                    </a:lnB>
-                    <a:solidFill>
-                      <a:srgbClr val="FFFEF8"/>
-                    </a:solidFill>
-                  </a:tcPr>
-                </a:tc>
-                <a:tc>
-                  <a:txBody>
-                    <a:bodyPr wrap="square">
-                      <a:noAutofit/>
-                    </a:bodyPr>
-                    <a:lstStyle/>
-                    <a:p>
-                      <a:pPr algn="r">
-                        <a:lnSpc>
-                          <a:spcPts val="2012"/>
-                        </a:lnSpc>
-                        <a:buNone/>
-                        <a:defRPr sz="1750" b="0">
-                          <a:solidFill>
-                            <a:srgbClr val="303437"/>
-                          </a:solidFill>
-                          <a:latin typeface="Noto Sans"/>
-                        </a:defRPr>
-                      </a:pPr>
-                      <a:r>
-                        <a:rPr sz="1750" b="0" lang="ja-JP" altLang="en-US">
-                          <a:solidFill>
-                            <a:srgbClr val="303437"/>
-                          </a:solidFill>
-                          <a:latin typeface="Noto Sans"/>
-                          <a:ea typeface="Noto Sans CJK JP"/>
-                          <a:cs typeface="Noto Sans"/>
-                        </a:rPr>
-                        <a:t>18.00</a:t>
-                      </a:r>
-                    </a:p>
-                  </a:txBody>
-                  <a:tcPr marL="63500" marR="63500" marT="38100" marB="38100" anchor="ctr">
-                    <a:lnL w="7620">
-                      <a:noFill/>
-                    </a:lnL>
-                    <a:lnR w="7620">
-                      <a:noFill/>
-                    </a:lnR>
-                    <a:lnT w="7620">
-                      <a:solidFill>
-                        <a:srgbClr val="626669"/>
-                      </a:solidFill>
-                      <a:prstDash val="solid"/>
-                    </a:lnT>
-                    <a:lnB w="7620">
-                      <a:noFill/>
-                    </a:lnB>
-                    <a:solidFill>
-                      <a:srgbClr val="FFFEF8"/>
-                    </a:solidFill>
-                  </a:tcPr>
-                </a:tc>
-                <a:tc>
-                  <a:txBody>
-                    <a:bodyPr wrap="square">
-                      <a:noAutofit/>
-                    </a:bodyPr>
-                    <a:lstStyle/>
-                    <a:p>
-                      <a:pPr algn="r">
-                        <a:lnSpc>
-                          <a:spcPts val="2012"/>
-                        </a:lnSpc>
-                        <a:buNone/>
-                        <a:defRPr sz="1750" b="0">
-                          <a:solidFill>
-                            <a:srgbClr val="303437"/>
-                          </a:solidFill>
-                          <a:latin typeface="Noto Sans"/>
-                        </a:defRPr>
-                      </a:pPr>
-                      <a:r>
-                        <a:rPr sz="1750" b="0" lang="ja-JP" altLang="en-US">
-                          <a:solidFill>
-                            <a:srgbClr val="303437"/>
-                          </a:solidFill>
-                          <a:latin typeface="Noto Sans"/>
-                          <a:ea typeface="Noto Sans CJK JP"/>
-                          <a:cs typeface="Noto Sans"/>
-                        </a:rPr>
-                        <a:t>30.63</a:t>
-                      </a:r>
-                    </a:p>
-                  </a:txBody>
-                  <a:tcPr marL="63500" marR="63500" marT="38100" marB="38100" anchor="ctr">
-                    <a:lnL w="7620">
-                      <a:noFill/>
-                    </a:lnL>
-                    <a:lnR w="7620">
-                      <a:noFill/>
-                    </a:lnR>
-                    <a:lnT w="7620">
-                      <a:solidFill>
-                        <a:srgbClr val="626669"/>
-                      </a:solidFill>
-                      <a:prstDash val="solid"/>
-                    </a:lnT>
-                    <a:lnB w="7620">
-                      <a:noFill/>
-                    </a:lnB>
-                    <a:solidFill>
-                      <a:srgbClr val="FFFEF8"/>
-                    </a:solidFill>
-                  </a:tcPr>
-                </a:tc>
-                <a:tc>
-                  <a:txBody>
-                    <a:bodyPr wrap="square">
-                      <a:noAutofit/>
-                    </a:bodyPr>
-                    <a:lstStyle/>
-                    <a:p>
-                      <a:pPr algn="r">
-                        <a:lnSpc>
-                          <a:spcPts val="2012"/>
-                        </a:lnSpc>
-                        <a:buNone/>
-                        <a:defRPr sz="1750" b="0">
-                          <a:solidFill>
-                            <a:srgbClr val="303437"/>
-                          </a:solidFill>
-                          <a:latin typeface="Noto Sans"/>
-                        </a:defRPr>
-                      </a:pPr>
-                      <a:r>
-                        <a:rPr sz="1750" b="0" lang="ja-JP" altLang="en-US">
-                          <a:solidFill>
-                            <a:srgbClr val="303437"/>
-                          </a:solidFill>
-                          <a:latin typeface="Noto Sans"/>
-                          <a:ea typeface="Noto Sans CJK JP"/>
-                          <a:cs typeface="Noto Sans"/>
-                        </a:rPr>
-                        <a:t>18.24</a:t>
-                      </a:r>
-                    </a:p>
-                  </a:txBody>
-                  <a:tcPr marL="63500" marR="63500" marT="38100" marB="38100" anchor="ctr">
-                    <a:lnL w="7620">
-                      <a:noFill/>
-                    </a:lnL>
-                    <a:lnR w="7620">
-                      <a:noFill/>
-                    </a:lnR>
-                    <a:lnT w="7620">
-                      <a:solidFill>
-                        <a:srgbClr val="626669"/>
-                      </a:solidFill>
-                      <a:prstDash val="solid"/>
-                    </a:lnT>
-                    <a:lnB w="7620">
-                      <a:noFill/>
-                    </a:lnB>
-                    <a:solidFill>
-                      <a:srgbClr val="FFFEF8"/>
-                    </a:solidFill>
-                  </a:tcPr>
-                </a:tc>
-              </a:tr>
-              <a:tr h="420624">
-                <a:tc>
-                  <a:txBody>
-                    <a:bodyPr wrap="square">
-                      <a:noAutofit/>
-                    </a:bodyPr>
-                    <a:lstStyle/>
-                    <a:p>
-                      <a:pPr algn="l">
-                        <a:lnSpc>
-                          <a:spcPts val="2012"/>
-                        </a:lnSpc>
-                        <a:buNone/>
-                        <a:defRPr sz="1750" b="0">
-                          <a:solidFill>
-                            <a:srgbClr val="303437"/>
-                          </a:solidFill>
-                          <a:latin typeface="Noto Sans"/>
-                        </a:defRPr>
-                      </a:pPr>
-                      <a:r>
-                        <a:rPr sz="1750" b="0" lang="ja-JP" altLang="en-US">
-                          <a:solidFill>
-                            <a:srgbClr val="303437"/>
-                          </a:solidFill>
-                          <a:latin typeface="Noto Sans"/>
-                          <a:ea typeface="Noto Sans CJK JP"/>
-                          <a:cs typeface="Noto Sans"/>
-                        </a:rPr>
-                        <a:t>出生地</a:t>
-                      </a:r>
-                    </a:p>
-                  </a:txBody>
-                  <a:tcPr marL="63500" marR="63500" marT="38100" marB="38100" anchor="ctr">
-                    <a:lnL w="7620">
-                      <a:noFill/>
-                    </a:lnL>
-                    <a:lnR w="7620">
-                      <a:noFill/>
-                    </a:lnR>
-                    <a:lnT w="7620">
-                      <a:noFill/>
-                    </a:lnT>
-                    <a:lnB w="7620">
-                      <a:noFill/>
-                    </a:lnB>
-                    <a:solidFill>
-                      <a:srgbClr val="FFFEF8"/>
-                    </a:solidFill>
-                  </a:tcPr>
-                </a:tc>
-                <a:tc>
-                  <a:txBody>
-                    <a:bodyPr wrap="square">
-                      <a:noAutofit/>
-                    </a:bodyPr>
-                    <a:lstStyle/>
-                    <a:p>
-                      <a:pPr algn="r">
-                        <a:lnSpc>
-                          <a:spcPts val="2012"/>
-                        </a:lnSpc>
-                        <a:buNone/>
-                        <a:defRPr sz="1750" b="0">
-                          <a:solidFill>
-                            <a:srgbClr val="303437"/>
-                          </a:solidFill>
-                          <a:latin typeface="Noto Sans"/>
-                        </a:defRPr>
-                      </a:pPr>
-                      <a:r>
-                        <a:rPr sz="1750" b="0" lang="ja-JP" altLang="en-US">
-                          <a:solidFill>
-                            <a:srgbClr val="303437"/>
-                          </a:solidFill>
-                          <a:latin typeface="Noto Sans"/>
-                          <a:ea typeface="Noto Sans CJK JP"/>
-                          <a:cs typeface="Noto Sans"/>
-                        </a:rPr>
-                        <a:t>3.33</a:t>
-                      </a:r>
-                    </a:p>
-                  </a:txBody>
-                  <a:tcPr marL="63500" marR="63500" marT="38100" marB="38100" anchor="ctr">
-                    <a:lnL w="7620">
-                      <a:noFill/>
-                    </a:lnL>
-                    <a:lnR w="7620">
-                      <a:noFill/>
-                    </a:lnR>
-                    <a:lnT w="7620">
-                      <a:noFill/>
-                    </a:lnT>
-                    <a:lnB w="7620">
-                      <a:noFill/>
-                    </a:lnB>
-                    <a:solidFill>
-                      <a:srgbClr val="FFFEF8"/>
-                    </a:solidFill>
-                  </a:tcPr>
-                </a:tc>
-                <a:tc>
-                  <a:txBody>
-                    <a:bodyPr wrap="square">
-                      <a:noAutofit/>
-                    </a:bodyPr>
-                    <a:lstStyle/>
-                    <a:p>
-                      <a:pPr algn="r">
-                        <a:lnSpc>
-                          <a:spcPts val="2012"/>
-                        </a:lnSpc>
-                        <a:buNone/>
-                        <a:defRPr sz="1750" b="0">
-                          <a:solidFill>
-                            <a:srgbClr val="303437"/>
-                          </a:solidFill>
-                          <a:latin typeface="Noto Sans"/>
-                        </a:defRPr>
-                      </a:pPr>
-                      <a:r>
-                        <a:rPr sz="1750" b="0" lang="ja-JP" altLang="en-US">
-                          <a:solidFill>
-                            <a:srgbClr val="303437"/>
-                          </a:solidFill>
-                          <a:latin typeface="Noto Sans"/>
-                          <a:ea typeface="Noto Sans CJK JP"/>
-                          <a:cs typeface="Noto Sans"/>
-                        </a:rPr>
-                        <a:t>16.43</a:t>
-                      </a:r>
-                    </a:p>
-                  </a:txBody>
-                  <a:tcPr marL="63500" marR="63500" marT="38100" marB="38100" anchor="ctr">
-                    <a:lnL w="7620">
-                      <a:noFill/>
-                    </a:lnL>
-                    <a:lnR w="7620">
-                      <a:noFill/>
-                    </a:lnR>
-                    <a:lnT w="7620">
-                      <a:noFill/>
-                    </a:lnT>
-                    <a:lnB w="7620">
-                      <a:noFill/>
-                    </a:lnB>
-                    <a:solidFill>
-                      <a:srgbClr val="FFFEF8"/>
-                    </a:solidFill>
-                  </a:tcPr>
-                </a:tc>
-                <a:tc>
-                  <a:txBody>
-                    <a:bodyPr wrap="square">
-                      <a:noAutofit/>
-                    </a:bodyPr>
-                    <a:lstStyle/>
-                    <a:p>
-                      <a:pPr algn="r">
-                        <a:lnSpc>
-                          <a:spcPts val="2012"/>
-                        </a:lnSpc>
-                        <a:buNone/>
-                        <a:defRPr sz="1750" b="0">
-                          <a:solidFill>
-                            <a:srgbClr val="303437"/>
-                          </a:solidFill>
-                          <a:latin typeface="Noto Sans"/>
-                        </a:defRPr>
-                      </a:pPr>
-                      <a:r>
-                        <a:rPr sz="1750" b="0" lang="ja-JP" altLang="en-US">
-                          <a:solidFill>
-                            <a:srgbClr val="303437"/>
-                          </a:solidFill>
-                          <a:latin typeface="Noto Sans"/>
-                          <a:ea typeface="Noto Sans CJK JP"/>
-                          <a:cs typeface="Noto Sans"/>
-                        </a:rPr>
-                        <a:t>22.94</a:t>
-                      </a:r>
-                    </a:p>
-                  </a:txBody>
-                  <a:tcPr marL="63500" marR="63500" marT="38100" marB="38100" anchor="ctr">
-                    <a:lnL w="7620">
-                      <a:noFill/>
-                    </a:lnL>
-                    <a:lnR w="7620">
-                      <a:noFill/>
-                    </a:lnR>
-                    <a:lnT w="7620">
-                      <a:noFill/>
-                    </a:lnT>
-                    <a:lnB w="7620">
-                      <a:noFill/>
-                    </a:lnB>
-                    <a:solidFill>
-                      <a:srgbClr val="FFFEF8"/>
-                    </a:solidFill>
-                  </a:tcPr>
-                </a:tc>
-              </a:tr>
-              <a:tr h="420624">
-                <a:tc>
-                  <a:txBody>
-                    <a:bodyPr wrap="square">
-                      <a:noAutofit/>
-                    </a:bodyPr>
-                    <a:lstStyle/>
-                    <a:p>
-                      <a:pPr algn="l">
-                        <a:lnSpc>
-                          <a:spcPts val="2012"/>
-                        </a:lnSpc>
-                        <a:buNone/>
-                        <a:defRPr sz="1750" b="0">
-                          <a:solidFill>
-                            <a:srgbClr val="303437"/>
-                          </a:solidFill>
-                          <a:latin typeface="Noto Sans"/>
-                        </a:defRPr>
-                      </a:pPr>
-                      <a:r>
-                        <a:rPr sz="1750" b="0" lang="ja-JP" altLang="en-US">
-                          <a:solidFill>
-                            <a:srgbClr val="303437"/>
-                          </a:solidFill>
-                          <a:latin typeface="Noto Sans"/>
-                          <a:ea typeface="Noto Sans CJK JP"/>
-                          <a:cs typeface="Noto Sans"/>
-                        </a:rPr>
-                        <a:t>原告</a:t>
-                      </a:r>
-                    </a:p>
-                  </a:txBody>
-                  <a:tcPr marL="63500" marR="63500" marT="38100" marB="38100" anchor="ctr">
-                    <a:lnL w="7620">
-                      <a:noFill/>
-                    </a:lnL>
-                    <a:lnR w="7620">
-                      <a:noFill/>
-                    </a:lnR>
-                    <a:lnT w="7620">
-                      <a:noFill/>
-                    </a:lnT>
-                    <a:lnB w="7620">
-                      <a:noFill/>
-                    </a:lnB>
-                    <a:solidFill>
-                      <a:srgbClr val="FFFEF8"/>
-                    </a:solidFill>
-                  </a:tcPr>
-                </a:tc>
-                <a:tc>
-                  <a:txBody>
-                    <a:bodyPr wrap="square">
-                      <a:noAutofit/>
-                    </a:bodyPr>
-                    <a:lstStyle/>
-                    <a:p>
-                      <a:pPr algn="r">
-                        <a:lnSpc>
-                          <a:spcPts val="2012"/>
-                        </a:lnSpc>
-                        <a:buNone/>
-                        <a:defRPr sz="1750" b="0">
-                          <a:solidFill>
-                            <a:srgbClr val="303437"/>
-                          </a:solidFill>
-                          <a:latin typeface="Noto Sans"/>
-                        </a:defRPr>
-                      </a:pPr>
-                      <a:r>
-                        <a:rPr sz="1750" b="0" lang="ja-JP" altLang="en-US">
-                          <a:solidFill>
-                            <a:srgbClr val="303437"/>
-                          </a:solidFill>
-                          <a:latin typeface="Noto Sans"/>
-                          <a:ea typeface="Noto Sans CJK JP"/>
-                          <a:cs typeface="Noto Sans"/>
-                        </a:rPr>
-                        <a:t>50.69</a:t>
-                      </a:r>
-                    </a:p>
-                  </a:txBody>
-                  <a:tcPr marL="63500" marR="63500" marT="38100" marB="38100" anchor="ctr">
-                    <a:lnL w="7620">
-                      <a:noFill/>
-                    </a:lnL>
-                    <a:lnR w="7620">
-                      <a:noFill/>
-                    </a:lnR>
-                    <a:lnT w="7620">
-                      <a:noFill/>
-                    </a:lnT>
-                    <a:lnB w="7620">
-                      <a:noFill/>
-                    </a:lnB>
-                    <a:solidFill>
-                      <a:srgbClr val="FFFEF8"/>
-                    </a:solidFill>
-                  </a:tcPr>
-                </a:tc>
-                <a:tc>
-                  <a:txBody>
-                    <a:bodyPr wrap="square">
-                      <a:noAutofit/>
-                    </a:bodyPr>
-                    <a:lstStyle/>
-                    <a:p>
-                      <a:pPr algn="r">
-                        <a:lnSpc>
-                          <a:spcPts val="2012"/>
-                        </a:lnSpc>
-                        <a:buNone/>
-                        <a:defRPr sz="1750" b="0">
-                          <a:solidFill>
-                            <a:srgbClr val="303437"/>
-                          </a:solidFill>
-                          <a:latin typeface="Noto Sans"/>
-                        </a:defRPr>
-                      </a:pPr>
-                      <a:r>
-                        <a:rPr sz="1750" b="0" lang="ja-JP" altLang="en-US">
-                          <a:solidFill>
-                            <a:srgbClr val="303437"/>
-                          </a:solidFill>
-                          <a:latin typeface="Noto Sans"/>
-                          <a:ea typeface="Noto Sans CJK JP"/>
-                          <a:cs typeface="Noto Sans"/>
-                        </a:rPr>
-                        <a:t>60.42</a:t>
-                      </a:r>
-                    </a:p>
-                  </a:txBody>
-                  <a:tcPr marL="63500" marR="63500" marT="38100" marB="38100" anchor="ctr">
-                    <a:lnL w="7620">
-                      <a:noFill/>
-                    </a:lnL>
-                    <a:lnR w="7620">
-                      <a:noFill/>
-                    </a:lnR>
-                    <a:lnT w="7620">
-                      <a:noFill/>
-                    </a:lnT>
-                    <a:lnB w="7620">
-                      <a:noFill/>
-                    </a:lnB>
-                    <a:solidFill>
-                      <a:srgbClr val="FFFEF8"/>
-                    </a:solidFill>
-                  </a:tcPr>
-                </a:tc>
-                <a:tc>
-                  <a:txBody>
-                    <a:bodyPr wrap="square">
-                      <a:noAutofit/>
-                    </a:bodyPr>
-                    <a:lstStyle/>
-                    <a:p>
-                      <a:pPr algn="r">
-                        <a:lnSpc>
-                          <a:spcPts val="2012"/>
-                        </a:lnSpc>
-                        <a:buNone/>
-                        <a:defRPr sz="1750" b="0">
-                          <a:solidFill>
-                            <a:srgbClr val="303437"/>
-                          </a:solidFill>
-                          <a:latin typeface="Noto Sans"/>
-                        </a:defRPr>
-                      </a:pPr>
-                      <a:r>
-                        <a:rPr sz="1750" b="0" lang="ja-JP" altLang="en-US">
-                          <a:solidFill>
-                            <a:srgbClr val="303437"/>
-                          </a:solidFill>
-                          <a:latin typeface="Noto Sans"/>
-                          <a:ea typeface="Noto Sans CJK JP"/>
-                          <a:cs typeface="Noto Sans"/>
-                        </a:rPr>
-                        <a:t>68.75</a:t>
-                      </a:r>
-                    </a:p>
-                  </a:txBody>
-                  <a:tcPr marL="63500" marR="63500" marT="38100" marB="38100" anchor="ctr">
-                    <a:lnL w="7620">
-                      <a:noFill/>
-                    </a:lnL>
-                    <a:lnR w="7620">
-                      <a:noFill/>
-                    </a:lnR>
-                    <a:lnT w="7620">
-                      <a:noFill/>
-                    </a:lnT>
-                    <a:lnB w="7620">
-                      <a:noFill/>
-                    </a:lnB>
-                    <a:solidFill>
-                      <a:srgbClr val="FFFEF8"/>
-                    </a:solidFill>
-                  </a:tcPr>
-                </a:tc>
-              </a:tr>
-              <a:tr h="420624">
-                <a:tc>
-                  <a:txBody>
-                    <a:bodyPr wrap="square">
-                      <a:noAutofit/>
-                    </a:bodyPr>
-                    <a:lstStyle/>
-                    <a:p>
-                      <a:pPr algn="l">
-                        <a:lnSpc>
-                          <a:spcPts val="2012"/>
-                        </a:lnSpc>
-                        <a:buNone/>
-                        <a:defRPr sz="1750" b="0">
-                          <a:solidFill>
-                            <a:srgbClr val="303437"/>
-                          </a:solidFill>
-                          <a:latin typeface="Noto Sans"/>
-                        </a:defRPr>
-                      </a:pPr>
-                      <a:r>
-                        <a:rPr sz="1750" b="0" lang="ja-JP" altLang="en-US">
-                          <a:solidFill>
-                            <a:srgbClr val="303437"/>
-                          </a:solidFill>
-                          <a:latin typeface="Noto Sans"/>
-                          <a:ea typeface="Noto Sans CJK JP"/>
-                          <a:cs typeface="Noto Sans"/>
-                        </a:rPr>
-                        <a:t>役職</a:t>
-                      </a:r>
-                    </a:p>
-                  </a:txBody>
-                  <a:tcPr marL="63500" marR="63500" marT="38100" marB="38100" anchor="ctr">
-                    <a:lnL w="7620">
-                      <a:noFill/>
-                    </a:lnL>
-                    <a:lnR w="7620">
-                      <a:noFill/>
-                    </a:lnR>
-                    <a:lnT w="7620">
-                      <a:noFill/>
-                    </a:lnT>
-                    <a:lnB w="7620">
-                      <a:noFill/>
-                    </a:lnB>
-                    <a:solidFill>
-                      <a:srgbClr val="FFFEF8"/>
-                    </a:solidFill>
-                  </a:tcPr>
-                </a:tc>
-                <a:tc>
-                  <a:txBody>
-                    <a:bodyPr wrap="square">
-                      <a:noAutofit/>
-                    </a:bodyPr>
-                    <a:lstStyle/>
-                    <a:p>
-                      <a:pPr algn="r">
-                        <a:lnSpc>
-                          <a:spcPts val="2012"/>
-                        </a:lnSpc>
-                        <a:buNone/>
-                        <a:defRPr sz="1750" b="0">
-                          <a:solidFill>
-                            <a:srgbClr val="303437"/>
-                          </a:solidFill>
-                          <a:latin typeface="Noto Sans"/>
-                        </a:defRPr>
-                      </a:pPr>
-                      <a:r>
-                        <a:rPr sz="1750" b="0" lang="ja-JP" altLang="en-US">
-                          <a:solidFill>
-                            <a:srgbClr val="303437"/>
-                          </a:solidFill>
-                          <a:latin typeface="Noto Sans"/>
-                          <a:ea typeface="Noto Sans CJK JP"/>
-                          <a:cs typeface="Noto Sans"/>
-                        </a:rPr>
-                        <a:t>9.02</a:t>
-                      </a:r>
-                    </a:p>
-                  </a:txBody>
-                  <a:tcPr marL="63500" marR="63500" marT="38100" marB="38100" anchor="ctr">
-                    <a:lnL w="7620">
-                      <a:noFill/>
-                    </a:lnL>
-                    <a:lnR w="7620">
-                      <a:noFill/>
-                    </a:lnR>
-                    <a:lnT w="7620">
-                      <a:noFill/>
-                    </a:lnT>
-                    <a:lnB w="7620">
-                      <a:noFill/>
-                    </a:lnB>
-                    <a:solidFill>
-                      <a:srgbClr val="FFFEF8"/>
-                    </a:solidFill>
-                  </a:tcPr>
-                </a:tc>
-                <a:tc>
-                  <a:txBody>
-                    <a:bodyPr wrap="square">
-                      <a:noAutofit/>
-                    </a:bodyPr>
-                    <a:lstStyle/>
-                    <a:p>
-                      <a:pPr algn="r">
-                        <a:lnSpc>
-                          <a:spcPts val="2012"/>
-                        </a:lnSpc>
-                        <a:buNone/>
-                        <a:defRPr sz="1750" b="0">
-                          <a:solidFill>
-                            <a:srgbClr val="303437"/>
-                          </a:solidFill>
-                          <a:latin typeface="Noto Sans"/>
-                        </a:defRPr>
-                      </a:pPr>
-                      <a:r>
-                        <a:rPr sz="1750" b="0" lang="ja-JP" altLang="en-US">
-                          <a:solidFill>
-                            <a:srgbClr val="303437"/>
-                          </a:solidFill>
-                          <a:latin typeface="Noto Sans"/>
-                          <a:ea typeface="Noto Sans CJK JP"/>
-                          <a:cs typeface="Noto Sans"/>
-                        </a:rPr>
-                        <a:t>16.31</a:t>
-                      </a:r>
-                    </a:p>
-                  </a:txBody>
-                  <a:tcPr marL="63500" marR="63500" marT="38100" marB="38100" anchor="ctr">
-                    <a:lnL w="7620">
-                      <a:noFill/>
-                    </a:lnL>
-                    <a:lnR w="7620">
-                      <a:noFill/>
-                    </a:lnR>
-                    <a:lnT w="7620">
-                      <a:noFill/>
-                    </a:lnT>
-                    <a:lnB w="7620">
-                      <a:noFill/>
-                    </a:lnB>
-                    <a:solidFill>
-                      <a:srgbClr val="FFFEF8"/>
-                    </a:solidFill>
-                  </a:tcPr>
-                </a:tc>
-                <a:tc>
-                  <a:txBody>
-                    <a:bodyPr wrap="square">
-                      <a:noAutofit/>
-                    </a:bodyPr>
-                    <a:lstStyle/>
-                    <a:p>
-                      <a:pPr algn="r">
-                        <a:lnSpc>
-                          <a:spcPts val="2012"/>
-                        </a:lnSpc>
-                        <a:buNone/>
-                        <a:defRPr sz="1750" b="0">
-                          <a:solidFill>
-                            <a:srgbClr val="303437"/>
-                          </a:solidFill>
-                          <a:latin typeface="Noto Sans"/>
-                        </a:defRPr>
-                      </a:pPr>
-                      <a:r>
-                        <a:rPr sz="1750" b="0" lang="ja-JP" altLang="en-US">
-                          <a:solidFill>
-                            <a:srgbClr val="303437"/>
-                          </a:solidFill>
-                          <a:latin typeface="Noto Sans"/>
-                          <a:ea typeface="Noto Sans CJK JP"/>
-                          <a:cs typeface="Noto Sans"/>
-                        </a:rPr>
-                        <a:t>31.29</a:t>
-                      </a:r>
-                    </a:p>
-                  </a:txBody>
-                  <a:tcPr marL="63500" marR="63500" marT="38100" marB="38100" anchor="ctr">
-                    <a:lnL w="7620">
-                      <a:noFill/>
-                    </a:lnL>
-                    <a:lnR w="7620">
-                      <a:noFill/>
-                    </a:lnR>
-                    <a:lnT w="7620">
-                      <a:noFill/>
-                    </a:lnT>
-                    <a:lnB w="7620">
-                      <a:noFill/>
-                    </a:lnB>
-                    <a:solidFill>
-                      <a:srgbClr val="FFFEF8"/>
-                    </a:solidFill>
-                  </a:tcPr>
-                </a:tc>
-              </a:tr>
-              <a:tr h="420624">
-                <a:tc>
-                  <a:txBody>
-                    <a:bodyPr wrap="square">
-                      <a:noAutofit/>
-                    </a:bodyPr>
-                    <a:lstStyle/>
-                    <a:p>
-                      <a:pPr algn="l">
-                        <a:lnSpc>
-                          <a:spcPts val="2012"/>
-                        </a:lnSpc>
-                        <a:buNone/>
-                        <a:defRPr sz="1750" b="0">
-                          <a:solidFill>
-                            <a:srgbClr val="303437"/>
-                          </a:solidFill>
-                          <a:latin typeface="Noto Sans"/>
-                        </a:defRPr>
-                      </a:pPr>
-                      <a:r>
-                        <a:rPr sz="1750" b="0" lang="ja-JP" altLang="en-US">
-                          <a:solidFill>
-                            <a:srgbClr val="303437"/>
-                          </a:solidFill>
-                          <a:latin typeface="Noto Sans"/>
-                          <a:ea typeface="Noto Sans CJK JP"/>
-                          <a:cs typeface="Noto Sans"/>
-                        </a:rPr>
-                        <a:t>症状・徴候</a:t>
-                      </a:r>
-                    </a:p>
-                  </a:txBody>
-                  <a:tcPr marL="63500" marR="63500" marT="38100" marB="38100" anchor="ctr">
-                    <a:lnL w="7620">
-                      <a:noFill/>
-                    </a:lnL>
-                    <a:lnR w="7620">
-                      <a:noFill/>
-                    </a:lnR>
-                    <a:lnT w="7620">
-                      <a:noFill/>
-                    </a:lnT>
-                    <a:lnB w="15240">
-                      <a:solidFill>
-                        <a:srgbClr val="626669"/>
-                      </a:solidFill>
-                      <a:prstDash val="solid"/>
-                    </a:lnB>
-                    <a:solidFill>
-                      <a:srgbClr val="FFFEF8"/>
-                    </a:solidFill>
-                  </a:tcPr>
-                </a:tc>
-                <a:tc>
-                  <a:txBody>
-                    <a:bodyPr wrap="square">
-                      <a:noAutofit/>
-                    </a:bodyPr>
-                    <a:lstStyle/>
-                    <a:p>
-                      <a:pPr algn="r">
-                        <a:lnSpc>
-                          <a:spcPts val="2012"/>
-                        </a:lnSpc>
-                        <a:buNone/>
-                        <a:defRPr sz="1750" b="0">
-                          <a:solidFill>
-                            <a:srgbClr val="303437"/>
-                          </a:solidFill>
-                          <a:latin typeface="Noto Sans"/>
-                        </a:defRPr>
-                      </a:pPr>
-                      <a:r>
-                        <a:rPr sz="1750" b="0" lang="ja-JP" altLang="en-US">
-                          <a:solidFill>
-                            <a:srgbClr val="303437"/>
-                          </a:solidFill>
-                          <a:latin typeface="Noto Sans"/>
-                          <a:ea typeface="Noto Sans CJK JP"/>
-                          <a:cs typeface="Noto Sans"/>
-                        </a:rPr>
-                        <a:t>19.91</a:t>
-                      </a:r>
-                    </a:p>
-                  </a:txBody>
-                  <a:tcPr marL="63500" marR="63500" marT="38100" marB="38100" anchor="ctr">
-                    <a:lnL w="7620">
-                      <a:noFill/>
-                    </a:lnL>
-                    <a:lnR w="7620">
-                      <a:noFill/>
-                    </a:lnR>
-                    <a:lnT w="7620">
-                      <a:noFill/>
-                    </a:lnT>
-                    <a:lnB w="15240">
-                      <a:solidFill>
-                        <a:srgbClr val="626669"/>
-                      </a:solidFill>
-                      <a:prstDash val="solid"/>
-                    </a:lnB>
-                    <a:solidFill>
-                      <a:srgbClr val="FFFEF8"/>
-                    </a:solidFill>
-                  </a:tcPr>
-                </a:tc>
-                <a:tc>
-                  <a:txBody>
-                    <a:bodyPr wrap="square">
-                      <a:noAutofit/>
-                    </a:bodyPr>
-                    <a:lstStyle/>
-                    <a:p>
-                      <a:pPr algn="r">
-                        <a:lnSpc>
-                          <a:spcPts val="2012"/>
-                        </a:lnSpc>
-                        <a:buNone/>
-                        <a:defRPr sz="1750" b="0">
-                          <a:solidFill>
-                            <a:srgbClr val="303437"/>
-                          </a:solidFill>
-                          <a:latin typeface="Noto Sans"/>
-                        </a:defRPr>
-                      </a:pPr>
-                      <a:r>
-                        <a:rPr sz="1750" b="0" lang="ja-JP" altLang="en-US">
-                          <a:solidFill>
-                            <a:srgbClr val="303437"/>
-                          </a:solidFill>
-                          <a:latin typeface="Noto Sans"/>
-                          <a:ea typeface="Noto Sans CJK JP"/>
-                          <a:cs typeface="Noto Sans"/>
-                        </a:rPr>
-                        <a:t>28.45</a:t>
-                      </a:r>
-                    </a:p>
-                  </a:txBody>
-                  <a:tcPr marL="63500" marR="63500" marT="38100" marB="38100" anchor="ctr">
-                    <a:lnL w="7620">
-                      <a:noFill/>
-                    </a:lnL>
-                    <a:lnR w="7620">
-                      <a:noFill/>
-                    </a:lnR>
-                    <a:lnT w="7620">
-                      <a:noFill/>
-                    </a:lnT>
-                    <a:lnB w="15240">
-                      <a:solidFill>
-                        <a:srgbClr val="626669"/>
-                      </a:solidFill>
-                      <a:prstDash val="solid"/>
-                    </a:lnB>
-                    <a:solidFill>
-                      <a:srgbClr val="FFFEF8"/>
-                    </a:solidFill>
-                  </a:tcPr>
-                </a:tc>
-                <a:tc>
-                  <a:txBody>
-                    <a:bodyPr wrap="square">
-                      <a:noAutofit/>
-                    </a:bodyPr>
-                    <a:lstStyle/>
-                    <a:p>
-                      <a:pPr algn="r">
-                        <a:lnSpc>
-                          <a:spcPts val="2012"/>
-                        </a:lnSpc>
-                        <a:buNone/>
-                        <a:defRPr sz="1750" b="0">
-                          <a:solidFill>
-                            <a:srgbClr val="303437"/>
-                          </a:solidFill>
-                          <a:latin typeface="Noto Sans"/>
-                        </a:defRPr>
-                      </a:pPr>
-                      <a:r>
-                        <a:rPr sz="1750" b="0" lang="ja-JP" altLang="en-US">
-                          <a:solidFill>
-                            <a:srgbClr val="303437"/>
-                          </a:solidFill>
-                          <a:latin typeface="Noto Sans"/>
-                          <a:ea typeface="Noto Sans CJK JP"/>
-                          <a:cs typeface="Noto Sans"/>
-                        </a:rPr>
-                        <a:t>45.05</a:t>
-                      </a:r>
-                    </a:p>
-                  </a:txBody>
-                  <a:tcPr marL="63500" marR="63500" marT="38100" marB="38100" anchor="ctr">
-                    <a:lnL w="7620">
-                      <a:noFill/>
-                    </a:lnL>
-                    <a:lnR w="7620">
-                      <a:noFill/>
-                    </a:lnR>
-                    <a:lnT w="7620">
-                      <a:noFill/>
-                    </a:lnT>
-                    <a:lnB w="15240">
-                      <a:solidFill>
-                        <a:srgbClr val="626669"/>
-                      </a:solidFill>
-                      <a:prstDash val="solid"/>
-                    </a:lnB>
-                    <a:solidFill>
-                      <a:srgbClr val="FFFEF8"/>
-                    </a:solidFill>
-                  </a:tcPr>
-                </a:tc>
-              </a:tr>
-            </a:tbl>
-          </a:graphicData>
-        </a:graphic>
-      </p:graphicFrame>
-      <p:sp>
-        <p:nvSpPr>
-          <p:cNvPr id="5" name="TextBox 4"/>
-          <p:cNvSpPr txBox="1"/>
-          <p:nvPr/>
-        </p:nvSpPr>
-        <p:spPr>
-          <a:xfrm>
-            <a:off x="594360" y="4233672"/>
-            <a:ext cx="7955279" cy="658368"/>
-          </a:xfrm>
-          <a:prstGeom prst="rect">
-            <a:avLst/>
-          </a:prstGeom>
-          <a:noFill/>
-        </p:spPr>
-        <p:txBody>
-          <a:bodyPr wrap="square" lIns="0" rIns="0" tIns="0" bIns="0">
-            <a:noAutofit/>
-          </a:bodyPr>
-          <a:lstStyle/>
-          <a:p>
-            <a:pPr algn="l">
-              <a:lnSpc>
-                <a:spcPts val="2047"/>
-              </a:lnSpc>
-              <a:spcBef>
-                <a:spcPts val="0"/>
-              </a:spcBef>
-              <a:spcAft>
-                <a:spcPts val="0"/>
-              </a:spcAft>
-              <a:buNone/>
-              <a:defRPr sz="1750" b="0">
-                <a:solidFill>
-                  <a:srgbClr val="303437"/>
-                </a:solidFill>
-                <a:latin typeface="Noto Sans"/>
-              </a:defRPr>
-            </a:pPr>
-            <a:r>
-              <a:rPr sz="1750" b="0" lang="ja-JP" altLang="en-US">
-                <a:solidFill>
-                  <a:srgbClr val="303437"/>
-                </a:solidFill>
-                <a:latin typeface="Noto Sans"/>
-                <a:ea typeface="Noto Sans CJK JP"/>
-                <a:cs typeface="Noto Sans"/>
-              </a:rPr>
-              <a:t>単位は%。候補数は5／5／1、試行数は3／3／1。</a:t>
-            </a:r>
-          </a:p>
-        </p:txBody>
-      </p:sp>
-      <p:sp>
-        <p:nvSpPr>
-          <p:cNvPr id="6" name="sources"/>
-          <p:cNvSpPr txBox="1"/>
-          <p:nvPr/>
-        </p:nvSpPr>
-        <p:spPr>
-          <a:xfrm>
-            <a:off x="502920" y="4700016"/>
-            <a:ext cx="8183879" cy="530352"/>
-          </a:xfrm>
-          <a:prstGeom prst="rect">
-            <a:avLst/>
-          </a:prstGeom>
-          <a:noFill/>
-        </p:spPr>
-        <p:txBody>
-          <a:bodyPr wrap="square" lIns="0" rIns="0" tIns="0" bIns="0">
-            <a:noAutofit/>
-          </a:bodyPr>
-          <a:lstStyle/>
-          <a:p>
-            <a:pPr algn="l">
-              <a:lnSpc>
-                <a:spcPts val="940"/>
-              </a:lnSpc>
-              <a:spcBef>
-                <a:spcPts val="0"/>
-              </a:spcBef>
-              <a:spcAft>
-                <a:spcPts val="140"/>
-              </a:spcAft>
-              <a:buNone/>
-              <a:defRPr sz="810" b="0">
-                <a:solidFill>
-                  <a:srgbClr val="303437"/>
-                </a:solidFill>
-                <a:latin typeface="Noto Sans"/>
-              </a:defRPr>
-            </a:pPr>
-            <a:r>
-              <a:rPr sz="810" b="0" lang="ja-JP" altLang="en-US">
-                <a:solidFill>
-                  <a:srgbClr val="626669"/>
-                </a:solidFill>
-                <a:latin typeface="Noto Sans"/>
-                <a:ea typeface="Noto Sans CJK JP"/>
-                <a:cs typeface="Noto Sans"/>
-              </a:rPr>
-              <a:t>[1] Stanford CRFM. HELM Classic v0.4.0 — WikiFact（2023）。 </a:t>
-            </a:r>
-            <a:r>
-              <a:rPr sz="810" b="0" lang="ja-JP" altLang="en-US">
-                <a:solidFill>
-                  <a:srgbClr val="626669"/>
-                </a:solidFill>
-                <a:latin typeface="Noto Sans"/>
-                <a:ea typeface="Noto Sans CJK JP"/>
-                <a:cs typeface="Noto Sans"/>
-              </a:rPr>
-              <a:t>  </a:t>
-            </a:r>
-            <a:r>
-              <a:rPr sz="810" b="0" lang="ja-JP" altLang="en-US">
-                <a:solidFill>
-                  <a:srgbClr val="626669"/>
-                </a:solidFill>
-                <a:latin typeface="Noto Sans"/>
-                <a:ea typeface="Noto Sans CJK JP"/>
-                <a:cs typeface="Noto Sans"/>
-                <a:hlinkClick r:id="rId2"/>
-              </a:rPr>
-              <a:t>https://crfm.stanford.edu/helm/classic/v0.4.0/#/groups/wikifact</a:t>
-            </a:r>
-          </a:p>
-        </p:txBody>
-      </p:sp>
-    </p:spTree>
-  </p:cSld>
-  <p:clrMapOvr>
-    <a:masterClrMapping/>
-  </p:clrMapOvr>
-</p:sld>
-</file>
-
-<file path=ppt/slides/slide45.xml><?xml version="1.0" encoding="utf-8"?>
-<p:sld xmlns:a="http://schemas.openxmlformats.org/drawingml/2006/main" xmlns:p="http://schemas.openxmlformats.org/presentationml/2006/main" xmlns:r="http://schemas.openxmlformats.org/officeDocument/2006/relationships">
-  <p:cSld>
-    <p:spTree>
-      <p:nvGrpSpPr>
-        <p:cNvPr id="1" name=""/>
-        <p:cNvGrpSpPr/>
-        <p:nvPr/>
-      </p:nvGrpSpPr>
-      <p:grpSpPr/>
-      <p:sp>
-        <p:nvSpPr>
-          <p:cNvPr id="2" name="Title 1"/>
-          <p:cNvSpPr>
-            <a:spLocks noGrp="1"/>
-          </p:cNvSpPr>
-          <p:nvPr>
-            <p:ph type="title"/>
-          </p:nvPr>
-        </p:nvSpPr>
-        <p:spPr>
-          <a:xfrm>
-            <a:off x="468172" y="650138"/>
-            <a:ext cx="8206740" cy="616305"/>
-          </a:xfrm>
-        </p:spPr>
-        <p:txBody>
-          <a:bodyPr wrap="square" lIns="0" rIns="0" tIns="0" bIns="0">
-            <a:noAutofit/>
-          </a:bodyPr>
-          <a:lstStyle/>
-          <a:p>
-            <a:pPr algn="l">
-              <a:lnSpc>
-                <a:spcPct val="110000"/>
-              </a:lnSpc>
-              <a:buNone/>
-              <a:defRPr sz="2800" b="0">
-                <a:solidFill>
-                  <a:srgbClr val="303437"/>
-                </a:solidFill>
-                <a:latin typeface="Noto Sans"/>
-              </a:defRPr>
-            </a:pPr>
-            <a:r>
-              <a:rPr sz="2800" b="1" lang="ja-JP" altLang="en-US">
-                <a:solidFill>
-                  <a:srgbClr val="303437"/>
-                </a:solidFill>
-                <a:latin typeface="Noto Sans"/>
-                <a:ea typeface="Noto Sans CJK JP"/>
-                <a:cs typeface="Noto Sans"/>
-              </a:rPr>
-              <a:t>5候補のどれかが合えば正解となる評価</a:t>
-            </a:r>
-          </a:p>
-        </p:txBody>
-      </p:sp>
-      <p:sp>
-        <p:nvSpPr>
-          <p:cNvPr id="3" name="Title 2"/>
-          <p:cNvSpPr>
-            <a:spLocks noGrp="1"/>
-          </p:cNvSpPr>
-          <p:nvPr>
-            <p:ph type="title" idx="2"/>
-          </p:nvPr>
-        </p:nvSpPr>
-        <p:spPr>
-          <a:xfrm>
-            <a:off x="75895" y="0"/>
-            <a:ext cx="8115300" cy="480060"/>
-          </a:xfrm>
-        </p:spPr>
-        <p:txBody>
-          <a:bodyPr wrap="square" lIns="0" rIns="0" tIns="0" bIns="0" anchor="ctr">
-            <a:noAutofit/>
-          </a:bodyPr>
-          <a:lstStyle/>
-          <a:p>
-            <a:pPr algn="l">
-              <a:lnSpc>
-                <a:spcPct val="110000"/>
-              </a:lnSpc>
-              <a:buNone/>
-              <a:defRPr sz="1400" b="0">
-                <a:solidFill>
-                  <a:srgbClr val="303437"/>
-                </a:solidFill>
-                <a:latin typeface="Noto Sans"/>
-              </a:defRPr>
-            </a:pPr>
-            <a:r>
-              <a:rPr sz="1400" b="1" lang="ja-JP" altLang="en-US">
-                <a:solidFill>
-                  <a:srgbClr val="FFFEF8"/>
-                </a:solidFill>
-                <a:latin typeface="Noto Sans"/>
-                <a:ea typeface="Noto Sans CJK JP"/>
-                <a:cs typeface="Noto Sans"/>
-              </a:rPr>
-              <a:t>Appendix: 2. 関係別成績とデータの読込</a:t>
-            </a:r>
-          </a:p>
-        </p:txBody>
-      </p:sp>
-      <p:graphicFrame>
-        <p:nvGraphicFramePr>
-          <p:cNvPr id="4" name="Table 3"/>
-          <p:cNvGraphicFramePr>
-            <a:graphicFrameLocks noGrp="1"/>
-          </p:cNvGraphicFramePr>
-          <p:nvPr/>
-        </p:nvGraphicFramePr>
-        <p:xfrm>
-          <a:off x="548640" y="1508760"/>
-          <a:ext cx="8046720" cy="1612900"/>
-        </p:xfrm>
-        <a:graphic>
-          <a:graphicData uri="http://schemas.openxmlformats.org/drawingml/2006/table">
-            <a:tbl>
-              <a:tblPr firstRow="0" bandRow="0"/>
-              <a:tblGrid>
-                <a:gridCol w="3291840"/>
-                <a:gridCol w="2377440"/>
-                <a:gridCol w="2377440"/>
-              </a:tblGrid>
-              <a:tr h="698500">
-                <a:tc>
-                  <a:txBody>
-                    <a:bodyPr wrap="square">
-                      <a:noAutofit/>
-                    </a:bodyPr>
-                    <a:lstStyle/>
-                    <a:p>
-                      <a:pPr algn="l">
-                        <a:lnSpc>
-                          <a:spcPts val="2300"/>
-                        </a:lnSpc>
-                        <a:buNone/>
-                        <a:defRPr sz="2000" b="0">
-                          <a:solidFill>
-                            <a:srgbClr val="303437"/>
-                          </a:solidFill>
-                          <a:latin typeface="Noto Sans"/>
-                        </a:defRPr>
-                      </a:pPr>
-                      <a:r>
-                        <a:rPr sz="2000" b="0" lang="ja-JP" altLang="en-US">
-                          <a:solidFill>
-                            <a:srgbClr val="303437"/>
-                          </a:solidFill>
-                          <a:latin typeface="Noto Sans"/>
-                          <a:ea typeface="Noto Sans CJK JP"/>
-                          <a:cs typeface="Noto Sans"/>
-                        </a:rPr>
-                        <a:t>モデル</a:t>
-                      </a:r>
-                    </a:p>
-                  </a:txBody>
-                  <a:tcPr marL="63500" marR="63500" marT="38100" marB="38100" anchor="ctr">
-                    <a:lnL w="7620">
-                      <a:noFill/>
-                    </a:lnL>
-                    <a:lnR w="7620">
-                      <a:noFill/>
-                    </a:lnR>
-                    <a:lnT w="15240">
-                      <a:solidFill>
-                        <a:srgbClr val="626669"/>
-                      </a:solidFill>
-                      <a:prstDash val="solid"/>
-                    </a:lnT>
-                    <a:lnB w="7620">
-                      <a:solidFill>
-                        <a:srgbClr val="626669"/>
-                      </a:solidFill>
-                      <a:prstDash val="solid"/>
-                    </a:lnB>
-                    <a:solidFill>
-                      <a:srgbClr val="FFFEF8"/>
-                    </a:solidFill>
-                  </a:tcPr>
-                </a:tc>
-                <a:tc>
-                  <a:txBody>
-                    <a:bodyPr wrap="square">
-                      <a:noAutofit/>
-                    </a:bodyPr>
-                    <a:lstStyle/>
-                    <a:p>
-                      <a:pPr algn="r">
-                        <a:lnSpc>
-                          <a:spcPts val="2300"/>
-                        </a:lnSpc>
-                        <a:buNone/>
-                        <a:defRPr sz="2000" b="0">
-                          <a:solidFill>
-                            <a:srgbClr val="303437"/>
-                          </a:solidFill>
-                          <a:latin typeface="Noto Sans"/>
-                        </a:defRPr>
-                      </a:pPr>
-                      <a:r>
-                        <a:rPr sz="2000" b="0" lang="ja-JP" altLang="en-US">
-                          <a:solidFill>
-                            <a:srgbClr val="303437"/>
-                          </a:solidFill>
-                          <a:latin typeface="Noto Sans"/>
-                          <a:ea typeface="Noto Sans CJK JP"/>
-                          <a:cs typeface="Noto Sans"/>
-                        </a:rPr>
-                        <a:t>Accuracy@1（%）</a:t>
-                      </a:r>
-                    </a:p>
-                  </a:txBody>
-                  <a:tcPr marL="63500" marR="63500" marT="38100" marB="38100" anchor="ctr">
-                    <a:lnL w="7620">
-                      <a:noFill/>
-                    </a:lnL>
-                    <a:lnR w="7620">
-                      <a:noFill/>
-                    </a:lnR>
-                    <a:lnT w="15240">
-                      <a:solidFill>
-                        <a:srgbClr val="626669"/>
-                      </a:solidFill>
-                      <a:prstDash val="solid"/>
-                    </a:lnT>
-                    <a:lnB w="7620">
-                      <a:solidFill>
-                        <a:srgbClr val="626669"/>
-                      </a:solidFill>
-                      <a:prstDash val="solid"/>
-                    </a:lnB>
-                    <a:solidFill>
-                      <a:srgbClr val="FFFEF8"/>
-                    </a:solidFill>
-                  </a:tcPr>
-                </a:tc>
-                <a:tc>
-                  <a:txBody>
-                    <a:bodyPr wrap="square">
-                      <a:noAutofit/>
-                    </a:bodyPr>
-                    <a:lstStyle/>
-                    <a:p>
-                      <a:pPr algn="r">
-                        <a:lnSpc>
-                          <a:spcPts val="2300"/>
-                        </a:lnSpc>
-                        <a:buNone/>
-                        <a:defRPr sz="2000" b="0">
-                          <a:solidFill>
-                            <a:srgbClr val="303437"/>
-                          </a:solidFill>
-                          <a:latin typeface="Noto Sans"/>
-                        </a:defRPr>
-                      </a:pPr>
-                      <a:r>
-                        <a:rPr sz="2000" b="0" lang="ja-JP" altLang="en-US">
-                          <a:solidFill>
-                            <a:srgbClr val="303437"/>
-                          </a:solidFill>
-                          <a:latin typeface="Noto Sans"/>
-                          <a:ea typeface="Noto Sans CJK JP"/>
-                          <a:cs typeface="Noto Sans"/>
-                        </a:rPr>
-                        <a:t>Accuracy@5（%）</a:t>
-                      </a:r>
-                    </a:p>
-                  </a:txBody>
-                  <a:tcPr marL="63500" marR="63500" marT="38100" marB="38100" anchor="ctr">
-                    <a:lnL w="7620">
-                      <a:noFill/>
-                    </a:lnL>
-                    <a:lnR w="7620">
-                      <a:noFill/>
-                    </a:lnR>
-                    <a:lnT w="15240">
-                      <a:solidFill>
-                        <a:srgbClr val="626669"/>
-                      </a:solidFill>
-                      <a:prstDash val="solid"/>
-                    </a:lnT>
-                    <a:lnB w="7620">
-                      <a:solidFill>
-                        <a:srgbClr val="626669"/>
-                      </a:solidFill>
-                      <a:prstDash val="solid"/>
-                    </a:lnB>
-                    <a:solidFill>
-                      <a:srgbClr val="FFFEF8"/>
-                    </a:solidFill>
-                  </a:tcPr>
-                </a:tc>
-              </a:tr>
-              <a:tr h="457200">
-                <a:tc>
-                  <a:txBody>
-                    <a:bodyPr wrap="square">
-                      <a:noAutofit/>
-                    </a:bodyPr>
-                    <a:lstStyle/>
-                    <a:p>
-                      <a:pPr algn="l">
-                        <a:lnSpc>
-                          <a:spcPts val="2300"/>
-                        </a:lnSpc>
-                        <a:buNone/>
-                        <a:defRPr sz="2000" b="0">
-                          <a:solidFill>
-                            <a:srgbClr val="303437"/>
-                          </a:solidFill>
-                          <a:latin typeface="Noto Sans"/>
-                        </a:defRPr>
-                      </a:pPr>
-                      <a:r>
-                        <a:rPr sz="2000" b="0" lang="ja-JP" altLang="en-US">
-                          <a:solidFill>
-                            <a:srgbClr val="303437"/>
-                          </a:solidFill>
-                          <a:latin typeface="Noto Sans"/>
-                          <a:ea typeface="Noto Sans CJK JP"/>
-                          <a:cs typeface="Noto Sans"/>
-                        </a:rPr>
-                        <a:t>OPT-175B</a:t>
-                      </a:r>
-                    </a:p>
-                  </a:txBody>
-                  <a:tcPr marL="63500" marR="63500" marT="38100" marB="38100" anchor="ctr">
-                    <a:lnL w="7620">
-                      <a:noFill/>
-                    </a:lnL>
-                    <a:lnR w="7620">
-                      <a:noFill/>
-                    </a:lnR>
-                    <a:lnT w="7620">
-                      <a:solidFill>
-                        <a:srgbClr val="626669"/>
-                      </a:solidFill>
-                      <a:prstDash val="solid"/>
-                    </a:lnT>
-                    <a:lnB w="7620">
-                      <a:noFill/>
-                    </a:lnB>
-                    <a:solidFill>
-                      <a:srgbClr val="FFFEF8"/>
-                    </a:solidFill>
-                  </a:tcPr>
-                </a:tc>
-                <a:tc>
-                  <a:txBody>
-                    <a:bodyPr wrap="square">
-                      <a:noAutofit/>
-                    </a:bodyPr>
-                    <a:lstStyle/>
-                    <a:p>
-                      <a:pPr algn="r">
-                        <a:lnSpc>
-                          <a:spcPts val="2300"/>
-                        </a:lnSpc>
-                        <a:buNone/>
-                        <a:defRPr sz="2000" b="0">
-                          <a:solidFill>
-                            <a:srgbClr val="303437"/>
-                          </a:solidFill>
-                          <a:latin typeface="Noto Sans"/>
-                        </a:defRPr>
-                      </a:pPr>
-                      <a:r>
-                        <a:rPr sz="2000" b="0" lang="ja-JP" altLang="en-US">
-                          <a:solidFill>
-                            <a:srgbClr val="303437"/>
-                          </a:solidFill>
-                          <a:latin typeface="Noto Sans"/>
-                          <a:ea typeface="Noto Sans CJK JP"/>
-                          <a:cs typeface="Noto Sans"/>
-                        </a:rPr>
-                        <a:t>22.03</a:t>
-                      </a:r>
-                    </a:p>
-                  </a:txBody>
-                  <a:tcPr marL="63500" marR="63500" marT="38100" marB="38100" anchor="ctr">
-                    <a:lnL w="7620">
-                      <a:noFill/>
-                    </a:lnL>
-                    <a:lnR w="7620">
-                      <a:noFill/>
-                    </a:lnR>
-                    <a:lnT w="7620">
-                      <a:solidFill>
-                        <a:srgbClr val="626669"/>
-                      </a:solidFill>
-                      <a:prstDash val="solid"/>
-                    </a:lnT>
-                    <a:lnB w="7620">
-                      <a:noFill/>
-                    </a:lnB>
-                    <a:solidFill>
-                      <a:srgbClr val="FFFEF8"/>
-                    </a:solidFill>
-                  </a:tcPr>
-                </a:tc>
-                <a:tc>
-                  <a:txBody>
-                    <a:bodyPr wrap="square">
-                      <a:noAutofit/>
-                    </a:bodyPr>
-                    <a:lstStyle/>
-                    <a:p>
-                      <a:pPr algn="r">
-                        <a:lnSpc>
-                          <a:spcPts val="2300"/>
-                        </a:lnSpc>
-                        <a:buNone/>
-                        <a:defRPr sz="2000" b="0">
-                          <a:solidFill>
-                            <a:srgbClr val="303437"/>
-                          </a:solidFill>
-                          <a:latin typeface="Noto Sans"/>
-                        </a:defRPr>
-                      </a:pPr>
-                      <a:r>
-                        <a:rPr sz="2000" b="0" lang="ja-JP" altLang="en-US">
-                          <a:solidFill>
-                            <a:srgbClr val="303437"/>
-                          </a:solidFill>
-                          <a:latin typeface="Noto Sans"/>
-                          <a:ea typeface="Noto Sans CJK JP"/>
-                          <a:cs typeface="Noto Sans"/>
-                        </a:rPr>
-                        <a:t>32.28</a:t>
-                      </a:r>
-                    </a:p>
-                  </a:txBody>
-                  <a:tcPr marL="63500" marR="63500" marT="38100" marB="38100" anchor="ctr">
-                    <a:lnL w="7620">
-                      <a:noFill/>
-                    </a:lnL>
-                    <a:lnR w="7620">
-                      <a:noFill/>
-                    </a:lnR>
-                    <a:lnT w="7620">
-                      <a:solidFill>
-                        <a:srgbClr val="626669"/>
-                      </a:solidFill>
-                      <a:prstDash val="solid"/>
-                    </a:lnT>
-                    <a:lnB w="7620">
-                      <a:noFill/>
-                    </a:lnB>
-                    <a:solidFill>
-                      <a:srgbClr val="FFFEF8"/>
-                    </a:solidFill>
-                  </a:tcPr>
-                </a:tc>
-              </a:tr>
-              <a:tr h="457200">
-                <a:tc>
-                  <a:txBody>
-                    <a:bodyPr wrap="square">
-                      <a:noAutofit/>
-                    </a:bodyPr>
-                    <a:lstStyle/>
-                    <a:p>
-                      <a:pPr algn="l">
-                        <a:lnSpc>
-                          <a:spcPts val="2300"/>
-                        </a:lnSpc>
-                        <a:buNone/>
-                        <a:defRPr sz="2000" b="0">
-                          <a:solidFill>
-                            <a:srgbClr val="303437"/>
-                          </a:solidFill>
-                          <a:latin typeface="Noto Sans"/>
-                        </a:defRPr>
-                      </a:pPr>
-                      <a:r>
-                        <a:rPr sz="2000" b="0" lang="ja-JP" altLang="en-US">
-                          <a:solidFill>
-                            <a:srgbClr val="303437"/>
-                          </a:solidFill>
-                          <a:latin typeface="Noto Sans"/>
-                          <a:ea typeface="Noto Sans CJK JP"/>
-                          <a:cs typeface="Noto Sans"/>
-                        </a:rPr>
-                        <a:t>text-davinci-003</a:t>
-                      </a:r>
-                    </a:p>
-                  </a:txBody>
-                  <a:tcPr marL="63500" marR="63500" marT="38100" marB="38100" anchor="ctr">
-                    <a:lnL w="7620">
-                      <a:noFill/>
-                    </a:lnL>
-                    <a:lnR w="7620">
-                      <a:noFill/>
-                    </a:lnR>
-                    <a:lnT w="7620">
-                      <a:noFill/>
-                    </a:lnT>
-                    <a:lnB w="15240">
-                      <a:solidFill>
-                        <a:srgbClr val="626669"/>
-                      </a:solidFill>
-                      <a:prstDash val="solid"/>
-                    </a:lnB>
-                    <a:solidFill>
-                      <a:srgbClr val="FFFEF8"/>
-                    </a:solidFill>
-                  </a:tcPr>
-                </a:tc>
-                <a:tc>
-                  <a:txBody>
-                    <a:bodyPr wrap="square">
-                      <a:noAutofit/>
-                    </a:bodyPr>
-                    <a:lstStyle/>
-                    <a:p>
-                      <a:pPr algn="r">
-                        <a:lnSpc>
-                          <a:spcPts val="2300"/>
-                        </a:lnSpc>
-                        <a:buNone/>
-                        <a:defRPr sz="2000" b="0">
-                          <a:solidFill>
-                            <a:srgbClr val="303437"/>
-                          </a:solidFill>
-                          <a:latin typeface="Noto Sans"/>
-                        </a:defRPr>
-                      </a:pPr>
-                      <a:r>
-                        <a:rPr sz="2000" b="0" lang="ja-JP" altLang="en-US">
-                          <a:solidFill>
-                            <a:srgbClr val="303437"/>
-                          </a:solidFill>
-                          <a:latin typeface="Noto Sans"/>
-                          <a:ea typeface="Noto Sans CJK JP"/>
-                          <a:cs typeface="Noto Sans"/>
-                        </a:rPr>
-                        <a:t>37.34</a:t>
-                      </a:r>
-                    </a:p>
-                  </a:txBody>
-                  <a:tcPr marL="63500" marR="63500" marT="38100" marB="38100" anchor="ctr">
-                    <a:lnL w="7620">
-                      <a:noFill/>
-                    </a:lnL>
-                    <a:lnR w="7620">
-                      <a:noFill/>
-                    </a:lnR>
-                    <a:lnT w="7620">
-                      <a:noFill/>
-                    </a:lnT>
-                    <a:lnB w="15240">
-                      <a:solidFill>
-                        <a:srgbClr val="626669"/>
-                      </a:solidFill>
-                      <a:prstDash val="solid"/>
-                    </a:lnB>
-                    <a:solidFill>
-                      <a:srgbClr val="FFFEF8"/>
-                    </a:solidFill>
-                  </a:tcPr>
-                </a:tc>
-                <a:tc>
-                  <a:txBody>
-                    <a:bodyPr wrap="square">
-                      <a:noAutofit/>
-                    </a:bodyPr>
-                    <a:lstStyle/>
-                    <a:p>
-                      <a:pPr algn="r">
-                        <a:lnSpc>
-                          <a:spcPts val="2300"/>
-                        </a:lnSpc>
-                        <a:buNone/>
-                        <a:defRPr sz="2000" b="0">
-                          <a:solidFill>
-                            <a:srgbClr val="303437"/>
-                          </a:solidFill>
-                          <a:latin typeface="Noto Sans"/>
-                        </a:defRPr>
-                      </a:pPr>
-                      <a:r>
-                        <a:rPr sz="2000" b="0" lang="ja-JP" altLang="en-US">
-                          <a:solidFill>
-                            <a:srgbClr val="303437"/>
-                          </a:solidFill>
-                          <a:latin typeface="Noto Sans"/>
-                          <a:ea typeface="Noto Sans CJK JP"/>
-                          <a:cs typeface="Noto Sans"/>
-                        </a:rPr>
-                        <a:t>44.03</a:t>
-                      </a:r>
-                    </a:p>
-                  </a:txBody>
-                  <a:tcPr marL="63500" marR="63500" marT="38100" marB="38100" anchor="ctr">
-                    <a:lnL w="7620">
-                      <a:noFill/>
-                    </a:lnL>
-                    <a:lnR w="7620">
-                      <a:noFill/>
-                    </a:lnR>
-                    <a:lnT w="7620">
-                      <a:noFill/>
-                    </a:lnT>
-                    <a:lnB w="15240">
-                      <a:solidFill>
-                        <a:srgbClr val="626669"/>
-                      </a:solidFill>
-                      <a:prstDash val="solid"/>
-                    </a:lnB>
-                    <a:solidFill>
-                      <a:srgbClr val="FFFEF8"/>
-                    </a:solidFill>
-                  </a:tcPr>
-                </a:tc>
-              </a:tr>
-            </a:tbl>
-          </a:graphicData>
-        </a:graphic>
-      </p:graphicFrame>
-      <p:sp>
-        <p:nvSpPr>
-          <p:cNvPr id="5" name="TextBox 4"/>
-          <p:cNvSpPr txBox="1"/>
-          <p:nvPr/>
-        </p:nvSpPr>
-        <p:spPr>
-          <a:xfrm>
-            <a:off x="594360" y="3322828"/>
-            <a:ext cx="7955279" cy="658368"/>
-          </a:xfrm>
-          <a:prstGeom prst="rect">
-            <a:avLst/>
-          </a:prstGeom>
-          <a:noFill/>
-        </p:spPr>
-        <p:txBody>
-          <a:bodyPr wrap="square" lIns="0" rIns="0" tIns="0" bIns="0">
-            <a:noAutofit/>
-          </a:bodyPr>
-          <a:lstStyle/>
-          <a:p>
-            <a:pPr algn="l">
-              <a:lnSpc>
-                <a:spcPts val="2047"/>
-              </a:lnSpc>
-              <a:spcBef>
-                <a:spcPts val="0"/>
-              </a:spcBef>
-              <a:spcAft>
-                <a:spcPts val="0"/>
-              </a:spcAft>
-              <a:buNone/>
-              <a:defRPr sz="1750" b="0">
-                <a:solidFill>
-                  <a:srgbClr val="303437"/>
-                </a:solidFill>
-                <a:latin typeface="Noto Sans"/>
-              </a:defRPr>
-            </a:pPr>
-            <a:r>
-              <a:rPr sz="1750" b="0" lang="ja-JP" altLang="en-US">
-                <a:solidFill>
-                  <a:srgbClr val="303437"/>
-                </a:solidFill>
-                <a:latin typeface="Noto Sans"/>
-                <a:ea typeface="Noto Sans CJK JP"/>
-                <a:cs typeface="Noto Sans"/>
-              </a:rPr>
-              <a:t>10関係を同じ重みで平均し、3試行を平均した値。</a:t>
-            </a:r>
-          </a:p>
-        </p:txBody>
-      </p:sp>
-      <p:sp>
-        <p:nvSpPr>
-          <p:cNvPr id="6" name="sources"/>
-          <p:cNvSpPr txBox="1"/>
-          <p:nvPr/>
-        </p:nvSpPr>
-        <p:spPr>
-          <a:xfrm>
-            <a:off x="502920" y="4700016"/>
-            <a:ext cx="8183879" cy="530352"/>
-          </a:xfrm>
-          <a:prstGeom prst="rect">
-            <a:avLst/>
-          </a:prstGeom>
-          <a:noFill/>
-        </p:spPr>
-        <p:txBody>
-          <a:bodyPr wrap="square" lIns="0" rIns="0" tIns="0" bIns="0">
-            <a:noAutofit/>
-          </a:bodyPr>
-          <a:lstStyle/>
-          <a:p>
-            <a:pPr algn="l">
-              <a:lnSpc>
-                <a:spcPts val="940"/>
-              </a:lnSpc>
-              <a:spcBef>
-                <a:spcPts val="0"/>
-              </a:spcBef>
-              <a:spcAft>
-                <a:spcPts val="140"/>
-              </a:spcAft>
-              <a:buNone/>
-              <a:defRPr sz="810" b="0">
-                <a:solidFill>
-                  <a:srgbClr val="303437"/>
-                </a:solidFill>
-                <a:latin typeface="Noto Sans"/>
-              </a:defRPr>
-            </a:pPr>
-            <a:r>
-              <a:rPr sz="810" b="0" lang="ja-JP" altLang="en-US">
-                <a:solidFill>
-                  <a:srgbClr val="626669"/>
-                </a:solidFill>
-                <a:latin typeface="Noto Sans"/>
-                <a:ea typeface="Noto Sans CJK JP"/>
-                <a:cs typeface="Noto Sans"/>
-              </a:rPr>
-              <a:t>[1] Stanford CRFM. HELM Classic v0.4.0 — WikiFact（2023）。 </a:t>
-            </a:r>
-            <a:r>
-              <a:rPr sz="810" b="0" lang="ja-JP" altLang="en-US">
-                <a:solidFill>
-                  <a:srgbClr val="626669"/>
-                </a:solidFill>
-                <a:latin typeface="Noto Sans"/>
-                <a:ea typeface="Noto Sans CJK JP"/>
-                <a:cs typeface="Noto Sans"/>
-              </a:rPr>
-              <a:t>  </a:t>
-            </a:r>
-            <a:r>
-              <a:rPr sz="810" b="0" lang="ja-JP" altLang="en-US">
-                <a:solidFill>
-                  <a:srgbClr val="626669"/>
-                </a:solidFill>
-                <a:latin typeface="Noto Sans"/>
-                <a:ea typeface="Noto Sans CJK JP"/>
-                <a:cs typeface="Noto Sans"/>
-                <a:hlinkClick r:id="rId2"/>
-              </a:rPr>
-              <a:t>https://crfm.stanford.edu/helm/classic/v0.4.0/#/groups/wikifact</a:t>
+              <a:t>Appendix: 2. 公開例のデータ形式</a:t>
             </a:r>
           </a:p>
         </p:txBody>
@@ -28696,7 +20880,7 @@
                 <a:ea typeface="Noto Sans CJK JP"/>
                 <a:cs typeface="Noto Sans"/>
               </a:rPr>
-              <a:t>公開実行のJSONから、入力と参照を読む</a:t>
+              <a:t>公開例のJSONから、入力と参照を読む</a:t>
             </a:r>
           </a:p>
         </p:txBody>
@@ -28744,7 +20928,7 @@
                 <a:ea typeface="Noto Sans CJK JP"/>
                 <a:cs typeface="Noto Sans"/>
               </a:rPr>
-              <a:t>Appendix: 2. 関係別成績とデータの読込</a:t>
+              <a:t>Appendix: 2. 公開例のデータ形式</a:t>
             </a:r>
           </a:p>
         </p:txBody>
@@ -28798,7 +20982,7 @@
                 <a:ea typeface="Noto Sans CJK JP"/>
                 <a:cs typeface="Noto Sans"/>
               </a:rPr>
-              <a:t>scenario_state.jsonは、公式HELMの公開実行に付随するJSONファイル。各問の入力、参照回答、モデル出力を収める。</a:t>
+              <a:t>scenario_state.jsonは、公開された評価記録のJSON。各問の入力、参照回答、モデル出力を収める。</a:t>
             </a:r>
           </a:p>
         </p:txBody>
@@ -28852,7 +21036,7 @@
                 <a:ea typeface="Noto Sans CJK JP"/>
                 <a:cs typeface="Noto Sans"/>
               </a:rPr>
-              <a:t>[1] Stanford CRFM. HELM WIKIFactScenario。 </a:t>
+              <a:t>[1] Stanford CRFM (2023). WikiFact — 公開入力・参照回答。 </a:t>
             </a:r>
           </a:p>
           <a:p>
@@ -28878,7 +21062,7 @@
                 <a:cs typeface="Noto Sans"/>
                 <a:hlinkClick r:id="rId2"/>
               </a:rPr>
-              <a:t>https://github.com/stanford-crfm/helm/blob/main/src/helm/benchmark/scenarios/wikifact_scenario.py</a:t>
+              <a:t>https://crfm.stanford.edu/helm/classic/v0.4.0/#/groups/wikifact</a:t>
             </a:r>
           </a:p>
         </p:txBody>
@@ -29351,277 +21535,32 @@
               <a:t>モデルは「作品の著者は」「国の通貨は」といった文の続きを生成する。根拠となる文章を与えず、モデルが覚えている事実を名前として答えられるかを測る。</a:t>
             </a:r>
           </a:p>
-        </p:txBody>
-      </p:sp>
-      <p:sp>
-        <p:nvSpPr>
-          <p:cNvPr id="5" name="sources"/>
-          <p:cNvSpPr txBox="1"/>
-          <p:nvPr/>
-        </p:nvSpPr>
-        <p:spPr>
-          <a:xfrm>
-            <a:off x="502920" y="4700016"/>
-            <a:ext cx="8183879" cy="530352"/>
-          </a:xfrm>
-          <a:prstGeom prst="rect">
-            <a:avLst/>
-          </a:prstGeom>
-          <a:noFill/>
-        </p:spPr>
-        <p:txBody>
-          <a:bodyPr wrap="square" lIns="0" rIns="0" tIns="0" bIns="0">
-            <a:noAutofit/>
-          </a:bodyPr>
-          <a:lstStyle/>
-          <a:p>
-            <a:pPr algn="l">
-              <a:lnSpc>
-                <a:spcPts val="940"/>
-              </a:lnSpc>
-              <a:spcBef>
-                <a:spcPts val="0"/>
-              </a:spcBef>
-              <a:spcAft>
-                <a:spcPts val="140"/>
-              </a:spcAft>
-              <a:buNone/>
-              <a:defRPr sz="810" b="0">
-                <a:solidFill>
-                  <a:srgbClr val="303437"/>
-                </a:solidFill>
-                <a:latin typeface="Noto Sans"/>
-              </a:defRPr>
-            </a:pPr>
-            <a:r>
-              <a:rPr sz="810" b="0" lang="ja-JP" altLang="en-US">
-                <a:solidFill>
-                  <a:srgbClr val="626669"/>
-                </a:solidFill>
-                <a:latin typeface="Noto Sans"/>
-                <a:ea typeface="Noto Sans CJK JP"/>
-                <a:cs typeface="Noto Sans"/>
-              </a:rPr>
-              <a:t>[1] Liang et al. (2023), Holistic Evaluation of Language Models. Transactions on Machine Learning Research.</a:t>
-            </a:r>
-            <a:r>
-              <a:rPr sz="810" b="0" lang="ja-JP" altLang="en-US">
-                <a:solidFill>
-                  <a:srgbClr val="626669"/>
-                </a:solidFill>
-                <a:latin typeface="Noto Sans"/>
-                <a:ea typeface="Noto Sans CJK JP"/>
-                <a:cs typeface="Noto Sans"/>
-              </a:rPr>
-              <a:t>  </a:t>
-            </a:r>
-            <a:r>
-              <a:rPr sz="810" b="0" lang="ja-JP" altLang="en-US">
-                <a:solidFill>
-                  <a:srgbClr val="626669"/>
-                </a:solidFill>
-                <a:latin typeface="Noto Sans"/>
-                <a:ea typeface="Noto Sans CJK JP"/>
-                <a:cs typeface="Noto Sans"/>
-                <a:hlinkClick r:id="rId2"/>
-              </a:rPr>
-              <a:t>https://arxiv.org/abs/2211.09110</a:t>
-            </a:r>
-          </a:p>
-        </p:txBody>
-      </p:sp>
-    </p:spTree>
-  </p:cSld>
-  <p:clrMapOvr>
-    <a:masterClrMapping/>
-  </p:clrMapOvr>
-</p:sld>
-</file>
-
-<file path=ppt/slides/slide50.xml><?xml version="1.0" encoding="utf-8"?>
-<p:sld xmlns:a="http://schemas.openxmlformats.org/drawingml/2006/main" xmlns:p="http://schemas.openxmlformats.org/presentationml/2006/main" xmlns:r="http://schemas.openxmlformats.org/officeDocument/2006/relationships">
-  <p:cSld>
-    <p:spTree>
-      <p:nvGrpSpPr>
-        <p:cNvPr id="1" name=""/>
-        <p:cNvGrpSpPr/>
-        <p:nvPr/>
-      </p:nvGrpSpPr>
-      <p:grpSpPr/>
-      <p:sp>
-        <p:nvSpPr>
-          <p:cNvPr id="2" name="Title 1"/>
-          <p:cNvSpPr>
-            <a:spLocks noGrp="1"/>
-          </p:cNvSpPr>
-          <p:nvPr>
-            <p:ph type="title"/>
-          </p:nvPr>
-        </p:nvSpPr>
-        <p:spPr>
-          <a:xfrm>
-            <a:off x="468172" y="650138"/>
-            <a:ext cx="8206740" cy="616305"/>
-          </a:xfrm>
-        </p:spPr>
-        <p:txBody>
-          <a:bodyPr wrap="square" lIns="0" rIns="0" tIns="0" bIns="0">
-            <a:noAutofit/>
-          </a:bodyPr>
-          <a:lstStyle/>
-          <a:p>
-            <a:pPr algn="l">
-              <a:lnSpc>
-                <a:spcPct val="110000"/>
-              </a:lnSpc>
-              <a:buNone/>
-              <a:defRPr sz="2800" b="0">
-                <a:solidFill>
-                  <a:srgbClr val="303437"/>
-                </a:solidFill>
-                <a:latin typeface="Noto Sans"/>
-              </a:defRPr>
-            </a:pPr>
-            <a:r>
-              <a:rPr sz="2800" b="1" lang="ja-JP" altLang="en-US">
-                <a:solidFill>
-                  <a:srgbClr val="303437"/>
-                </a:solidFill>
-                <a:latin typeface="Noto Sans"/>
-                <a:ea typeface="Noto Sans CJK JP"/>
-                <a:cs typeface="Noto Sans"/>
-              </a:rPr>
-              <a:t>専門領域まで広げた、HELMの事実知識評価</a:t>
-            </a:r>
-          </a:p>
-        </p:txBody>
-      </p:sp>
-      <p:sp>
-        <p:nvSpPr>
-          <p:cNvPr id="3" name="Title 2"/>
-          <p:cNvSpPr>
-            <a:spLocks noGrp="1"/>
-          </p:cNvSpPr>
-          <p:nvPr>
-            <p:ph type="title" idx="2"/>
-          </p:nvPr>
-        </p:nvSpPr>
-        <p:spPr>
-          <a:xfrm>
-            <a:off x="75895" y="0"/>
-            <a:ext cx="8115300" cy="480060"/>
-          </a:xfrm>
-        </p:spPr>
-        <p:txBody>
-          <a:bodyPr wrap="square" lIns="0" rIns="0" tIns="0" bIns="0" anchor="ctr">
-            <a:noAutofit/>
-          </a:bodyPr>
-          <a:lstStyle/>
-          <a:p>
-            <a:pPr algn="l">
-              <a:lnSpc>
-                <a:spcPct val="110000"/>
-              </a:lnSpc>
-              <a:buNone/>
-              <a:defRPr sz="1400" b="0">
-                <a:solidFill>
-                  <a:srgbClr val="303437"/>
-                </a:solidFill>
-                <a:latin typeface="Noto Sans"/>
-              </a:defRPr>
-            </a:pPr>
-            <a:r>
-              <a:rPr sz="1400" b="1" lang="ja-JP" altLang="en-US">
-                <a:solidFill>
-                  <a:srgbClr val="FFFEF8"/>
-                </a:solidFill>
-                <a:latin typeface="Noto Sans"/>
-                <a:ea typeface="Noto Sans CJK JP"/>
-                <a:cs typeface="Noto Sans"/>
-              </a:rPr>
-              <a:t>Appendix: 3. 研究と参考文献</a:t>
-            </a:r>
-          </a:p>
-        </p:txBody>
-      </p:sp>
-      <p:sp>
-        <p:nvSpPr>
-          <p:cNvPr id="4" name="TextBox 3"/>
-          <p:cNvSpPr txBox="1"/>
-          <p:nvPr/>
-        </p:nvSpPr>
-        <p:spPr>
-          <a:xfrm>
-            <a:off x="594360" y="1463040"/>
-            <a:ext cx="7955279" cy="3044952"/>
-          </a:xfrm>
-          <a:prstGeom prst="rect">
-            <a:avLst/>
-          </a:prstGeom>
-          <a:noFill/>
-        </p:spPr>
-        <p:txBody>
-          <a:bodyPr wrap="square" lIns="0" rIns="0" tIns="0" bIns="0">
-            <a:noAutofit/>
-          </a:bodyPr>
-          <a:lstStyle/>
-          <a:p>
-            <a:pPr algn="l">
-              <a:lnSpc>
-                <a:spcPts val="2439"/>
-              </a:lnSpc>
-              <a:spcBef>
-                <a:spcPts val="0"/>
-              </a:spcBef>
-              <a:spcAft>
-                <a:spcPts val="1200"/>
-              </a:spcAft>
-              <a:buNone/>
-              <a:defRPr sz="2050" b="0">
-                <a:solidFill>
-                  <a:srgbClr val="303437"/>
-                </a:solidFill>
-                <a:latin typeface="Noto Sans"/>
-              </a:defRPr>
-            </a:pPr>
-            <a:r>
-              <a:rPr sz="2050" b="0" lang="ja-JP" altLang="en-US">
-                <a:solidFill>
-                  <a:srgbClr val="303437"/>
-                </a:solidFill>
-                <a:latin typeface="Noto Sans"/>
-                <a:ea typeface="Noto Sans CJK JP"/>
-                <a:cs typeface="Noto Sans"/>
-              </a:rPr>
-              <a:t>WikiFactは、HELMの事実知識評価のために新しく作られた。Hongyu Ren、Lucia Zheng、Michihiro Yasunagaらが制作に参加した。</a:t>
-            </a:r>
-          </a:p>
           <a:p>
             <a:pPr>
               <a:lnSpc>
-                <a:spcPts val="2439"/>
-              </a:lnSpc>
-              <a:spcAft>
-                <a:spcPts val="1200"/>
-              </a:spcAft>
-              <a:buNone/>
-              <a:defRPr sz="2050" b="0">
-                <a:solidFill>
-                  <a:srgbClr val="303437"/>
-                </a:solidFill>
-                <a:latin typeface="Noto Sans"/>
-              </a:defRPr>
-            </a:pPr>
-            <a:r>
-              <a:rPr sz="2050" b="0" lang="ja-JP" altLang="en-US">
-                <a:solidFill>
-                  <a:srgbClr val="303437"/>
-                </a:solidFill>
-                <a:latin typeface="Noto Sans"/>
-                <a:ea typeface="Noto Sans CJK JP"/>
-                <a:cs typeface="Noto Sans"/>
-              </a:rPr>
-              <a:t>文の補完というLAMAの形式を受け継ぎ、法律・経済・生物医学など幅広い分野へ対象を広げた。</a:t>
+                <a:spcPts val="2499"/>
+              </a:lnSpc>
+              <a:spcAft>
+                <a:spcPts val="0"/>
+              </a:spcAft>
+              <a:buNone/>
+              <a:defRPr sz="2100" b="0">
+                <a:solidFill>
+                  <a:srgbClr val="303437"/>
+                </a:solidFill>
+                <a:latin typeface="Noto Sans"/>
+              </a:defRPr>
+            </a:pPr>
+            <a:r>
+              <a:rPr sz="2100" b="0" lang="ja-JP" altLang="en-US">
+                <a:solidFill>
+                  <a:srgbClr val="303437"/>
+                </a:solidFill>
+                <a:latin typeface="Noto Sans"/>
+                <a:ea typeface="Noto Sans CJK JP"/>
+                <a:cs typeface="Noto Sans"/>
+              </a:rPr>
+              <a:t>Stanford CRFMを中心とする研究チームが2022年に設計した。</a:t>
             </a:r>
           </a:p>
         </p:txBody>
@@ -30276,7 +22215,7 @@
                 <a:ea typeface="Noto Sans CJK JP"/>
                 <a:cs typeface="Noto Sans"/>
               </a:rPr>
-              <a:t>HELM Classic — WikiFact</a:t>
+              <a:t>WikiFact</a:t>
             </a:r>
           </a:p>
           <a:p>
@@ -30307,7 +22246,7 @@
                 <a:ea typeface="Noto Sans CJK JP"/>
                 <a:cs typeface="Noto Sans"/>
               </a:rPr>
-              <a:t>Stanford CRFM (2023). v0.4.0（2023-11-17）。参照2026-10-18。</a:t>
+              <a:t>Stanford CRFM (2023). 公開入力・参照回答。参照2026-10-18。</a:t>
             </a:r>
           </a:p>
           <a:p>
@@ -30338,7 +22277,7 @@
                 <a:ea typeface="Noto Sans CJK JP"/>
                 <a:cs typeface="Noto Sans"/>
               </a:rPr>
-              <a:t>関係別・モデル別の公開成績と予測記録をまとめる。</a:t>
+              <a:t>関係ごとの入力、参照回答、既存モデル出力を閲覧できる。</a:t>
             </a:r>
           </a:p>
           <a:p>
@@ -30424,7 +22363,7 @@
                 <a:ea typeface="Noto Sans CJK JP"/>
                 <a:cs typeface="Noto Sans"/>
               </a:rPr>
-              <a:t>HELM WIKIFactScenario</a:t>
+              <a:t>WIKIFactScenario</a:t>
             </a:r>
           </a:p>
           <a:p>
@@ -30455,7 +22394,7 @@
                 <a:ea typeface="Noto Sans CJK JP"/>
                 <a:cs typeface="Noto Sans"/>
               </a:rPr>
-              <a:t>Stanford CRFM (n.d.). 公開実装。参照2026-10-18。</a:t>
+              <a:t>Stanford CRFM (n.d.). 公開読込実装。参照2026-10-18。</a:t>
             </a:r>
           </a:p>
           <a:p>
@@ -30714,7 +22653,7 @@
                 <a:ea typeface="Noto Sans CJK JP"/>
                 <a:cs typeface="Noto Sans"/>
               </a:rPr>
-              <a:t>正解となる対象の名前や別名のいずれかに一致すれば正解とする。次の3例は、公開実行の入力と参照回答の全文である。</a:t>
+              <a:t>正解となる対象の名前や別名のいずれかに一致すれば正解とする。次の3例は、公開されている入力と参照回答の全文である。</a:t>
             </a:r>
           </a:p>
         </p:txBody>
@@ -31462,7 +23401,7 @@
                 <a:ea typeface="Noto Sans CJK JP"/>
                 <a:cs typeface="Noto Sans"/>
               </a:rPr>
-              <a:t>[1] Stanford CRFM. HELM Classic v0.4.0 — WikiFact（2023）。 </a:t>
+              <a:t>[1] Stanford CRFM (2023). WikiFact — 公開入力・参照回答。 </a:t>
             </a:r>
           </a:p>
           <a:p>
@@ -32128,7 +24067,7 @@
                 <a:ea typeface="Noto Sans CJK JP"/>
                 <a:cs typeface="Noto Sans"/>
               </a:rPr>
-              <a:t>[1] Stanford CRFM. HELM Classic v0.4.0 — WikiFact（2023）。 </a:t>
+              <a:t>[1] Stanford CRFM (2023). WikiFact — 公開入力・参照回答。 </a:t>
             </a:r>
           </a:p>
           <a:p>
@@ -32794,7 +24733,7 @@
                 <a:ea typeface="Noto Sans CJK JP"/>
                 <a:cs typeface="Noto Sans"/>
               </a:rPr>
-              <a:t>[1] Stanford CRFM. HELM Classic v0.4.0 — WikiFact（2023）。 </a:t>
+              <a:t>[1] Stanford CRFM (2023). WikiFact — 公開入力・参照回答。 </a:t>
             </a:r>
           </a:p>
           <a:p>
